--- a/IrenaSK- Fraud Detection -Final Project.pptx
+++ b/IrenaSK- Fraud Detection -Final Project.pptx
@@ -31,18 +31,19 @@
     <p:embeddedFont>
       <p:font typeface="Work Sans" pitchFamily="2" charset="0"/>
       <p:regular r:id="rId18"/>
+      <p:bold r:id="rId19"/>
     </p:embeddedFont>
     <p:embeddedFont>
-      <p:font typeface="Work Sans Bold" panose="020B0604020202020204" charset="0"/>
-      <p:regular r:id="rId19"/>
+      <p:font typeface="Work Sans Bold" charset="0"/>
+      <p:regular r:id="rId20"/>
     </p:embeddedFont>
     <p:embeddedFont>
       <p:font typeface="Work Sans Italics" panose="020B0604020202020204" charset="0"/>
-      <p:regular r:id="rId20"/>
+      <p:regular r:id="rId21"/>
     </p:embeddedFont>
     <p:embeddedFont>
       <p:font typeface="Work Sans Semi-Bold" panose="020B0604020202020204" charset="0"/>
-      <p:regular r:id="rId21"/>
+      <p:regular r:id="rId22"/>
     </p:embeddedFont>
   </p:embeddedFontLst>
   <p:defaultTextStyle>
@@ -339,7 +340,7 @@
             <a:fld id="{1D8BD707-D9CF-40AE-B4C6-C98DA3205C09}" type="datetimeFigureOut">
               <a:rPr lang="en-US" smtClean="0"/>
               <a:pPr/>
-              <a:t>3/6/2026</a:t>
+              <a:t>3/22/2026</a:t>
             </a:fld>
             <a:endParaRPr lang="en-US"/>
           </a:p>
@@ -504,7 +505,7 @@
             <a:fld id="{1D8BD707-D9CF-40AE-B4C6-C98DA3205C09}" type="datetimeFigureOut">
               <a:rPr lang="en-US" smtClean="0"/>
               <a:pPr/>
-              <a:t>3/6/2026</a:t>
+              <a:t>3/22/2026</a:t>
             </a:fld>
             <a:endParaRPr lang="en-US"/>
           </a:p>
@@ -679,7 +680,7 @@
             <a:fld id="{1D8BD707-D9CF-40AE-B4C6-C98DA3205C09}" type="datetimeFigureOut">
               <a:rPr lang="en-US" smtClean="0"/>
               <a:pPr/>
-              <a:t>3/6/2026</a:t>
+              <a:t>3/22/2026</a:t>
             </a:fld>
             <a:endParaRPr lang="en-US"/>
           </a:p>
@@ -844,7 +845,7 @@
             <a:fld id="{1D8BD707-D9CF-40AE-B4C6-C98DA3205C09}" type="datetimeFigureOut">
               <a:rPr lang="en-US" smtClean="0"/>
               <a:pPr/>
-              <a:t>3/6/2026</a:t>
+              <a:t>3/22/2026</a:t>
             </a:fld>
             <a:endParaRPr lang="en-US"/>
           </a:p>
@@ -1086,7 +1087,7 @@
             <a:fld id="{1D8BD707-D9CF-40AE-B4C6-C98DA3205C09}" type="datetimeFigureOut">
               <a:rPr lang="en-US" smtClean="0"/>
               <a:pPr/>
-              <a:t>3/6/2026</a:t>
+              <a:t>3/22/2026</a:t>
             </a:fld>
             <a:endParaRPr lang="en-US"/>
           </a:p>
@@ -1368,7 +1369,7 @@
             <a:fld id="{1D8BD707-D9CF-40AE-B4C6-C98DA3205C09}" type="datetimeFigureOut">
               <a:rPr lang="en-US" smtClean="0"/>
               <a:pPr/>
-              <a:t>3/6/2026</a:t>
+              <a:t>3/22/2026</a:t>
             </a:fld>
             <a:endParaRPr lang="en-US"/>
           </a:p>
@@ -1784,7 +1785,7 @@
             <a:fld id="{1D8BD707-D9CF-40AE-B4C6-C98DA3205C09}" type="datetimeFigureOut">
               <a:rPr lang="en-US" smtClean="0"/>
               <a:pPr/>
-              <a:t>3/6/2026</a:t>
+              <a:t>3/22/2026</a:t>
             </a:fld>
             <a:endParaRPr lang="en-US"/>
           </a:p>
@@ -1898,7 +1899,7 @@
             <a:fld id="{1D8BD707-D9CF-40AE-B4C6-C98DA3205C09}" type="datetimeFigureOut">
               <a:rPr lang="en-US" smtClean="0"/>
               <a:pPr/>
-              <a:t>3/6/2026</a:t>
+              <a:t>3/22/2026</a:t>
             </a:fld>
             <a:endParaRPr lang="en-US"/>
           </a:p>
@@ -1990,7 +1991,7 @@
             <a:fld id="{1D8BD707-D9CF-40AE-B4C6-C98DA3205C09}" type="datetimeFigureOut">
               <a:rPr lang="en-US" smtClean="0"/>
               <a:pPr/>
-              <a:t>3/6/2026</a:t>
+              <a:t>3/22/2026</a:t>
             </a:fld>
             <a:endParaRPr lang="en-US"/>
           </a:p>
@@ -2262,7 +2263,7 @@
             <a:fld id="{1D8BD707-D9CF-40AE-B4C6-C98DA3205C09}" type="datetimeFigureOut">
               <a:rPr lang="en-US" smtClean="0"/>
               <a:pPr/>
-              <a:t>3/6/2026</a:t>
+              <a:t>3/22/2026</a:t>
             </a:fld>
             <a:endParaRPr lang="en-US"/>
           </a:p>
@@ -2511,7 +2512,7 @@
             <a:fld id="{1D8BD707-D9CF-40AE-B4C6-C98DA3205C09}" type="datetimeFigureOut">
               <a:rPr lang="en-US" smtClean="0"/>
               <a:pPr/>
-              <a:t>3/6/2026</a:t>
+              <a:t>3/22/2026</a:t>
             </a:fld>
             <a:endParaRPr lang="en-US"/>
           </a:p>
@@ -2719,7 +2720,7 @@
             <a:fld id="{1D8BD707-D9CF-40AE-B4C6-C98DA3205C09}" type="datetimeFigureOut">
               <a:rPr lang="en-US" smtClean="0"/>
               <a:pPr/>
-              <a:t>3/6/2026</a:t>
+              <a:t>3/22/2026</a:t>
             </a:fld>
             <a:endParaRPr lang="en-US"/>
           </a:p>
@@ -3198,6 +3199,13 @@
               </a:stretch>
             </a:blipFill>
           </p:spPr>
+          <p:txBody>
+            <a:bodyPr/>
+            <a:lstStyle/>
+            <a:p>
+              <a:endParaRPr lang="en-IL"/>
+            </a:p>
+          </p:txBody>
         </p:sp>
       </p:grpSp>
       <p:grpSp>
@@ -3299,6 +3307,13 @@
               </a:stretch>
             </a:blipFill>
           </p:spPr>
+          <p:txBody>
+            <a:bodyPr/>
+            <a:lstStyle/>
+            <a:p>
+              <a:endParaRPr lang="en-IL"/>
+            </a:p>
+          </p:txBody>
         </p:sp>
       </p:grpSp>
       <p:sp>
@@ -3310,7 +3325,7 @@
         <p:spPr>
           <a:xfrm>
             <a:off x="666750" y="7697701"/>
-            <a:ext cx="8747254" cy="2101215"/>
+            <a:ext cx="8747254" cy="1668277"/>
           </a:xfrm>
           <a:prstGeom prst="rect">
             <a:avLst/>
@@ -3328,7 +3343,7 @@
               </a:lnSpc>
             </a:pPr>
             <a:r>
-              <a:rPr lang="en-US" sz="2550" b="1" spc="-140">
+              <a:rPr lang="en-US" sz="2550" b="1" spc="-140" dirty="0">
                 <a:solidFill>
                   <a:srgbClr val="CFD8DC"/>
                 </a:solidFill>
@@ -3347,7 +3362,7 @@
               </a:lnSpc>
             </a:pPr>
             <a:r>
-              <a:rPr lang="en-US" sz="2550" spc="-140">
+              <a:rPr lang="en-US" sz="2550" spc="-140" dirty="0">
                 <a:solidFill>
                   <a:srgbClr val="CFD8DC"/>
                 </a:solidFill>
@@ -3360,13 +3375,13 @@
             </a:r>
           </a:p>
           <a:p>
-            <a:pPr algn="l">
+            <a:pPr>
               <a:lnSpc>
                 <a:spcPts val="3315"/>
               </a:lnSpc>
             </a:pPr>
             <a:r>
-              <a:rPr lang="en-US" sz="2550" spc="-140">
+              <a:rPr lang="en-US" sz="2550" spc="-140" dirty="0">
                 <a:solidFill>
                   <a:srgbClr val="CFD8DC"/>
                 </a:solidFill>
@@ -3378,44 +3393,80 @@
               <a:t>GitHub: </a:t>
             </a:r>
             <a:r>
-              <a:rPr lang="en-US" sz="2550" u="sng" spc="-140">
-                <a:solidFill>
-                  <a:srgbClr val="FFFFFF"/>
+              <a:rPr lang="en-US" sz="2550" spc="-140" dirty="0">
+                <a:solidFill>
+                  <a:schemeClr val="bg1"/>
                 </a:solidFill>
                 <a:latin typeface="Work Sans"/>
                 <a:ea typeface="Work Sans"/>
                 <a:cs typeface="Work Sans"/>
                 <a:sym typeface="Work Sans"/>
-                <a:hlinkClick r:id="rId4" tooltip="https://github.com/irishask/ML_Fraud_detection"/>
-              </a:rPr>
-              <a:t>github.com/irishask/ieee-cis-fraud-detection</a:t>
-            </a:r>
-          </a:p>
-          <a:p>
-            <a:pPr algn="l">
-              <a:lnSpc>
-                <a:spcPts val="3315"/>
-              </a:lnSpc>
-            </a:pPr>
-            <a:endParaRPr lang="en-US" sz="2550" u="sng" spc="-140">
+                <a:hlinkClick r:id="rId4">
+                  <a:extLst>
+                    <a:ext uri="{A12FA001-AC4F-418D-AE19-62706E023703}">
+                      <ahyp:hlinkClr xmlns:ahyp="http://schemas.microsoft.com/office/drawing/2018/hyperlinkcolor" val="tx"/>
+                    </a:ext>
+                  </a:extLst>
+                </a:hlinkClick>
+              </a:rPr>
+              <a:t>github.com/</a:t>
+            </a:r>
+            <a:r>
+              <a:rPr lang="en-US" sz="2550" spc="-140" dirty="0" err="1">
+                <a:solidFill>
+                  <a:schemeClr val="bg1"/>
+                </a:solidFill>
+                <a:latin typeface="Work Sans"/>
+                <a:ea typeface="Work Sans"/>
+                <a:cs typeface="Work Sans"/>
+                <a:sym typeface="Work Sans"/>
+                <a:hlinkClick r:id="rId4">
+                  <a:extLst>
+                    <a:ext uri="{A12FA001-AC4F-418D-AE19-62706E023703}">
+                      <ahyp:hlinkClr xmlns:ahyp="http://schemas.microsoft.com/office/drawing/2018/hyperlinkcolor" val="tx"/>
+                    </a:ext>
+                  </a:extLst>
+                </a:hlinkClick>
+              </a:rPr>
+              <a:t>irishask</a:t>
+            </a:r>
+            <a:r>
+              <a:rPr lang="en-US" sz="2550" spc="-140" dirty="0">
+                <a:solidFill>
+                  <a:schemeClr val="bg1"/>
+                </a:solidFill>
+                <a:latin typeface="Work Sans"/>
+                <a:ea typeface="Work Sans"/>
+                <a:cs typeface="Work Sans"/>
+                <a:sym typeface="Work Sans"/>
+                <a:hlinkClick r:id="rId4">
+                  <a:extLst>
+                    <a:ext uri="{A12FA001-AC4F-418D-AE19-62706E023703}">
+                      <ahyp:hlinkClr xmlns:ahyp="http://schemas.microsoft.com/office/drawing/2018/hyperlinkcolor" val="tx"/>
+                    </a:ext>
+                  </a:extLst>
+                </a:hlinkClick>
+              </a:rPr>
+              <a:t>/ML_Fraud_detection </a:t>
+            </a:r>
+            <a:endParaRPr lang="en-US" sz="2550" spc="-140" dirty="0">
               <a:solidFill>
-                <a:srgbClr val="FFFFFF"/>
+                <a:schemeClr val="bg1"/>
               </a:solidFill>
               <a:latin typeface="Work Sans"/>
               <a:ea typeface="Work Sans"/>
               <a:cs typeface="Work Sans"/>
               <a:sym typeface="Work Sans"/>
-              <a:hlinkClick r:id="rId4" tooltip="https://github.com/irishask/ML_Fraud_detection"/>
             </a:endParaRPr>
           </a:p>
           <a:p>
-            <a:pPr marL="0" lvl="0" indent="0" algn="l">
+            <a:pPr>
               <a:lnSpc>
                 <a:spcPts val="3315"/>
               </a:lnSpc>
             </a:pPr>
             <a:r>
-              <a:rPr lang="en-US" sz="2550" spc="-140">
+              <a:rPr lang="en-US" sz="2550" spc="-140" dirty="0">
                 <a:solidFill>
                   <a:srgbClr val="CFD8DC"/>
                 </a:solidFill>
@@ -3581,8 +3632,8 @@
         </p:nvSpPr>
         <p:spPr>
           <a:xfrm>
-            <a:off x="7743361" y="6240357"/>
-            <a:ext cx="10296546" cy="3899817"/>
+            <a:off x="8763000" y="7036361"/>
+            <a:ext cx="9263073" cy="3160268"/>
           </a:xfrm>
           <a:custGeom>
             <a:avLst/>
@@ -3618,6 +3669,13 @@
             </a:stretch>
           </a:blipFill>
         </p:spPr>
+        <p:txBody>
+          <a:bodyPr/>
+          <a:lstStyle/>
+          <a:p>
+            <a:endParaRPr lang="en-IL"/>
+          </a:p>
+        </p:txBody>
       </p:sp>
       <p:pic>
         <p:nvPicPr>
@@ -3635,8 +3693,8 @@
         </p:blipFill>
         <p:spPr>
           <a:xfrm>
-            <a:off x="13145033" y="6767503"/>
-            <a:ext cx="2228501" cy="1577481"/>
+            <a:off x="13639800" y="7810500"/>
+            <a:ext cx="1219200" cy="863031"/>
           </a:xfrm>
           <a:prstGeom prst="rect">
             <a:avLst/>
@@ -3651,15 +3709,15 @@
         </p:nvSpPr>
         <p:spPr>
           <a:xfrm>
-            <a:off x="437444" y="3424881"/>
-            <a:ext cx="10539066" cy="2454275"/>
+            <a:off x="300027" y="3365933"/>
+            <a:ext cx="17392087" cy="3670428"/>
           </a:xfrm>
           <a:prstGeom prst="rect">
             <a:avLst/>
           </a:prstGeom>
         </p:spPr>
         <p:txBody>
-          <a:bodyPr lIns="0" tIns="0" rIns="0" bIns="0" rtlCol="0" anchor="t">
+          <a:bodyPr wrap="square" lIns="0" tIns="0" rIns="0" bIns="0" rtlCol="0" anchor="t">
             <a:spAutoFit/>
           </a:bodyPr>
           <a:lstStyle/>
@@ -3673,7 +3731,7 @@
               </a:spcBef>
             </a:pPr>
             <a:r>
-              <a:rPr lang="en-US" sz="2499" b="1" strike="noStrike" spc="-137">
+              <a:rPr lang="en-US" sz="2499" b="1" strike="noStrike" spc="-137" dirty="0">
                 <a:solidFill>
                   <a:srgbClr val="38B6FF"/>
                 </a:solidFill>
@@ -3682,7 +3740,7 @@
                 <a:cs typeface="Work Sans Bold"/>
                 <a:sym typeface="Work Sans Bold"/>
               </a:rPr>
-              <a:t>Each model tuned independently - </a:t>
+              <a:t>Each model tuned independently - different hyperparameters, different sensitivities</a:t>
             </a:r>
           </a:p>
           <a:p>
@@ -3695,29 +3753,26 @@
               </a:spcBef>
             </a:pPr>
             <a:r>
-              <a:rPr lang="en-US" sz="2499" b="1" strike="noStrike" spc="-137">
+              <a:rPr lang="en-US" sz="2499" b="1" spc="-137" dirty="0">
                 <a:solidFill>
                   <a:srgbClr val="38B6FF"/>
                 </a:solidFill>
                 <a:latin typeface="Work Sans Bold"/>
-                <a:ea typeface="Work Sans Bold"/>
-                <a:cs typeface="Work Sans Bold"/>
-                <a:sym typeface="Work Sans Bold"/>
-              </a:rPr>
-              <a:t>different hyperparameters, different sensitivities</a:t>
-            </a:r>
-            <a:r>
-              <a:rPr lang="en-US" sz="2499" strike="noStrike" spc="-137">
-                <a:solidFill>
-                  <a:srgbClr val="FFFFFF"/>
-                </a:solidFill>
-                <a:latin typeface="Work Sans"/>
                 <a:ea typeface="Work Sans"/>
                 <a:cs typeface="Work Sans"/>
-                <a:sym typeface="Work Sans"/>
-              </a:rPr>
-              <a:t>.</a:t>
-            </a:r>
+                <a:sym typeface="Work Sans Bold"/>
+              </a:rPr>
+              <a:t>V2:</a:t>
+            </a:r>
+            <a:endParaRPr lang="en-US" sz="2499" strike="noStrike" spc="-137" dirty="0">
+              <a:solidFill>
+                <a:srgbClr val="FFFFFF"/>
+              </a:solidFill>
+              <a:latin typeface="Work Sans"/>
+              <a:ea typeface="Work Sans"/>
+              <a:cs typeface="Work Sans"/>
+              <a:sym typeface="Work Sans"/>
+            </a:endParaRPr>
           </a:p>
           <a:p>
             <a:pPr marL="539749" lvl="1" indent="-269875" algn="l">
@@ -3731,7 +3786,7 @@
               <a:buChar char="•"/>
             </a:pPr>
             <a:r>
-              <a:rPr lang="en-US" sz="2499" strike="noStrike" spc="-137">
+              <a:rPr lang="en-US" sz="2499" strike="noStrike" spc="-137" dirty="0" err="1">
                 <a:solidFill>
                   <a:srgbClr val="FFFFFF"/>
                 </a:solidFill>
@@ -3740,11 +3795,47 @@
                 <a:cs typeface="Work Sans"/>
                 <a:sym typeface="Work Sans"/>
               </a:rPr>
-              <a:t>LightGBM — med_high (75 trials, 75% data, ~10h)</a:t>
-            </a:r>
-          </a:p>
-          <a:p>
-            <a:pPr marL="539749" lvl="1" indent="-269875" algn="l">
+              <a:t>LightGBM</a:t>
+            </a:r>
+            <a:r>
+              <a:rPr lang="en-US" sz="2499" strike="noStrike" spc="-137" dirty="0">
+                <a:solidFill>
+                  <a:srgbClr val="FFFFFF"/>
+                </a:solidFill>
+                <a:latin typeface="Work Sans"/>
+                <a:ea typeface="Work Sans"/>
+                <a:cs typeface="Work Sans"/>
+                <a:sym typeface="Work Sans"/>
+              </a:rPr>
+              <a:t> V2 — </a:t>
+            </a:r>
+            <a:r>
+              <a:rPr lang="en-US" sz="2499" strike="noStrike" spc="-137" dirty="0" err="1">
+                <a:solidFill>
+                  <a:srgbClr val="FFFFFF"/>
+                </a:solidFill>
+                <a:latin typeface="Work Sans"/>
+                <a:ea typeface="Work Sans"/>
+                <a:cs typeface="Work Sans"/>
+                <a:sym typeface="Work Sans"/>
+              </a:rPr>
+              <a:t>med_high</a:t>
+            </a:r>
+            <a:r>
+              <a:rPr lang="en-US" sz="2499" strike="noStrike" spc="-137" dirty="0">
+                <a:solidFill>
+                  <a:srgbClr val="FFFFFF"/>
+                </a:solidFill>
+                <a:latin typeface="Work Sans"/>
+                <a:ea typeface="Work Sans"/>
+                <a:cs typeface="Work Sans"/>
+                <a:sym typeface="Work Sans"/>
+              </a:rPr>
+              <a:t> for ROC AUC optimization (75 trials, 75% data, up to ~8-10h)</a:t>
+            </a:r>
+          </a:p>
+          <a:p>
+            <a:pPr marL="539749" lvl="1" indent="-269875">
               <a:lnSpc>
                 <a:spcPts val="3249"/>
               </a:lnSpc>
@@ -3755,7 +3846,7 @@
               <a:buChar char="•"/>
             </a:pPr>
             <a:r>
-              <a:rPr lang="en-US" sz="2499" strike="noStrike" spc="-137">
+              <a:rPr lang="en-US" sz="2499" strike="noStrike" spc="-137" dirty="0" err="1">
                 <a:solidFill>
                   <a:srgbClr val="FFFFFF"/>
                 </a:solidFill>
@@ -3764,11 +3855,47 @@
                 <a:cs typeface="Work Sans"/>
                 <a:sym typeface="Work Sans"/>
               </a:rPr>
-              <a:t>XGBoost — med (50 trials, 50% data, ~3h)</a:t>
-            </a:r>
-          </a:p>
-          <a:p>
-            <a:pPr marL="539749" lvl="1" indent="-269875" algn="l">
+              <a:t>XGBoost</a:t>
+            </a:r>
+            <a:r>
+              <a:rPr lang="en-US" sz="2499" strike="noStrike" spc="-137" dirty="0">
+                <a:solidFill>
+                  <a:srgbClr val="FFFFFF"/>
+                </a:solidFill>
+                <a:latin typeface="Work Sans"/>
+                <a:ea typeface="Work Sans"/>
+                <a:cs typeface="Work Sans"/>
+                <a:sym typeface="Work Sans"/>
+              </a:rPr>
+              <a:t>   — </a:t>
+            </a:r>
+            <a:r>
+              <a:rPr lang="en-US" sz="2499" spc="-137" dirty="0" err="1">
+                <a:solidFill>
+                  <a:srgbClr val="FFFFFF"/>
+                </a:solidFill>
+                <a:latin typeface="Work Sans"/>
+                <a:ea typeface="Work Sans"/>
+                <a:cs typeface="Work Sans"/>
+                <a:sym typeface="Work Sans"/>
+              </a:rPr>
+              <a:t>med_high</a:t>
+            </a:r>
+            <a:r>
+              <a:rPr lang="en-US" sz="2499" spc="-137" dirty="0">
+                <a:solidFill>
+                  <a:srgbClr val="FFFFFF"/>
+                </a:solidFill>
+                <a:latin typeface="Work Sans"/>
+                <a:ea typeface="Work Sans"/>
+                <a:cs typeface="Work Sans"/>
+                <a:sym typeface="Work Sans"/>
+              </a:rPr>
+              <a:t> (75 trials, 75% data, up to ~10h)</a:t>
+            </a:r>
+          </a:p>
+          <a:p>
+            <a:pPr marL="539749" lvl="1" indent="-269875">
               <a:lnSpc>
                 <a:spcPts val="3249"/>
               </a:lnSpc>
@@ -3779,7 +3906,7 @@
               <a:buChar char="•"/>
             </a:pPr>
             <a:r>
-              <a:rPr lang="en-US" sz="2499" strike="noStrike" spc="-137">
+              <a:rPr lang="en-US" sz="2499" strike="noStrike" spc="-137" dirty="0" err="1">
                 <a:solidFill>
                   <a:srgbClr val="FFFFFF"/>
                 </a:solidFill>
@@ -3788,7 +3915,40 @@
                 <a:cs typeface="Work Sans"/>
                 <a:sym typeface="Work Sans"/>
               </a:rPr>
-              <a:t>CatBoost excluded — Optuna killed after ~10h at ~50% completion</a:t>
+              <a:t>CatBoost</a:t>
+            </a:r>
+            <a:r>
+              <a:rPr lang="en-US" sz="2499" strike="noStrike" spc="-137" dirty="0">
+                <a:solidFill>
+                  <a:srgbClr val="FFFFFF"/>
+                </a:solidFill>
+                <a:latin typeface="Work Sans"/>
+                <a:ea typeface="Work Sans"/>
+                <a:cs typeface="Work Sans"/>
+                <a:sym typeface="Work Sans"/>
+              </a:rPr>
+              <a:t> </a:t>
+            </a:r>
+            <a:r>
+              <a:rPr lang="en-US" sz="2499" spc="-137" dirty="0">
+                <a:solidFill>
+                  <a:srgbClr val="FFFFFF"/>
+                </a:solidFill>
+                <a:latin typeface="Work Sans"/>
+              </a:rPr>
+              <a:t>removed from pipeline (see Experiments slide) </a:t>
+            </a:r>
+            <a:r>
+              <a:rPr lang="en-US" sz="2499" strike="noStrike" spc="-137" dirty="0">
+                <a:solidFill>
+                  <a:srgbClr val="FFFFFF"/>
+                </a:solidFill>
+                <a:latin typeface="Work Sans"/>
+                <a:ea typeface="Work Sans"/>
+                <a:cs typeface="Work Sans"/>
+                <a:sym typeface="Work Sans"/>
+              </a:rPr>
+              <a:t>Optuna killed after ~10h at ~50% completion</a:t>
             </a:r>
           </a:p>
           <a:p>
@@ -3803,7 +3963,7 @@
               <a:buChar char="•"/>
             </a:pPr>
             <a:r>
-              <a:rPr lang="en-US" sz="2499" strike="noStrike" spc="-137">
+              <a:rPr lang="en-US" sz="2499" strike="noStrike" spc="-137" dirty="0">
                 <a:solidFill>
                   <a:srgbClr val="FFFFFF"/>
                 </a:solidFill>
@@ -3812,8 +3972,111 @@
                 <a:cs typeface="Work Sans"/>
                 <a:sym typeface="Work Sans"/>
               </a:rPr>
-              <a:t>Final training always uses the full dataset with the found parameters</a:t>
-            </a:r>
+              <a:t>Final training always uses the full train dataset (60%) with the found parameters</a:t>
+            </a:r>
+            <a:endParaRPr lang="en-US" sz="2499" spc="-137" dirty="0">
+              <a:solidFill>
+                <a:srgbClr val="FFFFFF"/>
+              </a:solidFill>
+              <a:latin typeface="Work Sans"/>
+              <a:sym typeface="Work Sans"/>
+            </a:endParaRPr>
+          </a:p>
+          <a:p>
+            <a:pPr marL="0" lvl="1">
+              <a:lnSpc>
+                <a:spcPts val="3249"/>
+              </a:lnSpc>
+              <a:spcBef>
+                <a:spcPct val="0"/>
+              </a:spcBef>
+            </a:pPr>
+            <a:r>
+              <a:rPr lang="en-US" sz="2499" b="1" spc="-137" dirty="0">
+                <a:solidFill>
+                  <a:srgbClr val="38B6FF"/>
+                </a:solidFill>
+                <a:latin typeface="Work Sans Bold"/>
+                <a:sym typeface="Work Sans"/>
+              </a:rPr>
+              <a:t>V3:</a:t>
+            </a:r>
+          </a:p>
+          <a:p>
+            <a:pPr marL="612774" lvl="1" indent="-342900" algn="l">
+              <a:lnSpc>
+                <a:spcPts val="3249"/>
+              </a:lnSpc>
+              <a:spcBef>
+                <a:spcPct val="0"/>
+              </a:spcBef>
+              <a:buFont typeface="Arial" panose="020B0604020202020204" pitchFamily="34" charset="0"/>
+              <a:buChar char="•"/>
+            </a:pPr>
+            <a:r>
+              <a:rPr lang="en-US" sz="2499" spc="-137" dirty="0" err="1">
+                <a:solidFill>
+                  <a:srgbClr val="FFFFFF"/>
+                </a:solidFill>
+                <a:latin typeface="Work Sans"/>
+              </a:rPr>
+              <a:t>LightGBM</a:t>
+            </a:r>
+            <a:r>
+              <a:rPr lang="en-US" sz="2499" spc="-137" dirty="0">
+                <a:solidFill>
+                  <a:srgbClr val="FFFFFF"/>
+                </a:solidFill>
+                <a:latin typeface="Work Sans"/>
+              </a:rPr>
+              <a:t> V3 — </a:t>
+            </a:r>
+            <a:r>
+              <a:rPr lang="en-US" sz="2499" spc="-137" dirty="0" err="1">
+                <a:solidFill>
+                  <a:srgbClr val="FFFFFF"/>
+                </a:solidFill>
+                <a:latin typeface="Work Sans"/>
+              </a:rPr>
+              <a:t>med_high</a:t>
+            </a:r>
+            <a:r>
+              <a:rPr lang="en-US" sz="2499" spc="-137" dirty="0">
+                <a:solidFill>
+                  <a:srgbClr val="FFFFFF"/>
+                </a:solidFill>
+                <a:latin typeface="Work Sans"/>
+              </a:rPr>
+              <a:t> </a:t>
+            </a:r>
+            <a:r>
+              <a:rPr lang="en-US" sz="2499" spc="-137" dirty="0">
+                <a:solidFill>
+                  <a:srgbClr val="FFFFFF"/>
+                </a:solidFill>
+                <a:latin typeface="Work Sans"/>
+                <a:ea typeface="Work Sans"/>
+                <a:cs typeface="Work Sans"/>
+                <a:sym typeface="Work Sans"/>
+              </a:rPr>
+              <a:t>for PR AUC optimization </a:t>
+            </a:r>
+            <a:r>
+              <a:rPr lang="en-US" sz="2499" spc="-137" dirty="0">
+                <a:solidFill>
+                  <a:srgbClr val="FFFFFF"/>
+                </a:solidFill>
+                <a:latin typeface="Work Sans"/>
+              </a:rPr>
+              <a:t>(75 trials, 75% data, PR AUC objective + instance weighting [w=1,2,3,4 by temporal chunk])</a:t>
+            </a:r>
+            <a:endParaRPr lang="en-US" sz="2499" spc="-137" dirty="0">
+              <a:solidFill>
+                <a:srgbClr val="FFFFFF"/>
+              </a:solidFill>
+              <a:latin typeface="Work Sans"/>
+              <a:sym typeface="Work Sans"/>
+            </a:endParaRPr>
           </a:p>
         </p:txBody>
       </p:sp>
@@ -3825,7 +4088,7 @@
         </p:nvGrpSpPr>
         <p:grpSpPr>
           <a:xfrm>
-            <a:off x="875024" y="209550"/>
+            <a:off x="875026" y="270444"/>
             <a:ext cx="16954500" cy="2686050"/>
             <a:chOff x="0" y="0"/>
             <a:chExt cx="4987154" cy="790100"/>
@@ -3914,6 +4177,13 @@
               <a:srgbClr val="103760"/>
             </a:solidFill>
           </p:spPr>
+          <p:txBody>
+            <a:bodyPr/>
+            <a:lstStyle/>
+            <a:p>
+              <a:endParaRPr lang="en-IL"/>
+            </a:p>
+          </p:txBody>
         </p:sp>
       </p:grpSp>
       <p:sp>
@@ -3924,7 +4194,7 @@
         </p:nvSpPr>
         <p:spPr>
           <a:xfrm>
-            <a:off x="2168936" y="1154113"/>
+            <a:off x="2168938" y="724816"/>
             <a:ext cx="14366677" cy="930275"/>
           </a:xfrm>
           <a:prstGeom prst="rect">
@@ -3946,7 +4216,7 @@
               </a:spcBef>
             </a:pPr>
             <a:r>
-              <a:rPr lang="en-US" sz="6999" b="1" spc="-384">
+              <a:rPr lang="en-US" sz="6999" b="1" spc="-384" dirty="0">
                 <a:solidFill>
                   <a:srgbClr val="FFFFFF"/>
                 </a:solidFill>
@@ -3968,8 +4238,8 @@
         </p:nvGrpSpPr>
         <p:grpSpPr>
           <a:xfrm>
-            <a:off x="437444" y="6441132"/>
-            <a:ext cx="3223004" cy="3561897"/>
+            <a:off x="152400" y="854645"/>
+            <a:ext cx="2221317" cy="2305596"/>
             <a:chOff x="0" y="0"/>
             <a:chExt cx="1935901" cy="2139458"/>
           </a:xfrm>
@@ -4047,6 +4317,13 @@
               </a:stretch>
             </a:blipFill>
           </p:spPr>
+          <p:txBody>
+            <a:bodyPr/>
+            <a:lstStyle/>
+            <a:p>
+              <a:endParaRPr lang="en-IL"/>
+            </a:p>
+          </p:txBody>
         </p:sp>
       </p:grpSp>
     </p:spTree>
@@ -4179,1162 +4456,15 @@
               <a:srgbClr val="103760"/>
             </a:solidFill>
           </p:spPr>
+          <p:txBody>
+            <a:bodyPr/>
+            <a:lstStyle/>
+            <a:p>
+              <a:endParaRPr lang="en-IL"/>
+            </a:p>
+          </p:txBody>
         </p:sp>
       </p:grpSp>
-      <p:graphicFrame>
-        <p:nvGraphicFramePr>
-          <p:cNvPr id="4" name="Table 4"/>
-          <p:cNvGraphicFramePr>
-            <a:graphicFrameLocks noGrp="1"/>
-          </p:cNvGraphicFramePr>
-          <p:nvPr/>
-        </p:nvGraphicFramePr>
-        <p:xfrm>
-          <a:off x="742152" y="3838676"/>
-          <a:ext cx="7315200" cy="5419624"/>
-        </p:xfrm>
-        <a:graphic>
-          <a:graphicData uri="http://schemas.openxmlformats.org/drawingml/2006/table">
-            <a:tbl>
-              <a:tblPr/>
-              <a:tblGrid>
-                <a:gridCol w="2956886">
-                  <a:extLst>
-                    <a:ext uri="{9D8B030D-6E8A-4147-A177-3AD203B41FA5}">
-                      <a16:colId xmlns:a16="http://schemas.microsoft.com/office/drawing/2014/main" val="20000"/>
-                    </a:ext>
-                  </a:extLst>
-                </a:gridCol>
-                <a:gridCol w="1919914">
-                  <a:extLst>
-                    <a:ext uri="{9D8B030D-6E8A-4147-A177-3AD203B41FA5}">
-                      <a16:colId xmlns:a16="http://schemas.microsoft.com/office/drawing/2014/main" val="20001"/>
-                    </a:ext>
-                  </a:extLst>
-                </a:gridCol>
-                <a:gridCol w="2438400">
-                  <a:extLst>
-                    <a:ext uri="{9D8B030D-6E8A-4147-A177-3AD203B41FA5}">
-                      <a16:colId xmlns:a16="http://schemas.microsoft.com/office/drawing/2014/main" val="20002"/>
-                    </a:ext>
-                  </a:extLst>
-                </a:gridCol>
-              </a:tblGrid>
-              <a:tr h="809958">
-                <a:tc>
-                  <a:txBody>
-                    <a:bodyPr/>
-                    <a:lstStyle/>
-                    <a:p>
-                      <a:pPr algn="ctr">
-                        <a:lnSpc>
-                          <a:spcPts val="2520"/>
-                        </a:lnSpc>
-                        <a:defRPr/>
-                      </a:pPr>
-                      <a:r>
-                        <a:rPr lang="en-US" sz="1800" b="1">
-                          <a:solidFill>
-                            <a:srgbClr val="000000"/>
-                          </a:solidFill>
-                          <a:latin typeface="Work Sans Bold"/>
-                          <a:ea typeface="Work Sans Bold"/>
-                          <a:cs typeface="Work Sans Bold"/>
-                          <a:sym typeface="Work Sans Bold"/>
-                        </a:rPr>
-                        <a:t>Model</a:t>
-                      </a:r>
-                      <a:endParaRPr lang="en-US" sz="1100"/>
-                    </a:p>
-                  </a:txBody>
-                  <a:tcPr marL="190500" marR="190500" marT="190500" marB="190500" anchor="ctr">
-                    <a:lnL w="38100" cap="flat" cmpd="sng" algn="ctr">
-                      <a:solidFill>
-                        <a:srgbClr val="FFFFFF"/>
-                      </a:solidFill>
-                      <a:prstDash val="solid"/>
-                      <a:round/>
-                      <a:headEnd type="none" w="med" len="med"/>
-                      <a:tailEnd type="none" w="med" len="med"/>
-                    </a:lnL>
-                    <a:lnR w="38100" cap="flat" cmpd="sng" algn="ctr">
-                      <a:solidFill>
-                        <a:srgbClr val="FFFFFF"/>
-                      </a:solidFill>
-                      <a:prstDash val="solid"/>
-                      <a:round/>
-                      <a:headEnd type="none" w="med" len="med"/>
-                      <a:tailEnd type="none" w="med" len="med"/>
-                    </a:lnR>
-                    <a:lnT w="38100" cap="flat" cmpd="sng" algn="ctr">
-                      <a:solidFill>
-                        <a:srgbClr val="FFFFFF"/>
-                      </a:solidFill>
-                      <a:prstDash val="solid"/>
-                      <a:round/>
-                      <a:headEnd type="none" w="med" len="med"/>
-                      <a:tailEnd type="none" w="med" len="med"/>
-                    </a:lnT>
-                    <a:lnB w="38100" cap="flat" cmpd="sng" algn="ctr">
-                      <a:solidFill>
-                        <a:srgbClr val="FFFFFF"/>
-                      </a:solidFill>
-                      <a:prstDash val="solid"/>
-                      <a:round/>
-                      <a:headEnd type="none" w="med" len="med"/>
-                      <a:tailEnd type="none" w="med" len="med"/>
-                    </a:lnB>
-                    <a:solidFill>
-                      <a:srgbClr val="99DAFF"/>
-                    </a:solidFill>
-                  </a:tcPr>
-                </a:tc>
-                <a:tc>
-                  <a:txBody>
-                    <a:bodyPr/>
-                    <a:lstStyle/>
-                    <a:p>
-                      <a:pPr algn="ctr">
-                        <a:lnSpc>
-                          <a:spcPts val="2520"/>
-                        </a:lnSpc>
-                        <a:defRPr/>
-                      </a:pPr>
-                      <a:r>
-                        <a:rPr lang="en-US" sz="1800" b="1">
-                          <a:solidFill>
-                            <a:srgbClr val="000000"/>
-                          </a:solidFill>
-                          <a:latin typeface="Work Sans Bold"/>
-                          <a:ea typeface="Work Sans Bold"/>
-                          <a:cs typeface="Work Sans Bold"/>
-                          <a:sym typeface="Work Sans Bold"/>
-                        </a:rPr>
-                        <a:t>ROC AUC</a:t>
-                      </a:r>
-                      <a:endParaRPr lang="en-US" sz="1100"/>
-                    </a:p>
-                  </a:txBody>
-                  <a:tcPr marL="190500" marR="190500" marT="190500" marB="190500" anchor="ctr">
-                    <a:lnL w="38100" cap="flat" cmpd="sng" algn="ctr">
-                      <a:solidFill>
-                        <a:srgbClr val="FFFFFF"/>
-                      </a:solidFill>
-                      <a:prstDash val="solid"/>
-                      <a:round/>
-                      <a:headEnd type="none" w="med" len="med"/>
-                      <a:tailEnd type="none" w="med" len="med"/>
-                    </a:lnL>
-                    <a:lnR w="38100" cap="flat" cmpd="sng" algn="ctr">
-                      <a:solidFill>
-                        <a:srgbClr val="FFFFFF"/>
-                      </a:solidFill>
-                      <a:prstDash val="solid"/>
-                      <a:round/>
-                      <a:headEnd type="none" w="med" len="med"/>
-                      <a:tailEnd type="none" w="med" len="med"/>
-                    </a:lnR>
-                    <a:lnT w="38100" cap="flat" cmpd="sng" algn="ctr">
-                      <a:solidFill>
-                        <a:srgbClr val="FFFFFF"/>
-                      </a:solidFill>
-                      <a:prstDash val="solid"/>
-                      <a:round/>
-                      <a:headEnd type="none" w="med" len="med"/>
-                      <a:tailEnd type="none" w="med" len="med"/>
-                    </a:lnT>
-                    <a:lnB w="38100" cap="flat" cmpd="sng" algn="ctr">
-                      <a:solidFill>
-                        <a:srgbClr val="FFFFFF"/>
-                      </a:solidFill>
-                      <a:prstDash val="solid"/>
-                      <a:round/>
-                      <a:headEnd type="none" w="med" len="med"/>
-                      <a:tailEnd type="none" w="med" len="med"/>
-                    </a:lnB>
-                    <a:solidFill>
-                      <a:srgbClr val="99DAFF"/>
-                    </a:solidFill>
-                  </a:tcPr>
-                </a:tc>
-                <a:tc>
-                  <a:txBody>
-                    <a:bodyPr/>
-                    <a:lstStyle/>
-                    <a:p>
-                      <a:pPr algn="ctr">
-                        <a:lnSpc>
-                          <a:spcPts val="2520"/>
-                        </a:lnSpc>
-                        <a:defRPr/>
-                      </a:pPr>
-                      <a:r>
-                        <a:rPr lang="en-US" sz="1800" b="1">
-                          <a:solidFill>
-                            <a:srgbClr val="000000"/>
-                          </a:solidFill>
-                          <a:latin typeface="Work Sans Bold"/>
-                          <a:ea typeface="Work Sans Bold"/>
-                          <a:cs typeface="Work Sans Bold"/>
-                          <a:sym typeface="Work Sans Bold"/>
-                        </a:rPr>
-                        <a:t>PR AUC</a:t>
-                      </a:r>
-                      <a:endParaRPr lang="en-US" sz="1100"/>
-                    </a:p>
-                  </a:txBody>
-                  <a:tcPr marL="190500" marR="190500" marT="190500" marB="190500" anchor="ctr">
-                    <a:lnL w="38100" cap="flat" cmpd="sng" algn="ctr">
-                      <a:solidFill>
-                        <a:srgbClr val="FFFFFF"/>
-                      </a:solidFill>
-                      <a:prstDash val="solid"/>
-                      <a:round/>
-                      <a:headEnd type="none" w="med" len="med"/>
-                      <a:tailEnd type="none" w="med" len="med"/>
-                    </a:lnL>
-                    <a:lnR w="38100" cap="flat" cmpd="sng" algn="ctr">
-                      <a:solidFill>
-                        <a:srgbClr val="FFFFFF"/>
-                      </a:solidFill>
-                      <a:prstDash val="solid"/>
-                      <a:round/>
-                      <a:headEnd type="none" w="med" len="med"/>
-                      <a:tailEnd type="none" w="med" len="med"/>
-                    </a:lnR>
-                    <a:lnT w="38100" cap="flat" cmpd="sng" algn="ctr">
-                      <a:solidFill>
-                        <a:srgbClr val="FFFFFF"/>
-                      </a:solidFill>
-                      <a:prstDash val="solid"/>
-                      <a:round/>
-                      <a:headEnd type="none" w="med" len="med"/>
-                      <a:tailEnd type="none" w="med" len="med"/>
-                    </a:lnT>
-                    <a:lnB w="38100" cap="flat" cmpd="sng" algn="ctr">
-                      <a:solidFill>
-                        <a:srgbClr val="FFFFFF"/>
-                      </a:solidFill>
-                      <a:prstDash val="solid"/>
-                      <a:round/>
-                      <a:headEnd type="none" w="med" len="med"/>
-                      <a:tailEnd type="none" w="med" len="med"/>
-                    </a:lnB>
-                    <a:solidFill>
-                      <a:srgbClr val="99DAFF"/>
-                    </a:solidFill>
-                  </a:tcPr>
-                </a:tc>
-                <a:extLst>
-                  <a:ext uri="{0D108BD9-81ED-4DB2-BD59-A6C34878D82A}">
-                    <a16:rowId xmlns:a16="http://schemas.microsoft.com/office/drawing/2014/main" val="10000"/>
-                  </a:ext>
-                </a:extLst>
-              </a:tr>
-              <a:tr h="1429273">
-                <a:tc>
-                  <a:txBody>
-                    <a:bodyPr/>
-                    <a:lstStyle/>
-                    <a:p>
-                      <a:pPr algn="ctr">
-                        <a:lnSpc>
-                          <a:spcPts val="2520"/>
-                        </a:lnSpc>
-                        <a:defRPr/>
-                      </a:pPr>
-                      <a:r>
-                        <a:rPr lang="en-US" sz="1800">
-                          <a:solidFill>
-                            <a:srgbClr val="FFFFFF"/>
-                          </a:solidFill>
-                          <a:latin typeface="Work Sans"/>
-                          <a:ea typeface="Work Sans"/>
-                          <a:cs typeface="Work Sans"/>
-                          <a:sym typeface="Work Sans"/>
-                        </a:rPr>
-                        <a:t>Baseline </a:t>
-                      </a:r>
-                      <a:endParaRPr lang="en-US" sz="1100"/>
-                    </a:p>
-                    <a:p>
-                      <a:pPr algn="ctr">
-                        <a:lnSpc>
-                          <a:spcPts val="2520"/>
-                        </a:lnSpc>
-                      </a:pPr>
-                      <a:r>
-                        <a:rPr lang="en-US" sz="1800">
-                          <a:solidFill>
-                            <a:srgbClr val="FFFFFF"/>
-                          </a:solidFill>
-                          <a:latin typeface="Work Sans"/>
-                          <a:ea typeface="Work Sans"/>
-                          <a:cs typeface="Work Sans"/>
-                          <a:sym typeface="Work Sans"/>
-                        </a:rPr>
-                        <a:t>(LightGBM, default, raw features)</a:t>
-                      </a:r>
-                    </a:p>
-                  </a:txBody>
-                  <a:tcPr marL="190500" marR="190500" marT="190500" marB="190500" anchor="ctr">
-                    <a:lnL w="38100" cap="flat" cmpd="sng" algn="ctr">
-                      <a:solidFill>
-                        <a:srgbClr val="FFFFFF"/>
-                      </a:solidFill>
-                      <a:prstDash val="solid"/>
-                      <a:round/>
-                      <a:headEnd type="none" w="med" len="med"/>
-                      <a:tailEnd type="none" w="med" len="med"/>
-                    </a:lnL>
-                    <a:lnR w="38100" cap="flat" cmpd="sng" algn="ctr">
-                      <a:solidFill>
-                        <a:srgbClr val="FFFFFF"/>
-                      </a:solidFill>
-                      <a:prstDash val="solid"/>
-                      <a:round/>
-                      <a:headEnd type="none" w="med" len="med"/>
-                      <a:tailEnd type="none" w="med" len="med"/>
-                    </a:lnR>
-                    <a:lnT w="38100" cap="flat" cmpd="sng" algn="ctr">
-                      <a:solidFill>
-                        <a:srgbClr val="FFFFFF"/>
-                      </a:solidFill>
-                      <a:prstDash val="solid"/>
-                      <a:round/>
-                      <a:headEnd type="none" w="med" len="med"/>
-                      <a:tailEnd type="none" w="med" len="med"/>
-                    </a:lnT>
-                    <a:lnB w="38100" cap="flat" cmpd="sng" algn="ctr">
-                      <a:solidFill>
-                        <a:srgbClr val="FFFFFF"/>
-                      </a:solidFill>
-                      <a:prstDash val="solid"/>
-                      <a:round/>
-                      <a:headEnd type="none" w="med" len="med"/>
-                      <a:tailEnd type="none" w="med" len="med"/>
-                    </a:lnB>
-                  </a:tcPr>
-                </a:tc>
-                <a:tc>
-                  <a:txBody>
-                    <a:bodyPr/>
-                    <a:lstStyle/>
-                    <a:p>
-                      <a:pPr algn="ctr">
-                        <a:lnSpc>
-                          <a:spcPts val="2520"/>
-                        </a:lnSpc>
-                        <a:defRPr/>
-                      </a:pPr>
-                      <a:r>
-                        <a:rPr lang="en-US" sz="1800">
-                          <a:solidFill>
-                            <a:srgbClr val="FFFFFF"/>
-                          </a:solidFill>
-                          <a:latin typeface="Work Sans"/>
-                          <a:ea typeface="Work Sans"/>
-                          <a:cs typeface="Work Sans"/>
-                          <a:sym typeface="Work Sans"/>
-                        </a:rPr>
-                        <a:t>0.9196</a:t>
-                      </a:r>
-                      <a:endParaRPr lang="en-US" sz="1100"/>
-                    </a:p>
-                  </a:txBody>
-                  <a:tcPr marL="190500" marR="190500" marT="190500" marB="190500" anchor="ctr">
-                    <a:lnL w="38100" cap="flat" cmpd="sng" algn="ctr">
-                      <a:solidFill>
-                        <a:srgbClr val="FFFFFF"/>
-                      </a:solidFill>
-                      <a:prstDash val="solid"/>
-                      <a:round/>
-                      <a:headEnd type="none" w="med" len="med"/>
-                      <a:tailEnd type="none" w="med" len="med"/>
-                    </a:lnL>
-                    <a:lnR w="38100" cap="flat" cmpd="sng" algn="ctr">
-                      <a:solidFill>
-                        <a:srgbClr val="FFFFFF"/>
-                      </a:solidFill>
-                      <a:prstDash val="solid"/>
-                      <a:round/>
-                      <a:headEnd type="none" w="med" len="med"/>
-                      <a:tailEnd type="none" w="med" len="med"/>
-                    </a:lnR>
-                    <a:lnT w="38100" cap="flat" cmpd="sng" algn="ctr">
-                      <a:solidFill>
-                        <a:srgbClr val="FFFFFF"/>
-                      </a:solidFill>
-                      <a:prstDash val="solid"/>
-                      <a:round/>
-                      <a:headEnd type="none" w="med" len="med"/>
-                      <a:tailEnd type="none" w="med" len="med"/>
-                    </a:lnT>
-                    <a:lnB w="38100" cap="flat" cmpd="sng" algn="ctr">
-                      <a:solidFill>
-                        <a:srgbClr val="FFFFFF"/>
-                      </a:solidFill>
-                      <a:prstDash val="solid"/>
-                      <a:round/>
-                      <a:headEnd type="none" w="med" len="med"/>
-                      <a:tailEnd type="none" w="med" len="med"/>
-                    </a:lnB>
-                  </a:tcPr>
-                </a:tc>
-                <a:tc>
-                  <a:txBody>
-                    <a:bodyPr/>
-                    <a:lstStyle/>
-                    <a:p>
-                      <a:pPr algn="ctr">
-                        <a:lnSpc>
-                          <a:spcPts val="2520"/>
-                        </a:lnSpc>
-                        <a:defRPr/>
-                      </a:pPr>
-                      <a:r>
-                        <a:rPr lang="en-US" sz="1800">
-                          <a:solidFill>
-                            <a:srgbClr val="FFFFFF"/>
-                          </a:solidFill>
-                          <a:latin typeface="Work Sans"/>
-                          <a:ea typeface="Work Sans"/>
-                          <a:cs typeface="Work Sans"/>
-                          <a:sym typeface="Work Sans"/>
-                        </a:rPr>
-                        <a:t>0.5804</a:t>
-                      </a:r>
-                      <a:endParaRPr lang="en-US" sz="1100"/>
-                    </a:p>
-                  </a:txBody>
-                  <a:tcPr marL="190500" marR="190500" marT="190500" marB="190500" anchor="ctr">
-                    <a:lnL w="38100" cap="flat" cmpd="sng" algn="ctr">
-                      <a:solidFill>
-                        <a:srgbClr val="FFFFFF"/>
-                      </a:solidFill>
-                      <a:prstDash val="solid"/>
-                      <a:round/>
-                      <a:headEnd type="none" w="med" len="med"/>
-                      <a:tailEnd type="none" w="med" len="med"/>
-                    </a:lnL>
-                    <a:lnR w="38100" cap="flat" cmpd="sng" algn="ctr">
-                      <a:solidFill>
-                        <a:srgbClr val="FFFFFF"/>
-                      </a:solidFill>
-                      <a:prstDash val="solid"/>
-                      <a:round/>
-                      <a:headEnd type="none" w="med" len="med"/>
-                      <a:tailEnd type="none" w="med" len="med"/>
-                    </a:lnR>
-                    <a:lnT w="38100" cap="flat" cmpd="sng" algn="ctr">
-                      <a:solidFill>
-                        <a:srgbClr val="FFFFFF"/>
-                      </a:solidFill>
-                      <a:prstDash val="solid"/>
-                      <a:round/>
-                      <a:headEnd type="none" w="med" len="med"/>
-                      <a:tailEnd type="none" w="med" len="med"/>
-                    </a:lnT>
-                    <a:lnB w="38100" cap="flat" cmpd="sng" algn="ctr">
-                      <a:solidFill>
-                        <a:srgbClr val="FFFFFF"/>
-                      </a:solidFill>
-                      <a:prstDash val="solid"/>
-                      <a:round/>
-                      <a:headEnd type="none" w="med" len="med"/>
-                      <a:tailEnd type="none" w="med" len="med"/>
-                    </a:lnB>
-                  </a:tcPr>
-                </a:tc>
-                <a:extLst>
-                  <a:ext uri="{0D108BD9-81ED-4DB2-BD59-A6C34878D82A}">
-                    <a16:rowId xmlns:a16="http://schemas.microsoft.com/office/drawing/2014/main" val="10001"/>
-                  </a:ext>
-                </a:extLst>
-              </a:tr>
-              <a:tr h="1098995">
-                <a:tc>
-                  <a:txBody>
-                    <a:bodyPr/>
-                    <a:lstStyle/>
-                    <a:p>
-                      <a:pPr marL="0" lvl="0" indent="0" algn="ctr">
-                        <a:lnSpc>
-                          <a:spcPts val="2799"/>
-                        </a:lnSpc>
-                        <a:spcBef>
-                          <a:spcPct val="0"/>
-                        </a:spcBef>
-                        <a:defRPr/>
-                      </a:pPr>
-                      <a:r>
-                        <a:rPr lang="en-US" sz="1999" b="1" u="none" strike="noStrike">
-                          <a:solidFill>
-                            <a:srgbClr val="38B6FF"/>
-                          </a:solidFill>
-                          <a:latin typeface="Work Sans Bold"/>
-                          <a:ea typeface="Work Sans Bold"/>
-                          <a:cs typeface="Work Sans Bold"/>
-                          <a:sym typeface="Work Sans Bold"/>
-                        </a:rPr>
-                        <a:t>✅ LightGBM alone </a:t>
-                      </a:r>
-                      <a:endParaRPr lang="en-US" sz="1100"/>
-                    </a:p>
-                  </a:txBody>
-                  <a:tcPr marL="190500" marR="190500" marT="190500" marB="190500" anchor="ctr">
-                    <a:lnL w="38100" cap="flat" cmpd="sng" algn="ctr">
-                      <a:solidFill>
-                        <a:srgbClr val="FFFFFF"/>
-                      </a:solidFill>
-                      <a:prstDash val="solid"/>
-                      <a:round/>
-                      <a:headEnd type="none" w="med" len="med"/>
-                      <a:tailEnd type="none" w="med" len="med"/>
-                    </a:lnL>
-                    <a:lnR w="38100" cap="flat" cmpd="sng" algn="ctr">
-                      <a:solidFill>
-                        <a:srgbClr val="FFFFFF"/>
-                      </a:solidFill>
-                      <a:prstDash val="solid"/>
-                      <a:round/>
-                      <a:headEnd type="none" w="med" len="med"/>
-                      <a:tailEnd type="none" w="med" len="med"/>
-                    </a:lnR>
-                    <a:lnT w="38100" cap="flat" cmpd="sng" algn="ctr">
-                      <a:solidFill>
-                        <a:srgbClr val="FFFFFF"/>
-                      </a:solidFill>
-                      <a:prstDash val="solid"/>
-                      <a:round/>
-                      <a:headEnd type="none" w="med" len="med"/>
-                      <a:tailEnd type="none" w="med" len="med"/>
-                    </a:lnT>
-                    <a:lnB w="38100" cap="flat" cmpd="sng" algn="ctr">
-                      <a:solidFill>
-                        <a:srgbClr val="FFFFFF"/>
-                      </a:solidFill>
-                      <a:prstDash val="solid"/>
-                      <a:round/>
-                      <a:headEnd type="none" w="med" len="med"/>
-                      <a:tailEnd type="none" w="med" len="med"/>
-                    </a:lnB>
-                  </a:tcPr>
-                </a:tc>
-                <a:tc>
-                  <a:txBody>
-                    <a:bodyPr/>
-                    <a:lstStyle/>
-                    <a:p>
-                      <a:pPr algn="ctr">
-                        <a:lnSpc>
-                          <a:spcPts val="2799"/>
-                        </a:lnSpc>
-                        <a:defRPr/>
-                      </a:pPr>
-                      <a:r>
-                        <a:rPr lang="en-US" sz="1999" b="1">
-                          <a:solidFill>
-                            <a:srgbClr val="02A8E7"/>
-                          </a:solidFill>
-                          <a:latin typeface="Work Sans Bold"/>
-                          <a:ea typeface="Work Sans Bold"/>
-                          <a:cs typeface="Work Sans Bold"/>
-                          <a:sym typeface="Work Sans Bold"/>
-                        </a:rPr>
-                        <a:t>0.9272</a:t>
-                      </a:r>
-                      <a:endParaRPr lang="en-US" sz="1100"/>
-                    </a:p>
-                  </a:txBody>
-                  <a:tcPr marL="190500" marR="190500" marT="190500" marB="190500" anchor="ctr">
-                    <a:lnL w="38100" cap="flat" cmpd="sng" algn="ctr">
-                      <a:solidFill>
-                        <a:srgbClr val="FFFFFF"/>
-                      </a:solidFill>
-                      <a:prstDash val="solid"/>
-                      <a:round/>
-                      <a:headEnd type="none" w="med" len="med"/>
-                      <a:tailEnd type="none" w="med" len="med"/>
-                    </a:lnL>
-                    <a:lnR w="38100" cap="flat" cmpd="sng" algn="ctr">
-                      <a:solidFill>
-                        <a:srgbClr val="FFFFFF"/>
-                      </a:solidFill>
-                      <a:prstDash val="solid"/>
-                      <a:round/>
-                      <a:headEnd type="none" w="med" len="med"/>
-                      <a:tailEnd type="none" w="med" len="med"/>
-                    </a:lnR>
-                    <a:lnT w="38100" cap="flat" cmpd="sng" algn="ctr">
-                      <a:solidFill>
-                        <a:srgbClr val="FFFFFF"/>
-                      </a:solidFill>
-                      <a:prstDash val="solid"/>
-                      <a:round/>
-                      <a:headEnd type="none" w="med" len="med"/>
-                      <a:tailEnd type="none" w="med" len="med"/>
-                    </a:lnT>
-                    <a:lnB w="38100" cap="flat" cmpd="sng" algn="ctr">
-                      <a:solidFill>
-                        <a:srgbClr val="FFFFFF"/>
-                      </a:solidFill>
-                      <a:prstDash val="solid"/>
-                      <a:round/>
-                      <a:headEnd type="none" w="med" len="med"/>
-                      <a:tailEnd type="none" w="med" len="med"/>
-                    </a:lnB>
-                  </a:tcPr>
-                </a:tc>
-                <a:tc>
-                  <a:txBody>
-                    <a:bodyPr/>
-                    <a:lstStyle/>
-                    <a:p>
-                      <a:pPr marL="0" lvl="0" indent="0" algn="ctr">
-                        <a:lnSpc>
-                          <a:spcPts val="2799"/>
-                        </a:lnSpc>
-                        <a:spcBef>
-                          <a:spcPct val="0"/>
-                        </a:spcBef>
-                        <a:defRPr/>
-                      </a:pPr>
-                      <a:r>
-                        <a:rPr lang="en-US" sz="1999" b="1" u="none" strike="noStrike">
-                          <a:solidFill>
-                            <a:srgbClr val="38B6FF"/>
-                          </a:solidFill>
-                          <a:latin typeface="Work Sans Bold"/>
-                          <a:ea typeface="Work Sans Bold"/>
-                          <a:cs typeface="Work Sans Bold"/>
-                          <a:sym typeface="Work Sans Bold"/>
-                        </a:rPr>
-                        <a:t>0.6039</a:t>
-                      </a:r>
-                      <a:endParaRPr lang="en-US" sz="1100"/>
-                    </a:p>
-                  </a:txBody>
-                  <a:tcPr marL="190500" marR="190500" marT="190500" marB="190500" anchor="ctr">
-                    <a:lnL w="38100" cap="flat" cmpd="sng" algn="ctr">
-                      <a:solidFill>
-                        <a:srgbClr val="FFFFFF"/>
-                      </a:solidFill>
-                      <a:prstDash val="solid"/>
-                      <a:round/>
-                      <a:headEnd type="none" w="med" len="med"/>
-                      <a:tailEnd type="none" w="med" len="med"/>
-                    </a:lnL>
-                    <a:lnR w="38100" cap="flat" cmpd="sng" algn="ctr">
-                      <a:solidFill>
-                        <a:srgbClr val="FFFFFF"/>
-                      </a:solidFill>
-                      <a:prstDash val="solid"/>
-                      <a:round/>
-                      <a:headEnd type="none" w="med" len="med"/>
-                      <a:tailEnd type="none" w="med" len="med"/>
-                    </a:lnR>
-                    <a:lnT w="38100" cap="flat" cmpd="sng" algn="ctr">
-                      <a:solidFill>
-                        <a:srgbClr val="FFFFFF"/>
-                      </a:solidFill>
-                      <a:prstDash val="solid"/>
-                      <a:round/>
-                      <a:headEnd type="none" w="med" len="med"/>
-                      <a:tailEnd type="none" w="med" len="med"/>
-                    </a:lnT>
-                    <a:lnB w="38100" cap="flat" cmpd="sng" algn="ctr">
-                      <a:solidFill>
-                        <a:srgbClr val="FFFFFF"/>
-                      </a:solidFill>
-                      <a:prstDash val="solid"/>
-                      <a:round/>
-                      <a:headEnd type="none" w="med" len="med"/>
-                      <a:tailEnd type="none" w="med" len="med"/>
-                    </a:lnB>
-                  </a:tcPr>
-                </a:tc>
-                <a:extLst>
-                  <a:ext uri="{0D108BD9-81ED-4DB2-BD59-A6C34878D82A}">
-                    <a16:rowId xmlns:a16="http://schemas.microsoft.com/office/drawing/2014/main" val="10002"/>
-                  </a:ext>
-                </a:extLst>
-              </a:tr>
-              <a:tr h="968675">
-                <a:tc>
-                  <a:txBody>
-                    <a:bodyPr/>
-                    <a:lstStyle/>
-                    <a:p>
-                      <a:pPr algn="ctr">
-                        <a:lnSpc>
-                          <a:spcPts val="2520"/>
-                        </a:lnSpc>
-                        <a:defRPr/>
-                      </a:pPr>
-                      <a:r>
-                        <a:rPr lang="en-US" sz="1800">
-                          <a:solidFill>
-                            <a:srgbClr val="FFFFFF"/>
-                          </a:solidFill>
-                          <a:latin typeface="Work Sans"/>
-                          <a:ea typeface="Work Sans"/>
-                          <a:cs typeface="Work Sans"/>
-                          <a:sym typeface="Work Sans"/>
-                        </a:rPr>
-                        <a:t>XGBoost alone</a:t>
-                      </a:r>
-                      <a:endParaRPr lang="en-US" sz="1100"/>
-                    </a:p>
-                  </a:txBody>
-                  <a:tcPr marL="190500" marR="190500" marT="190500" marB="190500" anchor="ctr">
-                    <a:lnL w="38100" cap="flat" cmpd="sng" algn="ctr">
-                      <a:solidFill>
-                        <a:srgbClr val="FFFFFF"/>
-                      </a:solidFill>
-                      <a:prstDash val="solid"/>
-                      <a:round/>
-                      <a:headEnd type="none" w="med" len="med"/>
-                      <a:tailEnd type="none" w="med" len="med"/>
-                    </a:lnL>
-                    <a:lnR w="38100" cap="flat" cmpd="sng" algn="ctr">
-                      <a:solidFill>
-                        <a:srgbClr val="FFFFFF"/>
-                      </a:solidFill>
-                      <a:prstDash val="solid"/>
-                      <a:round/>
-                      <a:headEnd type="none" w="med" len="med"/>
-                      <a:tailEnd type="none" w="med" len="med"/>
-                    </a:lnR>
-                    <a:lnT w="38100" cap="flat" cmpd="sng" algn="ctr">
-                      <a:solidFill>
-                        <a:srgbClr val="FFFFFF"/>
-                      </a:solidFill>
-                      <a:prstDash val="solid"/>
-                      <a:round/>
-                      <a:headEnd type="none" w="med" len="med"/>
-                      <a:tailEnd type="none" w="med" len="med"/>
-                    </a:lnT>
-                    <a:lnB w="38100" cap="flat" cmpd="sng" algn="ctr">
-                      <a:solidFill>
-                        <a:srgbClr val="FFFFFF"/>
-                      </a:solidFill>
-                      <a:prstDash val="solid"/>
-                      <a:round/>
-                      <a:headEnd type="none" w="med" len="med"/>
-                      <a:tailEnd type="none" w="med" len="med"/>
-                    </a:lnB>
-                  </a:tcPr>
-                </a:tc>
-                <a:tc>
-                  <a:txBody>
-                    <a:bodyPr/>
-                    <a:lstStyle/>
-                    <a:p>
-                      <a:pPr algn="ctr">
-                        <a:lnSpc>
-                          <a:spcPts val="2520"/>
-                        </a:lnSpc>
-                        <a:defRPr/>
-                      </a:pPr>
-                      <a:r>
-                        <a:rPr lang="en-US" sz="1800">
-                          <a:solidFill>
-                            <a:srgbClr val="FFFFFF"/>
-                          </a:solidFill>
-                          <a:latin typeface="Work Sans"/>
-                          <a:ea typeface="Work Sans"/>
-                          <a:cs typeface="Work Sans"/>
-                          <a:sym typeface="Work Sans"/>
-                        </a:rPr>
-                        <a:t>0.9226</a:t>
-                      </a:r>
-                      <a:endParaRPr lang="en-US" sz="1100"/>
-                    </a:p>
-                  </a:txBody>
-                  <a:tcPr marL="190500" marR="190500" marT="190500" marB="190500" anchor="ctr">
-                    <a:lnL w="38100" cap="flat" cmpd="sng" algn="ctr">
-                      <a:solidFill>
-                        <a:srgbClr val="FFFFFF"/>
-                      </a:solidFill>
-                      <a:prstDash val="solid"/>
-                      <a:round/>
-                      <a:headEnd type="none" w="med" len="med"/>
-                      <a:tailEnd type="none" w="med" len="med"/>
-                    </a:lnL>
-                    <a:lnR w="38100" cap="flat" cmpd="sng" algn="ctr">
-                      <a:solidFill>
-                        <a:srgbClr val="FFFFFF"/>
-                      </a:solidFill>
-                      <a:prstDash val="solid"/>
-                      <a:round/>
-                      <a:headEnd type="none" w="med" len="med"/>
-                      <a:tailEnd type="none" w="med" len="med"/>
-                    </a:lnR>
-                    <a:lnT w="38100" cap="flat" cmpd="sng" algn="ctr">
-                      <a:solidFill>
-                        <a:srgbClr val="FFFFFF"/>
-                      </a:solidFill>
-                      <a:prstDash val="solid"/>
-                      <a:round/>
-                      <a:headEnd type="none" w="med" len="med"/>
-                      <a:tailEnd type="none" w="med" len="med"/>
-                    </a:lnT>
-                    <a:lnB w="38100" cap="flat" cmpd="sng" algn="ctr">
-                      <a:solidFill>
-                        <a:srgbClr val="FFFFFF"/>
-                      </a:solidFill>
-                      <a:prstDash val="solid"/>
-                      <a:round/>
-                      <a:headEnd type="none" w="med" len="med"/>
-                      <a:tailEnd type="none" w="med" len="med"/>
-                    </a:lnB>
-                  </a:tcPr>
-                </a:tc>
-                <a:tc>
-                  <a:txBody>
-                    <a:bodyPr/>
-                    <a:lstStyle/>
-                    <a:p>
-                      <a:pPr algn="ctr">
-                        <a:lnSpc>
-                          <a:spcPts val="2520"/>
-                        </a:lnSpc>
-                        <a:defRPr/>
-                      </a:pPr>
-                      <a:r>
-                        <a:rPr lang="en-US" sz="1800">
-                          <a:solidFill>
-                            <a:srgbClr val="FFFFFF"/>
-                          </a:solidFill>
-                          <a:latin typeface="Work Sans"/>
-                          <a:ea typeface="Work Sans"/>
-                          <a:cs typeface="Work Sans"/>
-                          <a:sym typeface="Work Sans"/>
-                        </a:rPr>
-                        <a:t>0.5641</a:t>
-                      </a:r>
-                      <a:endParaRPr lang="en-US" sz="1100"/>
-                    </a:p>
-                  </a:txBody>
-                  <a:tcPr marL="190500" marR="190500" marT="190500" marB="190500" anchor="ctr">
-                    <a:lnL w="38100" cap="flat" cmpd="sng" algn="ctr">
-                      <a:solidFill>
-                        <a:srgbClr val="FFFFFF"/>
-                      </a:solidFill>
-                      <a:prstDash val="solid"/>
-                      <a:round/>
-                      <a:headEnd type="none" w="med" len="med"/>
-                      <a:tailEnd type="none" w="med" len="med"/>
-                    </a:lnL>
-                    <a:lnR w="38100" cap="flat" cmpd="sng" algn="ctr">
-                      <a:solidFill>
-                        <a:srgbClr val="FFFFFF"/>
-                      </a:solidFill>
-                      <a:prstDash val="solid"/>
-                      <a:round/>
-                      <a:headEnd type="none" w="med" len="med"/>
-                      <a:tailEnd type="none" w="med" len="med"/>
-                    </a:lnR>
-                    <a:lnT w="38100" cap="flat" cmpd="sng" algn="ctr">
-                      <a:solidFill>
-                        <a:srgbClr val="FFFFFF"/>
-                      </a:solidFill>
-                      <a:prstDash val="solid"/>
-                      <a:round/>
-                      <a:headEnd type="none" w="med" len="med"/>
-                      <a:tailEnd type="none" w="med" len="med"/>
-                    </a:lnT>
-                    <a:lnB w="38100" cap="flat" cmpd="sng" algn="ctr">
-                      <a:solidFill>
-                        <a:srgbClr val="FFFFFF"/>
-                      </a:solidFill>
-                      <a:prstDash val="solid"/>
-                      <a:round/>
-                      <a:headEnd type="none" w="med" len="med"/>
-                      <a:tailEnd type="none" w="med" len="med"/>
-                    </a:lnB>
-                  </a:tcPr>
-                </a:tc>
-                <a:extLst>
-                  <a:ext uri="{0D108BD9-81ED-4DB2-BD59-A6C34878D82A}">
-                    <a16:rowId xmlns:a16="http://schemas.microsoft.com/office/drawing/2014/main" val="10003"/>
-                  </a:ext>
-                </a:extLst>
-              </a:tr>
-              <a:tr h="1112722">
-                <a:tc>
-                  <a:txBody>
-                    <a:bodyPr/>
-                    <a:lstStyle/>
-                    <a:p>
-                      <a:pPr algn="ctr">
-                        <a:lnSpc>
-                          <a:spcPts val="2520"/>
-                        </a:lnSpc>
-                        <a:defRPr/>
-                      </a:pPr>
-                      <a:r>
-                        <a:rPr lang="en-US" sz="1800">
-                          <a:solidFill>
-                            <a:srgbClr val="FFFFFF"/>
-                          </a:solidFill>
-                          <a:latin typeface="Work Sans"/>
-                          <a:ea typeface="Work Sans"/>
-                          <a:cs typeface="Work Sans"/>
-                          <a:sym typeface="Work Sans"/>
-                        </a:rPr>
-                        <a:t>Ensemble </a:t>
-                      </a:r>
-                      <a:endParaRPr lang="en-US" sz="1100"/>
-                    </a:p>
-                    <a:p>
-                      <a:pPr algn="l">
-                        <a:lnSpc>
-                          <a:spcPts val="2520"/>
-                        </a:lnSpc>
-                      </a:pPr>
-                      <a:r>
-                        <a:rPr lang="en-US" sz="1800">
-                          <a:solidFill>
-                            <a:srgbClr val="FFFFFF"/>
-                          </a:solidFill>
-                          <a:latin typeface="Work Sans"/>
-                          <a:ea typeface="Work Sans"/>
-                          <a:cs typeface="Work Sans"/>
-                          <a:sym typeface="Work Sans"/>
-                        </a:rPr>
-                        <a:t>(LightGBM + XGBoost)</a:t>
-                      </a:r>
-                    </a:p>
-                  </a:txBody>
-                  <a:tcPr marL="190500" marR="190500" marT="190500" marB="190500" anchor="ctr">
-                    <a:lnL w="38100" cap="flat" cmpd="sng" algn="ctr">
-                      <a:solidFill>
-                        <a:srgbClr val="FFFFFF"/>
-                      </a:solidFill>
-                      <a:prstDash val="solid"/>
-                      <a:round/>
-                      <a:headEnd type="none" w="med" len="med"/>
-                      <a:tailEnd type="none" w="med" len="med"/>
-                    </a:lnL>
-                    <a:lnR w="38100" cap="flat" cmpd="sng" algn="ctr">
-                      <a:solidFill>
-                        <a:srgbClr val="FFFFFF"/>
-                      </a:solidFill>
-                      <a:prstDash val="solid"/>
-                      <a:round/>
-                      <a:headEnd type="none" w="med" len="med"/>
-                      <a:tailEnd type="none" w="med" len="med"/>
-                    </a:lnR>
-                    <a:lnT w="38100" cap="flat" cmpd="sng" algn="ctr">
-                      <a:solidFill>
-                        <a:srgbClr val="FFFFFF"/>
-                      </a:solidFill>
-                      <a:prstDash val="solid"/>
-                      <a:round/>
-                      <a:headEnd type="none" w="med" len="med"/>
-                      <a:tailEnd type="none" w="med" len="med"/>
-                    </a:lnT>
-                    <a:lnB w="38100" cap="flat" cmpd="sng" algn="ctr">
-                      <a:solidFill>
-                        <a:srgbClr val="FFFFFF"/>
-                      </a:solidFill>
-                      <a:prstDash val="solid"/>
-                      <a:round/>
-                      <a:headEnd type="none" w="med" len="med"/>
-                      <a:tailEnd type="none" w="med" len="med"/>
-                    </a:lnB>
-                  </a:tcPr>
-                </a:tc>
-                <a:tc>
-                  <a:txBody>
-                    <a:bodyPr/>
-                    <a:lstStyle/>
-                    <a:p>
-                      <a:pPr algn="ctr">
-                        <a:lnSpc>
-                          <a:spcPts val="2520"/>
-                        </a:lnSpc>
-                        <a:defRPr/>
-                      </a:pPr>
-                      <a:r>
-                        <a:rPr lang="en-US" sz="1800">
-                          <a:solidFill>
-                            <a:srgbClr val="FFFFFF"/>
-                          </a:solidFill>
-                          <a:latin typeface="Work Sans"/>
-                          <a:ea typeface="Work Sans"/>
-                          <a:cs typeface="Work Sans"/>
-                          <a:sym typeface="Work Sans"/>
-                        </a:rPr>
-                        <a:t>0.9264</a:t>
-                      </a:r>
-                      <a:endParaRPr lang="en-US" sz="1100"/>
-                    </a:p>
-                  </a:txBody>
-                  <a:tcPr marL="190500" marR="190500" marT="190500" marB="190500" anchor="ctr">
-                    <a:lnL w="38100" cap="flat" cmpd="sng" algn="ctr">
-                      <a:solidFill>
-                        <a:srgbClr val="FFFFFF"/>
-                      </a:solidFill>
-                      <a:prstDash val="solid"/>
-                      <a:round/>
-                      <a:headEnd type="none" w="med" len="med"/>
-                      <a:tailEnd type="none" w="med" len="med"/>
-                    </a:lnL>
-                    <a:lnR w="38100" cap="flat" cmpd="sng" algn="ctr">
-                      <a:solidFill>
-                        <a:srgbClr val="FFFFFF"/>
-                      </a:solidFill>
-                      <a:prstDash val="solid"/>
-                      <a:round/>
-                      <a:headEnd type="none" w="med" len="med"/>
-                      <a:tailEnd type="none" w="med" len="med"/>
-                    </a:lnR>
-                    <a:lnT w="38100" cap="flat" cmpd="sng" algn="ctr">
-                      <a:solidFill>
-                        <a:srgbClr val="FFFFFF"/>
-                      </a:solidFill>
-                      <a:prstDash val="solid"/>
-                      <a:round/>
-                      <a:headEnd type="none" w="med" len="med"/>
-                      <a:tailEnd type="none" w="med" len="med"/>
-                    </a:lnT>
-                    <a:lnB w="38100" cap="flat" cmpd="sng" algn="ctr">
-                      <a:solidFill>
-                        <a:srgbClr val="FFFFFF"/>
-                      </a:solidFill>
-                      <a:prstDash val="solid"/>
-                      <a:round/>
-                      <a:headEnd type="none" w="med" len="med"/>
-                      <a:tailEnd type="none" w="med" len="med"/>
-                    </a:lnB>
-                  </a:tcPr>
-                </a:tc>
-                <a:tc>
-                  <a:txBody>
-                    <a:bodyPr/>
-                    <a:lstStyle/>
-                    <a:p>
-                      <a:pPr algn="ctr">
-                        <a:lnSpc>
-                          <a:spcPts val="2520"/>
-                        </a:lnSpc>
-                        <a:defRPr/>
-                      </a:pPr>
-                      <a:r>
-                        <a:rPr lang="en-US" sz="1800">
-                          <a:solidFill>
-                            <a:srgbClr val="FFFFFF"/>
-                          </a:solidFill>
-                          <a:latin typeface="Work Sans"/>
-                          <a:ea typeface="Work Sans"/>
-                          <a:cs typeface="Work Sans"/>
-                          <a:sym typeface="Work Sans"/>
-                        </a:rPr>
-                        <a:t>0.5907</a:t>
-                      </a:r>
-                      <a:endParaRPr lang="en-US" sz="1100"/>
-                    </a:p>
-                  </a:txBody>
-                  <a:tcPr marL="190500" marR="190500" marT="190500" marB="190500" anchor="ctr">
-                    <a:lnL w="38100" cap="flat" cmpd="sng" algn="ctr">
-                      <a:solidFill>
-                        <a:srgbClr val="FFFFFF"/>
-                      </a:solidFill>
-                      <a:prstDash val="solid"/>
-                      <a:round/>
-                      <a:headEnd type="none" w="med" len="med"/>
-                      <a:tailEnd type="none" w="med" len="med"/>
-                    </a:lnL>
-                    <a:lnR w="38100" cap="flat" cmpd="sng" algn="ctr">
-                      <a:solidFill>
-                        <a:srgbClr val="FFFFFF"/>
-                      </a:solidFill>
-                      <a:prstDash val="solid"/>
-                      <a:round/>
-                      <a:headEnd type="none" w="med" len="med"/>
-                      <a:tailEnd type="none" w="med" len="med"/>
-                    </a:lnR>
-                    <a:lnT w="38100" cap="flat" cmpd="sng" algn="ctr">
-                      <a:solidFill>
-                        <a:srgbClr val="FFFFFF"/>
-                      </a:solidFill>
-                      <a:prstDash val="solid"/>
-                      <a:round/>
-                      <a:headEnd type="none" w="med" len="med"/>
-                      <a:tailEnd type="none" w="med" len="med"/>
-                    </a:lnT>
-                    <a:lnB w="38100" cap="flat" cmpd="sng" algn="ctr">
-                      <a:solidFill>
-                        <a:srgbClr val="FFFFFF"/>
-                      </a:solidFill>
-                      <a:prstDash val="solid"/>
-                      <a:round/>
-                      <a:headEnd type="none" w="med" len="med"/>
-                      <a:tailEnd type="none" w="med" len="med"/>
-                    </a:lnB>
-                  </a:tcPr>
-                </a:tc>
-                <a:extLst>
-                  <a:ext uri="{0D108BD9-81ED-4DB2-BD59-A6C34878D82A}">
-                    <a16:rowId xmlns:a16="http://schemas.microsoft.com/office/drawing/2014/main" val="10004"/>
-                  </a:ext>
-                </a:extLst>
-              </a:tr>
-            </a:tbl>
-          </a:graphicData>
-        </a:graphic>
-      </p:graphicFrame>
-      <p:sp>
-        <p:nvSpPr>
-          <p:cNvPr id="5" name="Freeform 5"/>
-          <p:cNvSpPr/>
-          <p:nvPr/>
-        </p:nvSpPr>
-        <p:spPr>
-          <a:xfrm>
-            <a:off x="16133532" y="8408581"/>
-            <a:ext cx="1904388" cy="1560841"/>
-          </a:xfrm>
-          <a:custGeom>
-            <a:avLst/>
-            <a:gdLst/>
-            <a:ahLst/>
-            <a:cxnLst/>
-            <a:rect l="l" t="t" r="r" b="b"/>
-            <a:pathLst>
-              <a:path w="1904388" h="1560841">
-                <a:moveTo>
-                  <a:pt x="0" y="0"/>
-                </a:moveTo>
-                <a:lnTo>
-                  <a:pt x="1904388" y="0"/>
-                </a:lnTo>
-                <a:lnTo>
-                  <a:pt x="1904388" y="1560841"/>
-                </a:lnTo>
-                <a:lnTo>
-                  <a:pt x="0" y="1560841"/>
-                </a:lnTo>
-                <a:lnTo>
-                  <a:pt x="0" y="0"/>
-                </a:lnTo>
-                <a:close/>
-              </a:path>
-            </a:pathLst>
-          </a:custGeom>
-          <a:blipFill>
-            <a:blip r:embed="rId2">
-              <a:alphaModFix amt="97000"/>
-            </a:blip>
-            <a:stretch>
-              <a:fillRect/>
-            </a:stretch>
-          </a:blipFill>
-        </p:spPr>
-      </p:sp>
       <p:sp>
         <p:nvSpPr>
           <p:cNvPr id="6" name="TextBox 6"/>
@@ -5343,7 +4473,7 @@
         </p:nvSpPr>
         <p:spPr>
           <a:xfrm>
-            <a:off x="3416636" y="1034247"/>
+            <a:off x="3416639" y="800100"/>
             <a:ext cx="11871275" cy="930275"/>
           </a:xfrm>
           <a:prstGeom prst="rect">
@@ -5365,7 +4495,7 @@
               </a:spcBef>
             </a:pPr>
             <a:r>
-              <a:rPr lang="en-US" sz="6999" b="1" spc="-384">
+              <a:rPr lang="en-US" sz="6999" b="1" spc="-384" dirty="0">
                 <a:solidFill>
                   <a:srgbClr val="FFFFFF"/>
                 </a:solidFill>
@@ -5381,14 +4511,58 @@
       </p:sp>
       <p:sp>
         <p:nvSpPr>
-          <p:cNvPr id="7" name="TextBox 7"/>
+          <p:cNvPr id="8" name="TextBox 8"/>
           <p:cNvSpPr txBox="1"/>
           <p:nvPr/>
         </p:nvSpPr>
         <p:spPr>
           <a:xfrm>
-            <a:off x="742152" y="9671264"/>
-            <a:ext cx="14327330" cy="330200"/>
+            <a:off x="381000" y="3290837"/>
+            <a:ext cx="1620048" cy="384721"/>
+          </a:xfrm>
+          <a:prstGeom prst="rect">
+            <a:avLst/>
+          </a:prstGeom>
+        </p:spPr>
+        <p:txBody>
+          <a:bodyPr wrap="square" lIns="0" tIns="0" rIns="0" bIns="0" rtlCol="0" anchor="t">
+            <a:spAutoFit/>
+          </a:bodyPr>
+          <a:lstStyle/>
+          <a:p>
+            <a:pPr algn="ctr">
+              <a:lnSpc>
+                <a:spcPts val="3000"/>
+              </a:lnSpc>
+              <a:spcBef>
+                <a:spcPct val="0"/>
+              </a:spcBef>
+            </a:pPr>
+            <a:r>
+              <a:rPr lang="en-US" sz="3000" b="1" spc="-165" dirty="0">
+                <a:solidFill>
+                  <a:srgbClr val="38B6FF"/>
+                </a:solidFill>
+                <a:latin typeface="Work Sans Semi-Bold"/>
+                <a:ea typeface="Work Sans Semi-Bold"/>
+                <a:cs typeface="Work Sans Semi-Bold"/>
+                <a:sym typeface="Work Sans Semi-Bold"/>
+              </a:rPr>
+              <a:t>Results</a:t>
+            </a:r>
+          </a:p>
+        </p:txBody>
+      </p:sp>
+      <p:sp>
+        <p:nvSpPr>
+          <p:cNvPr id="9" name="TextBox 9"/>
+          <p:cNvSpPr txBox="1"/>
+          <p:nvPr/>
+        </p:nvSpPr>
+        <p:spPr>
+          <a:xfrm>
+            <a:off x="10005450" y="3201581"/>
+            <a:ext cx="8032470" cy="5424562"/>
           </a:xfrm>
           <a:prstGeom prst="rect">
             <a:avLst/>
@@ -5402,123 +4576,11 @@
           <a:p>
             <a:pPr algn="l">
               <a:lnSpc>
-                <a:spcPts val="2499"/>
-              </a:lnSpc>
-              <a:spcBef>
-                <a:spcPct val="0"/>
-              </a:spcBef>
-            </a:pPr>
-            <a:r>
-              <a:rPr lang="en-US" sz="2499" spc="-137">
-                <a:solidFill>
-                  <a:srgbClr val="FFFFFF"/>
-                </a:solidFill>
-                <a:latin typeface="Work Sans"/>
-                <a:ea typeface="Work Sans"/>
-                <a:cs typeface="Work Sans"/>
-                <a:sym typeface="Work Sans"/>
-              </a:rPr>
-              <a:t>How Ensemble was calculated: Weighted average — each model weighted by its validation </a:t>
-            </a:r>
-            <a:r>
-              <a:rPr lang="en-US" sz="2499" spc="-137">
-                <a:solidFill>
-                  <a:srgbClr val="38B6FF"/>
-                </a:solidFill>
-                <a:latin typeface="Work Sans"/>
-                <a:ea typeface="Work Sans"/>
-                <a:cs typeface="Work Sans"/>
-                <a:sym typeface="Work Sans"/>
-              </a:rPr>
-              <a:t>ROC AUC</a:t>
-            </a:r>
-            <a:r>
-              <a:rPr lang="en-US" sz="2499" spc="-137">
-                <a:solidFill>
-                  <a:srgbClr val="FFFFFF"/>
-                </a:solidFill>
-                <a:latin typeface="Work Sans"/>
-                <a:ea typeface="Work Sans"/>
-                <a:cs typeface="Work Sans"/>
-                <a:sym typeface="Work Sans"/>
-              </a:rPr>
-              <a:t>.</a:t>
-            </a:r>
-          </a:p>
-        </p:txBody>
-      </p:sp>
-      <p:sp>
-        <p:nvSpPr>
-          <p:cNvPr id="8" name="TextBox 8"/>
-          <p:cNvSpPr txBox="1"/>
-          <p:nvPr/>
-        </p:nvSpPr>
-        <p:spPr>
-          <a:xfrm>
-            <a:off x="742152" y="3214281"/>
-            <a:ext cx="1247477" cy="419100"/>
-          </a:xfrm>
-          <a:prstGeom prst="rect">
-            <a:avLst/>
-          </a:prstGeom>
-        </p:spPr>
-        <p:txBody>
-          <a:bodyPr lIns="0" tIns="0" rIns="0" bIns="0" rtlCol="0" anchor="t">
-            <a:spAutoFit/>
-          </a:bodyPr>
-          <a:lstStyle/>
-          <a:p>
-            <a:pPr algn="ctr">
-              <a:lnSpc>
-                <a:spcPts val="3000"/>
-              </a:lnSpc>
-              <a:spcBef>
-                <a:spcPct val="0"/>
-              </a:spcBef>
-            </a:pPr>
-            <a:r>
-              <a:rPr lang="en-US" sz="3000" b="1" spc="-165">
-                <a:solidFill>
-                  <a:srgbClr val="38B6FF"/>
-                </a:solidFill>
-                <a:latin typeface="Work Sans Semi-Bold"/>
-                <a:ea typeface="Work Sans Semi-Bold"/>
-                <a:cs typeface="Work Sans Semi-Bold"/>
-                <a:sym typeface="Work Sans Semi-Bold"/>
-              </a:rPr>
-              <a:t>Results</a:t>
-            </a:r>
-          </a:p>
-        </p:txBody>
-      </p:sp>
-      <p:sp>
-        <p:nvSpPr>
-          <p:cNvPr id="9" name="TextBox 9"/>
-          <p:cNvSpPr txBox="1"/>
-          <p:nvPr/>
-        </p:nvSpPr>
-        <p:spPr>
-          <a:xfrm>
-            <a:off x="9668108" y="3138081"/>
-            <a:ext cx="8032470" cy="4994275"/>
-          </a:xfrm>
-          <a:prstGeom prst="rect">
-            <a:avLst/>
-          </a:prstGeom>
-        </p:spPr>
-        <p:txBody>
-          <a:bodyPr lIns="0" tIns="0" rIns="0" bIns="0" rtlCol="0" anchor="t">
-            <a:spAutoFit/>
-          </a:bodyPr>
-          <a:lstStyle/>
-          <a:p>
-            <a:pPr algn="l">
-              <a:lnSpc>
                 <a:spcPts val="3899"/>
               </a:lnSpc>
             </a:pPr>
             <a:r>
-              <a:rPr lang="en-US" sz="2999" b="1" spc="-164">
+              <a:rPr lang="en-US" sz="2999" b="1" spc="-164" dirty="0">
                 <a:solidFill>
                   <a:srgbClr val="38B6FF"/>
                 </a:solidFill>
@@ -5531,7 +4593,7 @@
             </a:r>
           </a:p>
           <a:p>
-            <a:pPr marL="539749" lvl="1" indent="-269875" algn="l">
+            <a:pPr marL="539749" lvl="1" indent="-269875">
               <a:lnSpc>
                 <a:spcPts val="3249"/>
               </a:lnSpc>
@@ -5539,25 +4601,89 @@
               <a:buChar char="•"/>
             </a:pPr>
             <a:r>
-              <a:rPr lang="en-US" sz="2499" spc="-137">
-                <a:solidFill>
-                  <a:srgbClr val="FFFFFF"/>
-                </a:solidFill>
-                <a:latin typeface="Work Sans"/>
-                <a:ea typeface="Work Sans"/>
-                <a:cs typeface="Work Sans"/>
-                <a:sym typeface="Work Sans"/>
-              </a:rPr>
-              <a:t>XGBoost PR AUC (0.5641) is below the v0 baseline (0.5804) — weak fraud-class performance</a:t>
-            </a:r>
-          </a:p>
-          <a:p>
-            <a:pPr algn="l">
+              <a:rPr lang="en-US" sz="2499" spc="-137" dirty="0" err="1">
+                <a:solidFill>
+                  <a:srgbClr val="FFFFFF"/>
+                </a:solidFill>
+                <a:latin typeface="Work Sans"/>
+              </a:rPr>
+              <a:t>XGBoost</a:t>
+            </a:r>
+            <a:r>
+              <a:rPr lang="en-US" sz="2499" spc="-137" dirty="0">
+                <a:solidFill>
+                  <a:srgbClr val="FFFFFF"/>
+                </a:solidFill>
+                <a:latin typeface="Work Sans"/>
+              </a:rPr>
+              <a:t> tried in multiple configurations: standalone, weighted ensemble with </a:t>
+            </a:r>
+            <a:r>
+              <a:rPr lang="en-US" sz="2499" spc="-137" dirty="0" err="1">
+                <a:solidFill>
+                  <a:srgbClr val="FFFFFF"/>
+                </a:solidFill>
+                <a:latin typeface="Work Sans"/>
+              </a:rPr>
+              <a:t>LightGBM</a:t>
+            </a:r>
+            <a:r>
+              <a:rPr lang="en-US" sz="2499" spc="-137" dirty="0">
+                <a:solidFill>
+                  <a:srgbClr val="FFFFFF"/>
+                </a:solidFill>
+                <a:latin typeface="Work Sans"/>
+              </a:rPr>
+              <a:t>, and on </a:t>
+            </a:r>
+            <a:r>
+              <a:rPr lang="en-US" sz="2499" spc="-137" dirty="0" err="1">
+                <a:solidFill>
+                  <a:srgbClr val="FFFFFF"/>
+                </a:solidFill>
+                <a:latin typeface="Work Sans"/>
+              </a:rPr>
+              <a:t>LightGBM's</a:t>
+            </a:r>
+            <a:r>
+              <a:rPr lang="en-US" sz="2499" spc="-137" dirty="0">
+                <a:solidFill>
+                  <a:srgbClr val="FFFFFF"/>
+                </a:solidFill>
+                <a:latin typeface="Work Sans"/>
+              </a:rPr>
+              <a:t> top-100 features — all below </a:t>
+            </a:r>
+            <a:r>
+              <a:rPr lang="en-US" sz="2800" dirty="0" err="1">
+                <a:solidFill>
+                  <a:schemeClr val="bg1"/>
+                </a:solidFill>
+              </a:rPr>
+              <a:t>LightGBM</a:t>
+            </a:r>
+            <a:r>
+              <a:rPr lang="en-US" sz="2800" dirty="0">
+                <a:solidFill>
+                  <a:schemeClr val="bg1"/>
+                </a:solidFill>
+              </a:rPr>
+              <a:t> on PR AUC</a:t>
+            </a:r>
+            <a:endParaRPr lang="en-US" sz="2499" spc="-137" dirty="0">
+              <a:solidFill>
+                <a:schemeClr val="bg1"/>
+              </a:solidFill>
+              <a:latin typeface="Work Sans"/>
+            </a:endParaRPr>
+          </a:p>
+          <a:p>
+            <a:pPr marL="269874" lvl="1">
               <a:lnSpc>
                 <a:spcPts val="3249"/>
               </a:lnSpc>
             </a:pPr>
-            <a:endParaRPr lang="en-US" sz="2499" spc="-137">
+            <a:endParaRPr lang="en-US" sz="2499" spc="-137" dirty="0">
               <a:solidFill>
                 <a:srgbClr val="FFFFFF"/>
               </a:solidFill>
@@ -5576,7 +4702,7 @@
               <a:buChar char="•"/>
             </a:pPr>
             <a:r>
-              <a:rPr lang="en-US" sz="2499" spc="-137">
+              <a:rPr lang="en-US" sz="2499" spc="-137" dirty="0" err="1">
                 <a:solidFill>
                   <a:srgbClr val="FFFFFF"/>
                 </a:solidFill>
@@ -5585,7 +4711,19 @@
                 <a:cs typeface="Work Sans"/>
                 <a:sym typeface="Work Sans"/>
               </a:rPr>
-              <a:t>A weighted ensemble with a weak component is worse than the best individual model alone</a:t>
+              <a:t>CatBoost</a:t>
+            </a:r>
+            <a:r>
+              <a:rPr lang="en-US" sz="2499" spc="-137" dirty="0">
+                <a:solidFill>
+                  <a:srgbClr val="FFFFFF"/>
+                </a:solidFill>
+                <a:latin typeface="Work Sans"/>
+                <a:ea typeface="Work Sans"/>
+                <a:cs typeface="Work Sans"/>
+                <a:sym typeface="Work Sans"/>
+              </a:rPr>
+              <a:t> excluded - Optuna killed after ~10h at ~50% completion</a:t>
             </a:r>
           </a:p>
           <a:p>
@@ -5594,7 +4732,7 @@
                 <a:spcPts val="3249"/>
               </a:lnSpc>
             </a:pPr>
-            <a:endParaRPr lang="en-US" sz="2499" spc="-137">
+            <a:endParaRPr lang="en-US" sz="2499" spc="-137" dirty="0">
               <a:solidFill>
                 <a:srgbClr val="FFFFFF"/>
               </a:solidFill>
@@ -5605,90 +4743,819 @@
             </a:endParaRPr>
           </a:p>
           <a:p>
-            <a:pPr marL="539749" lvl="1" indent="-269875" algn="l">
+            <a:pPr algn="l">
               <a:lnSpc>
                 <a:spcPts val="3249"/>
               </a:lnSpc>
-              <a:buFont typeface="Arial"/>
+            </a:pPr>
+            <a:r>
+              <a:rPr lang="en-US" sz="2999" b="1" spc="-164" dirty="0">
+                <a:solidFill>
+                  <a:srgbClr val="38B6FF"/>
+                </a:solidFill>
+                <a:latin typeface="Work Sans Bold"/>
+                <a:sym typeface="Work Sans Bold"/>
+              </a:rPr>
+              <a:t>Selected:</a:t>
+            </a:r>
+          </a:p>
+          <a:p>
+            <a:pPr marL="457200" indent="-457200">
+              <a:lnSpc>
+                <a:spcPts val="3249"/>
+              </a:lnSpc>
+              <a:buFont typeface="Arial" panose="020B0604020202020204" pitchFamily="34" charset="0"/>
               <a:buChar char="•"/>
             </a:pPr>
             <a:r>
-              <a:rPr lang="en-US" sz="2499" spc="-137">
-                <a:solidFill>
-                  <a:srgbClr val="FFFFFF"/>
-                </a:solidFill>
-                <a:latin typeface="Work Sans"/>
-                <a:ea typeface="Work Sans"/>
-                <a:cs typeface="Work Sans"/>
-                <a:sym typeface="Work Sans"/>
-              </a:rPr>
-              <a:t>Note: CatBoost excluded - Optuna killed after ~10h at ~50% completion</a:t>
-            </a:r>
-          </a:p>
-          <a:p>
-            <a:pPr algn="l">
+              <a:rPr lang="en-US" sz="2800" dirty="0">
+                <a:solidFill>
+                  <a:schemeClr val="bg1"/>
+                </a:solidFill>
+              </a:rPr>
+              <a:t>V2 and V3 optimized on different objectives (partially uncorrelated errors)</a:t>
+            </a:r>
+          </a:p>
+          <a:p>
+            <a:pPr marL="457200" indent="-457200">
               <a:lnSpc>
                 <a:spcPts val="3249"/>
               </a:lnSpc>
-            </a:pPr>
-            <a:endParaRPr lang="en-US" sz="2499" spc="-137">
+              <a:buFont typeface="Arial" panose="020B0604020202020204" pitchFamily="34" charset="0"/>
+              <a:buChar char="•"/>
+            </a:pPr>
+            <a:r>
+              <a:rPr lang="en-US" sz="2800" dirty="0">
+                <a:solidFill>
+                  <a:schemeClr val="bg1"/>
+                </a:solidFill>
+              </a:rPr>
+              <a:t> </a:t>
+            </a:r>
+            <a:r>
+              <a:rPr lang="en-US" sz="2999" b="1" spc="-164" dirty="0">
+                <a:solidFill>
+                  <a:srgbClr val="38B6FF"/>
+                </a:solidFill>
+                <a:latin typeface="Work Sans Bold"/>
+              </a:rPr>
+              <a:t>Averaging</a:t>
+            </a:r>
+            <a:r>
+              <a:rPr lang="en-US" sz="2800" dirty="0">
+                <a:solidFill>
+                  <a:schemeClr val="bg1"/>
+                </a:solidFill>
+              </a:rPr>
+              <a:t> is effective (</a:t>
+            </a:r>
+            <a:r>
+              <a:rPr lang="en-US" sz="2800" b="1" dirty="0">
+                <a:solidFill>
+                  <a:schemeClr val="bg1"/>
+                </a:solidFill>
+              </a:rPr>
+              <a:t>Ensemble V2 + V3</a:t>
+            </a:r>
+            <a:r>
+              <a:rPr lang="en-US" sz="2800" dirty="0">
+                <a:solidFill>
+                  <a:schemeClr val="bg1"/>
+                </a:solidFill>
+              </a:rPr>
+              <a:t>)</a:t>
+            </a:r>
+            <a:endParaRPr lang="en-US" sz="2499" b="1" spc="-137" dirty="0">
+              <a:solidFill>
+                <a:schemeClr val="bg1"/>
+              </a:solidFill>
+              <a:latin typeface="Work Sans Bold"/>
+              <a:ea typeface="Work Sans Bold"/>
+              <a:cs typeface="Work Sans Bold"/>
+              <a:sym typeface="Work Sans Bold"/>
+            </a:endParaRPr>
+          </a:p>
+        </p:txBody>
+      </p:sp>
+      <p:graphicFrame>
+        <p:nvGraphicFramePr>
+          <p:cNvPr id="11" name="Table 10">
+            <a:extLst>
+              <a:ext uri="{FF2B5EF4-FFF2-40B4-BE49-F238E27FC236}">
+                <a16:creationId xmlns:a16="http://schemas.microsoft.com/office/drawing/2014/main" id="{FFE8118B-F272-5C8F-3BAB-54801A6D11E9}"/>
+              </a:ext>
+            </a:extLst>
+          </p:cNvPr>
+          <p:cNvGraphicFramePr>
+            <a:graphicFrameLocks noGrp="1"/>
+          </p:cNvGraphicFramePr>
+          <p:nvPr>
+            <p:extLst>
+              <p:ext uri="{D42A27DB-BD31-4B8C-83A1-F6EECF244321}">
+                <p14:modId xmlns:p14="http://schemas.microsoft.com/office/powerpoint/2010/main" val="20890394"/>
+              </p:ext>
+            </p:extLst>
+          </p:nvPr>
+        </p:nvGraphicFramePr>
+        <p:xfrm>
+          <a:off x="590032" y="3980358"/>
+          <a:ext cx="8610600" cy="2926080"/>
+        </p:xfrm>
+        <a:graphic>
+          <a:graphicData uri="http://schemas.openxmlformats.org/drawingml/2006/table">
+            <a:tbl>
+              <a:tblPr firstRow="1" bandRow="1">
+                <a:tableStyleId>{5C22544A-7EE6-4342-B048-85BDC9FD1C3A}</a:tableStyleId>
+              </a:tblPr>
+              <a:tblGrid>
+                <a:gridCol w="3448568">
+                  <a:extLst>
+                    <a:ext uri="{9D8B030D-6E8A-4147-A177-3AD203B41FA5}">
+                      <a16:colId xmlns:a16="http://schemas.microsoft.com/office/drawing/2014/main" val="1414329781"/>
+                    </a:ext>
+                  </a:extLst>
+                </a:gridCol>
+                <a:gridCol w="1352032">
+                  <a:extLst>
+                    <a:ext uri="{9D8B030D-6E8A-4147-A177-3AD203B41FA5}">
+                      <a16:colId xmlns:a16="http://schemas.microsoft.com/office/drawing/2014/main" val="2740742044"/>
+                    </a:ext>
+                  </a:extLst>
+                </a:gridCol>
+                <a:gridCol w="1162568">
+                  <a:extLst>
+                    <a:ext uri="{9D8B030D-6E8A-4147-A177-3AD203B41FA5}">
+                      <a16:colId xmlns:a16="http://schemas.microsoft.com/office/drawing/2014/main" val="2083964240"/>
+                    </a:ext>
+                  </a:extLst>
+                </a:gridCol>
+                <a:gridCol w="1352032">
+                  <a:extLst>
+                    <a:ext uri="{9D8B030D-6E8A-4147-A177-3AD203B41FA5}">
+                      <a16:colId xmlns:a16="http://schemas.microsoft.com/office/drawing/2014/main" val="326128958"/>
+                    </a:ext>
+                  </a:extLst>
+                </a:gridCol>
+                <a:gridCol w="1295400">
+                  <a:extLst>
+                    <a:ext uri="{9D8B030D-6E8A-4147-A177-3AD203B41FA5}">
+                      <a16:colId xmlns:a16="http://schemas.microsoft.com/office/drawing/2014/main" val="3702150588"/>
+                    </a:ext>
+                  </a:extLst>
+                </a:gridCol>
+              </a:tblGrid>
+              <a:tr h="370840">
+                <a:tc>
+                  <a:txBody>
+                    <a:bodyPr/>
+                    <a:lstStyle/>
+                    <a:p>
+                      <a:pPr>
+                        <a:buNone/>
+                      </a:pPr>
+                      <a:r>
+                        <a:rPr lang="en-US" sz="2400" b="1" dirty="0">
+                          <a:solidFill>
+                            <a:schemeClr val="bg1"/>
+                          </a:solidFill>
+                        </a:rPr>
+                        <a:t>Model</a:t>
+                      </a:r>
+                    </a:p>
+                  </a:txBody>
+                  <a:tcPr anchor="ctr"/>
+                </a:tc>
+                <a:tc>
+                  <a:txBody>
+                    <a:bodyPr/>
+                    <a:lstStyle/>
+                    <a:p>
+                      <a:pPr>
+                        <a:buNone/>
+                      </a:pPr>
+                      <a:r>
+                        <a:rPr lang="en-US" sz="2400" b="1">
+                          <a:solidFill>
+                            <a:schemeClr val="bg1"/>
+                          </a:solidFill>
+                        </a:rPr>
+                        <a:t>Val ROC</a:t>
+                      </a:r>
+                    </a:p>
+                  </a:txBody>
+                  <a:tcPr anchor="ctr"/>
+                </a:tc>
+                <a:tc>
+                  <a:txBody>
+                    <a:bodyPr/>
+                    <a:lstStyle/>
+                    <a:p>
+                      <a:pPr>
+                        <a:buNone/>
+                      </a:pPr>
+                      <a:r>
+                        <a:rPr lang="en-US" sz="2400" b="1" dirty="0">
+                          <a:solidFill>
+                            <a:schemeClr val="bg1"/>
+                          </a:solidFill>
+                        </a:rPr>
+                        <a:t>Val PR</a:t>
+                      </a:r>
+                    </a:p>
+                  </a:txBody>
+                  <a:tcPr anchor="ctr"/>
+                </a:tc>
+                <a:tc>
+                  <a:txBody>
+                    <a:bodyPr/>
+                    <a:lstStyle/>
+                    <a:p>
+                      <a:pPr>
+                        <a:buNone/>
+                      </a:pPr>
+                      <a:r>
+                        <a:rPr lang="en-US" sz="2400" b="1" dirty="0">
+                          <a:solidFill>
+                            <a:schemeClr val="bg1"/>
+                          </a:solidFill>
+                        </a:rPr>
+                        <a:t>Test ROC</a:t>
+                      </a:r>
+                    </a:p>
+                  </a:txBody>
+                  <a:tcPr anchor="ctr"/>
+                </a:tc>
+                <a:tc>
+                  <a:txBody>
+                    <a:bodyPr/>
+                    <a:lstStyle/>
+                    <a:p>
+                      <a:pPr>
+                        <a:buNone/>
+                      </a:pPr>
+                      <a:r>
+                        <a:rPr lang="en-US" sz="2400" b="1" dirty="0">
+                          <a:solidFill>
+                            <a:schemeClr val="bg1"/>
+                          </a:solidFill>
+                        </a:rPr>
+                        <a:t>Test PR</a:t>
+                      </a:r>
+                    </a:p>
+                  </a:txBody>
+                  <a:tcPr anchor="ctr"/>
+                </a:tc>
+                <a:extLst>
+                  <a:ext uri="{0D108BD9-81ED-4DB2-BD59-A6C34878D82A}">
+                    <a16:rowId xmlns:a16="http://schemas.microsoft.com/office/drawing/2014/main" val="1891069190"/>
+                  </a:ext>
+                </a:extLst>
+              </a:tr>
+              <a:tr h="370840">
+                <a:tc>
+                  <a:txBody>
+                    <a:bodyPr/>
+                    <a:lstStyle/>
+                    <a:p>
+                      <a:pPr>
+                        <a:buNone/>
+                      </a:pPr>
+                      <a:r>
+                        <a:rPr lang="en-US" sz="2400" dirty="0">
+                          <a:solidFill>
+                            <a:schemeClr val="tx1"/>
+                          </a:solidFill>
+                        </a:rPr>
+                        <a:t>V2: </a:t>
+                      </a:r>
+                      <a:r>
+                        <a:rPr lang="en-US" sz="2400" dirty="0" err="1">
+                          <a:solidFill>
+                            <a:schemeClr val="tx1"/>
+                          </a:solidFill>
+                        </a:rPr>
+                        <a:t>LightGBM</a:t>
+                      </a:r>
+                      <a:r>
+                        <a:rPr lang="en-US" sz="2400" dirty="0">
+                          <a:solidFill>
+                            <a:schemeClr val="tx1"/>
+                          </a:solidFill>
+                        </a:rPr>
+                        <a:t> </a:t>
+                      </a:r>
+                    </a:p>
+                    <a:p>
+                      <a:pPr>
+                        <a:buNone/>
+                      </a:pPr>
+                      <a:r>
+                        <a:rPr lang="en-US" sz="2400" dirty="0">
+                          <a:solidFill>
+                            <a:schemeClr val="tx1"/>
+                          </a:solidFill>
+                        </a:rPr>
+                        <a:t>(ROC AUC objective)</a:t>
+                      </a:r>
+                    </a:p>
+                  </a:txBody>
+                  <a:tcPr anchor="ctr"/>
+                </a:tc>
+                <a:tc>
+                  <a:txBody>
+                    <a:bodyPr/>
+                    <a:lstStyle/>
+                    <a:p>
+                      <a:pPr>
+                        <a:buNone/>
+                      </a:pPr>
+                      <a:r>
+                        <a:rPr lang="en-IL" sz="2400" dirty="0">
+                          <a:solidFill>
+                            <a:schemeClr val="tx1"/>
+                          </a:solidFill>
+                        </a:rPr>
+                        <a:t>0.9327</a:t>
+                      </a:r>
+                    </a:p>
+                  </a:txBody>
+                  <a:tcPr anchor="ctr"/>
+                </a:tc>
+                <a:tc>
+                  <a:txBody>
+                    <a:bodyPr/>
+                    <a:lstStyle/>
+                    <a:p>
+                      <a:pPr>
+                        <a:buNone/>
+                      </a:pPr>
+                      <a:r>
+                        <a:rPr lang="en-IL" sz="2400" dirty="0">
+                          <a:solidFill>
+                            <a:schemeClr val="tx1"/>
+                          </a:solidFill>
+                        </a:rPr>
+                        <a:t>0.6281</a:t>
+                      </a:r>
+                    </a:p>
+                  </a:txBody>
+                  <a:tcPr anchor="ctr"/>
+                </a:tc>
+                <a:tc>
+                  <a:txBody>
+                    <a:bodyPr/>
+                    <a:lstStyle/>
+                    <a:p>
+                      <a:pPr>
+                        <a:buNone/>
+                      </a:pPr>
+                      <a:r>
+                        <a:rPr lang="en-IL" sz="2400">
+                          <a:solidFill>
+                            <a:schemeClr val="tx1"/>
+                          </a:solidFill>
+                        </a:rPr>
+                        <a:t>0.8974</a:t>
+                      </a:r>
+                    </a:p>
+                  </a:txBody>
+                  <a:tcPr anchor="ctr"/>
+                </a:tc>
+                <a:tc>
+                  <a:txBody>
+                    <a:bodyPr/>
+                    <a:lstStyle/>
+                    <a:p>
+                      <a:pPr>
+                        <a:buNone/>
+                      </a:pPr>
+                      <a:r>
+                        <a:rPr lang="en-IL" sz="2400" dirty="0">
+                          <a:solidFill>
+                            <a:schemeClr val="tx1"/>
+                          </a:solidFill>
+                        </a:rPr>
+                        <a:t>0.5087</a:t>
+                      </a:r>
+                    </a:p>
+                  </a:txBody>
+                  <a:tcPr anchor="ctr"/>
+                </a:tc>
+                <a:extLst>
+                  <a:ext uri="{0D108BD9-81ED-4DB2-BD59-A6C34878D82A}">
+                    <a16:rowId xmlns:a16="http://schemas.microsoft.com/office/drawing/2014/main" val="625362071"/>
+                  </a:ext>
+                </a:extLst>
+              </a:tr>
+              <a:tr h="370840">
+                <a:tc>
+                  <a:txBody>
+                    <a:bodyPr/>
+                    <a:lstStyle/>
+                    <a:p>
+                      <a:pPr>
+                        <a:buNone/>
+                      </a:pPr>
+                      <a:r>
+                        <a:rPr lang="en-US" sz="2400" dirty="0">
+                          <a:solidFill>
+                            <a:schemeClr val="tx1"/>
+                          </a:solidFill>
+                        </a:rPr>
+                        <a:t>V3: </a:t>
+                      </a:r>
+                      <a:r>
+                        <a:rPr lang="en-US" sz="2400" dirty="0" err="1">
+                          <a:solidFill>
+                            <a:schemeClr val="tx1"/>
+                          </a:solidFill>
+                        </a:rPr>
+                        <a:t>LightGBM</a:t>
+                      </a:r>
+                      <a:r>
+                        <a:rPr lang="en-US" sz="2400" dirty="0">
+                          <a:solidFill>
+                            <a:schemeClr val="tx1"/>
+                          </a:solidFill>
+                        </a:rPr>
+                        <a:t> </a:t>
+                      </a:r>
+                    </a:p>
+                    <a:p>
+                      <a:pPr>
+                        <a:buNone/>
+                      </a:pPr>
+                      <a:r>
+                        <a:rPr lang="en-US" sz="2400" dirty="0">
+                          <a:solidFill>
+                            <a:schemeClr val="tx1"/>
+                          </a:solidFill>
+                        </a:rPr>
+                        <a:t>(PR AUC + weights)</a:t>
+                      </a:r>
+                    </a:p>
+                  </a:txBody>
+                  <a:tcPr anchor="ctr"/>
+                </a:tc>
+                <a:tc>
+                  <a:txBody>
+                    <a:bodyPr/>
+                    <a:lstStyle/>
+                    <a:p>
+                      <a:pPr>
+                        <a:buNone/>
+                      </a:pPr>
+                      <a:r>
+                        <a:rPr lang="en-IL" sz="2400">
+                          <a:solidFill>
+                            <a:schemeClr val="tx1"/>
+                          </a:solidFill>
+                        </a:rPr>
+                        <a:t>0.9241</a:t>
+                      </a:r>
+                    </a:p>
+                  </a:txBody>
+                  <a:tcPr anchor="ctr"/>
+                </a:tc>
+                <a:tc>
+                  <a:txBody>
+                    <a:bodyPr/>
+                    <a:lstStyle/>
+                    <a:p>
+                      <a:pPr>
+                        <a:buNone/>
+                      </a:pPr>
+                      <a:r>
+                        <a:rPr lang="en-IL" sz="2400">
+                          <a:solidFill>
+                            <a:schemeClr val="tx1"/>
+                          </a:solidFill>
+                        </a:rPr>
+                        <a:t>0.6470</a:t>
+                      </a:r>
+                    </a:p>
+                  </a:txBody>
+                  <a:tcPr anchor="ctr"/>
+                </a:tc>
+                <a:tc>
+                  <a:txBody>
+                    <a:bodyPr/>
+                    <a:lstStyle/>
+                    <a:p>
+                      <a:pPr>
+                        <a:buNone/>
+                      </a:pPr>
+                      <a:r>
+                        <a:rPr lang="en-IL" sz="2400" dirty="0">
+                          <a:solidFill>
+                            <a:schemeClr val="tx1"/>
+                          </a:solidFill>
+                        </a:rPr>
+                        <a:t>0.8904</a:t>
+                      </a:r>
+                    </a:p>
+                  </a:txBody>
+                  <a:tcPr anchor="ctr"/>
+                </a:tc>
+                <a:tc>
+                  <a:txBody>
+                    <a:bodyPr/>
+                    <a:lstStyle/>
+                    <a:p>
+                      <a:pPr>
+                        <a:buNone/>
+                      </a:pPr>
+                      <a:r>
+                        <a:rPr lang="en-IL" sz="2400" dirty="0">
+                          <a:solidFill>
+                            <a:schemeClr val="tx1"/>
+                          </a:solidFill>
+                        </a:rPr>
+                        <a:t>0.5142</a:t>
+                      </a:r>
+                    </a:p>
+                  </a:txBody>
+                  <a:tcPr anchor="ctr"/>
+                </a:tc>
+                <a:extLst>
+                  <a:ext uri="{0D108BD9-81ED-4DB2-BD59-A6C34878D82A}">
+                    <a16:rowId xmlns:a16="http://schemas.microsoft.com/office/drawing/2014/main" val="3986938667"/>
+                  </a:ext>
+                </a:extLst>
+              </a:tr>
+              <a:tr h="370840">
+                <a:tc>
+                  <a:txBody>
+                    <a:bodyPr/>
+                    <a:lstStyle/>
+                    <a:p>
+                      <a:pPr>
+                        <a:buNone/>
+                      </a:pPr>
+                      <a:r>
+                        <a:rPr lang="en-US" sz="2400" b="1" dirty="0">
+                          <a:solidFill>
+                            <a:schemeClr val="tx1"/>
+                          </a:solidFill>
+                        </a:rPr>
+                        <a:t>★ Final: </a:t>
+                      </a:r>
+                    </a:p>
+                    <a:p>
+                      <a:pPr>
+                        <a:buNone/>
+                      </a:pPr>
+                      <a:r>
+                        <a:rPr lang="en-US" sz="2400" b="1" dirty="0">
+                          <a:solidFill>
+                            <a:schemeClr val="tx1"/>
+                          </a:solidFill>
+                        </a:rPr>
+                        <a:t>Ensemble (AVG) V2 + V3</a:t>
+                      </a:r>
+                      <a:endParaRPr lang="en-US" sz="2400" dirty="0">
+                        <a:solidFill>
+                          <a:schemeClr val="tx1"/>
+                        </a:solidFill>
+                      </a:endParaRPr>
+                    </a:p>
+                  </a:txBody>
+                  <a:tcPr anchor="ctr"/>
+                </a:tc>
+                <a:tc>
+                  <a:txBody>
+                    <a:bodyPr/>
+                    <a:lstStyle/>
+                    <a:p>
+                      <a:pPr>
+                        <a:buNone/>
+                      </a:pPr>
+                      <a:r>
+                        <a:rPr lang="en-IL" sz="2400" b="1" dirty="0">
+                          <a:solidFill>
+                            <a:schemeClr val="tx1"/>
+                          </a:solidFill>
+                        </a:rPr>
+                        <a:t>0.9342</a:t>
+                      </a:r>
+                      <a:endParaRPr lang="en-IL" sz="2400" dirty="0">
+                        <a:solidFill>
+                          <a:schemeClr val="tx1"/>
+                        </a:solidFill>
+                      </a:endParaRPr>
+                    </a:p>
+                  </a:txBody>
+                  <a:tcPr anchor="ctr"/>
+                </a:tc>
+                <a:tc>
+                  <a:txBody>
+                    <a:bodyPr/>
+                    <a:lstStyle/>
+                    <a:p>
+                      <a:pPr>
+                        <a:buNone/>
+                      </a:pPr>
+                      <a:r>
+                        <a:rPr lang="en-IL" sz="2400" b="1" dirty="0">
+                          <a:solidFill>
+                            <a:schemeClr val="tx1"/>
+                          </a:solidFill>
+                        </a:rPr>
+                        <a:t>0.6440</a:t>
+                      </a:r>
+                      <a:endParaRPr lang="en-IL" sz="2400" dirty="0">
+                        <a:solidFill>
+                          <a:schemeClr val="tx1"/>
+                        </a:solidFill>
+                      </a:endParaRPr>
+                    </a:p>
+                  </a:txBody>
+                  <a:tcPr anchor="ctr"/>
+                </a:tc>
+                <a:tc>
+                  <a:txBody>
+                    <a:bodyPr/>
+                    <a:lstStyle/>
+                    <a:p>
+                      <a:pPr>
+                        <a:buNone/>
+                      </a:pPr>
+                      <a:r>
+                        <a:rPr lang="en-IL" sz="2400" b="1">
+                          <a:solidFill>
+                            <a:schemeClr val="tx1"/>
+                          </a:solidFill>
+                        </a:rPr>
+                        <a:t>0.8990</a:t>
+                      </a:r>
+                      <a:endParaRPr lang="en-IL" sz="2400">
+                        <a:solidFill>
+                          <a:schemeClr val="tx1"/>
+                        </a:solidFill>
+                      </a:endParaRPr>
+                    </a:p>
+                  </a:txBody>
+                  <a:tcPr anchor="ctr"/>
+                </a:tc>
+                <a:tc>
+                  <a:txBody>
+                    <a:bodyPr/>
+                    <a:lstStyle/>
+                    <a:p>
+                      <a:pPr>
+                        <a:buNone/>
+                      </a:pPr>
+                      <a:r>
+                        <a:rPr lang="en-IL" sz="2400" b="1" dirty="0">
+                          <a:solidFill>
+                            <a:schemeClr val="tx1"/>
+                          </a:solidFill>
+                        </a:rPr>
+                        <a:t>0.5178</a:t>
+                      </a:r>
+                      <a:endParaRPr lang="en-IL" sz="2400" dirty="0">
+                        <a:solidFill>
+                          <a:schemeClr val="tx1"/>
+                        </a:solidFill>
+                      </a:endParaRPr>
+                    </a:p>
+                  </a:txBody>
+                  <a:tcPr anchor="ctr"/>
+                </a:tc>
+                <a:extLst>
+                  <a:ext uri="{0D108BD9-81ED-4DB2-BD59-A6C34878D82A}">
+                    <a16:rowId xmlns:a16="http://schemas.microsoft.com/office/drawing/2014/main" val="2793611602"/>
+                  </a:ext>
+                </a:extLst>
+              </a:tr>
+            </a:tbl>
+          </a:graphicData>
+        </a:graphic>
+      </p:graphicFrame>
+      <p:sp>
+        <p:nvSpPr>
+          <p:cNvPr id="13" name="TextBox 12">
+            <a:extLst>
+              <a:ext uri="{FF2B5EF4-FFF2-40B4-BE49-F238E27FC236}">
+                <a16:creationId xmlns:a16="http://schemas.microsoft.com/office/drawing/2014/main" id="{EC791C11-74B2-4F28-532B-EC4D89C5111A}"/>
+              </a:ext>
+            </a:extLst>
+          </p:cNvPr>
+          <p:cNvSpPr txBox="1"/>
+          <p:nvPr/>
+        </p:nvSpPr>
+        <p:spPr>
+          <a:xfrm>
+            <a:off x="459041" y="7211238"/>
+            <a:ext cx="9144000" cy="2784480"/>
+          </a:xfrm>
+          <a:prstGeom prst="rect">
+            <a:avLst/>
+          </a:prstGeom>
+          <a:noFill/>
+        </p:spPr>
+        <p:txBody>
+          <a:bodyPr wrap="square">
+            <a:spAutoFit/>
+          </a:bodyPr>
+          <a:lstStyle/>
+          <a:p>
+            <a:pPr marL="342900" indent="-342900">
+              <a:buFont typeface="Arial" panose="020B0604020202020204" pitchFamily="34" charset="0"/>
+              <a:buChar char="•"/>
+            </a:pPr>
+            <a:r>
+              <a:rPr lang="en-US" sz="2499" b="1" spc="-137" dirty="0">
+                <a:solidFill>
+                  <a:srgbClr val="FFFFFF"/>
+                </a:solidFill>
+                <a:latin typeface="Work Sans"/>
+              </a:rPr>
+              <a:t>Statistical baseline: </a:t>
+            </a:r>
+          </a:p>
+          <a:p>
+            <a:pPr marL="800100" lvl="1" indent="-342900">
+              <a:buFont typeface="Arial" panose="020B0604020202020204" pitchFamily="34" charset="0"/>
+              <a:buChar char="•"/>
+            </a:pPr>
+            <a:r>
+              <a:rPr lang="en-US" sz="2499" spc="-137" dirty="0">
+                <a:solidFill>
+                  <a:srgbClr val="FFFFFF"/>
+                </a:solidFill>
+                <a:latin typeface="Work Sans"/>
+              </a:rPr>
+              <a:t>predict everything as legitimate → 96.5% accuracy, </a:t>
+            </a:r>
+          </a:p>
+          <a:p>
+            <a:pPr marL="800100" lvl="1" indent="-342900">
+              <a:buFont typeface="Arial" panose="020B0604020202020204" pitchFamily="34" charset="0"/>
+              <a:buChar char="•"/>
+            </a:pPr>
+            <a:r>
+              <a:rPr lang="en-US" sz="2499" spc="-137" dirty="0">
+                <a:solidFill>
+                  <a:srgbClr val="FFFFFF"/>
+                </a:solidFill>
+                <a:latin typeface="Work Sans"/>
+              </a:rPr>
+              <a:t>PR AUC = 0.035 (3.5% fraud rate)</a:t>
+            </a:r>
+          </a:p>
+          <a:p>
+            <a:pPr lvl="1"/>
+            <a:endParaRPr lang="en-US" sz="2499" spc="-137" dirty="0">
               <a:solidFill>
                 <a:srgbClr val="FFFFFF"/>
               </a:solidFill>
               <a:latin typeface="Work Sans"/>
-              <a:ea typeface="Work Sans"/>
-              <a:cs typeface="Work Sans"/>
-              <a:sym typeface="Work Sans"/>
             </a:endParaRPr>
           </a:p>
           <a:p>
-            <a:pPr algn="l">
-              <a:lnSpc>
-                <a:spcPts val="3249"/>
-              </a:lnSpc>
-            </a:pPr>
-            <a:r>
-              <a:rPr lang="en-US" sz="2499" b="1" spc="-137">
-                <a:solidFill>
-                  <a:srgbClr val="FFFFFF"/>
-                </a:solidFill>
-                <a:latin typeface="Work Sans Bold"/>
-                <a:ea typeface="Work Sans Bold"/>
-                <a:cs typeface="Work Sans Bold"/>
-                <a:sym typeface="Work Sans Bold"/>
-              </a:rPr>
-              <a:t>Selected:</a:t>
-            </a:r>
-          </a:p>
-          <a:p>
-            <a:pPr algn="l">
-              <a:lnSpc>
-                <a:spcPts val="3249"/>
-              </a:lnSpc>
-            </a:pPr>
-            <a:r>
-              <a:rPr lang="en-US" sz="2499" b="1" spc="-137">
-                <a:solidFill>
-                  <a:srgbClr val="38B6FF"/>
-                </a:solidFill>
-                <a:latin typeface="Work Sans Bold"/>
-                <a:ea typeface="Work Sans Bold"/>
-                <a:cs typeface="Work Sans Bold"/>
-                <a:sym typeface="Work Sans Bold"/>
-              </a:rPr>
-              <a:t>LightGBM </a:t>
-            </a:r>
-            <a:r>
-              <a:rPr lang="en-US" sz="2499" b="1" spc="-137">
-                <a:solidFill>
-                  <a:srgbClr val="FFFFFF"/>
-                </a:solidFill>
-                <a:latin typeface="Work Sans Bold"/>
-                <a:ea typeface="Work Sans Bold"/>
-                <a:cs typeface="Work Sans Bold"/>
-                <a:sym typeface="Work Sans Bold"/>
-              </a:rPr>
-              <a:t>alone as the final production model</a:t>
+            <a:pPr marL="342900" indent="-342900">
+              <a:buFont typeface="Arial" panose="020B0604020202020204" pitchFamily="34" charset="0"/>
+              <a:buChar char="•"/>
+            </a:pPr>
+            <a:r>
+              <a:rPr lang="en-US" sz="2499" b="1" spc="-137" dirty="0">
+                <a:solidFill>
+                  <a:srgbClr val="FFFFFF"/>
+                </a:solidFill>
+                <a:latin typeface="Work Sans"/>
+              </a:rPr>
+              <a:t>Ensemble V2+V3: </a:t>
+            </a:r>
+          </a:p>
+          <a:p>
+            <a:pPr marL="800100" lvl="1" indent="-342900">
+              <a:buFont typeface="Arial" panose="020B0604020202020204" pitchFamily="34" charset="0"/>
+              <a:buChar char="•"/>
+            </a:pPr>
+            <a:r>
+              <a:rPr lang="en-US" sz="2499" spc="-137" dirty="0">
+                <a:solidFill>
+                  <a:srgbClr val="FFFFFF"/>
+                </a:solidFill>
+                <a:latin typeface="Work Sans"/>
+              </a:rPr>
+              <a:t>Test PR AUC = 0.5178</a:t>
+            </a:r>
+          </a:p>
+          <a:p>
+            <a:pPr marL="800100" lvl="1" indent="-342900">
+              <a:buFont typeface="Arial" panose="020B0604020202020204" pitchFamily="34" charset="0"/>
+              <a:buChar char="•"/>
+            </a:pPr>
+            <a:r>
+              <a:rPr lang="en-US" sz="2499" spc="-137" dirty="0">
+                <a:solidFill>
+                  <a:srgbClr val="FFFFFF"/>
+                </a:solidFill>
+                <a:latin typeface="Work Sans"/>
+              </a:rPr>
+              <a:t>Improvement = 0.5178 / 0.035 = ~14.8x</a:t>
             </a:r>
           </a:p>
         </p:txBody>
@@ -5823,6 +5690,13 @@
               <a:srgbClr val="103760"/>
             </a:solidFill>
           </p:spPr>
+          <p:txBody>
+            <a:bodyPr/>
+            <a:lstStyle/>
+            <a:p>
+              <a:endParaRPr lang="en-IL"/>
+            </a:p>
+          </p:txBody>
         </p:sp>
       </p:grpSp>
       <p:sp>
@@ -5833,8 +5707,8 @@
         </p:nvSpPr>
         <p:spPr>
           <a:xfrm>
-            <a:off x="11122450" y="2934496"/>
-            <a:ext cx="6357621" cy="2209004"/>
+            <a:off x="12573000" y="2207252"/>
+            <a:ext cx="5489150" cy="1883098"/>
           </a:xfrm>
           <a:custGeom>
             <a:avLst/>
@@ -5872,6 +5746,13 @@
             </a:stretch>
           </a:blipFill>
         </p:spPr>
+        <p:txBody>
+          <a:bodyPr/>
+          <a:lstStyle/>
+          <a:p>
+            <a:endParaRPr lang="en-IL"/>
+          </a:p>
+        </p:txBody>
       </p:sp>
       <p:sp>
         <p:nvSpPr>
@@ -5882,7 +5763,7 @@
         <p:spPr>
           <a:xfrm>
             <a:off x="3796382" y="1019965"/>
-            <a:ext cx="10695236" cy="930275"/>
+            <a:ext cx="10695236" cy="897682"/>
           </a:xfrm>
           <a:prstGeom prst="rect">
             <a:avLst/>
@@ -5903,17 +5784,21 @@
               </a:spcBef>
             </a:pPr>
             <a:r>
-              <a:rPr lang="en-US" sz="6999" b="1" spc="-384">
+              <a:rPr lang="en-US" sz="6999" b="1" spc="-384" dirty="0">
                 <a:solidFill>
                   <a:srgbClr val="FFFFFF"/>
                 </a:solidFill>
                 <a:latin typeface="Work Sans Semi-Bold"/>
-                <a:ea typeface="Work Sans Semi-Bold"/>
-                <a:cs typeface="Work Sans Semi-Bold"/>
-                <a:sym typeface="Work Sans Semi-Bold"/>
-              </a:rPr>
-              <a:t>Summary &amp; Kaggle Context</a:t>
-            </a:r>
+              </a:rPr>
+              <a:t>Pipeline Summary</a:t>
+            </a:r>
+            <a:endParaRPr lang="en-US" sz="6999" b="1" spc="-384" dirty="0">
+              <a:solidFill>
+                <a:srgbClr val="FFFFFF"/>
+              </a:solidFill>
+              <a:latin typeface="Work Sans Semi-Bold"/>
+              <a:sym typeface="Work Sans Semi-Bold"/>
+            </a:endParaRPr>
           </a:p>
         </p:txBody>
       </p:sp>
@@ -5926,7 +5811,7 @@
         <p:spPr>
           <a:xfrm>
             <a:off x="544440" y="3421531"/>
-            <a:ext cx="8814470" cy="6550025"/>
+            <a:ext cx="8814470" cy="6543010"/>
           </a:xfrm>
           <a:prstGeom prst="rect">
             <a:avLst/>
@@ -5945,7 +5830,7 @@
               <a:buAutoNum type="arabicPeriod"/>
             </a:pPr>
             <a:r>
-              <a:rPr lang="en-US" sz="2499" b="1" spc="-137">
+              <a:rPr lang="en-US" sz="2499" b="1" spc="-137" dirty="0">
                 <a:solidFill>
                   <a:srgbClr val="FFFFFF"/>
                 </a:solidFill>
@@ -5966,7 +5851,7 @@
               <a:buChar char="⚬"/>
             </a:pPr>
             <a:r>
-              <a:rPr lang="en-US" sz="2499" spc="-137">
+              <a:rPr lang="en-US" sz="2499" spc="-137" dirty="0">
                 <a:solidFill>
                   <a:srgbClr val="FFFFFF"/>
                 </a:solidFill>
@@ -5986,7 +5871,7 @@
               <a:buFont typeface="Arial"/>
               <a:buChar char="•"/>
             </a:pPr>
-            <a:endParaRPr lang="en-US" sz="2499" spc="-137">
+            <a:endParaRPr lang="en-US" sz="2499" spc="-137" dirty="0">
               <a:solidFill>
                 <a:srgbClr val="FFFFFF"/>
               </a:solidFill>
@@ -5997,14 +5882,13 @@
             </a:endParaRPr>
           </a:p>
           <a:p>
-            <a:pPr marL="539749" lvl="1" indent="-269875" algn="l">
+            <a:pPr marL="269874" lvl="1" algn="l">
               <a:lnSpc>
                 <a:spcPts val="3249"/>
               </a:lnSpc>
-              <a:buAutoNum type="arabicPeriod"/>
-            </a:pPr>
-            <a:r>
-              <a:rPr lang="en-US" sz="2499" b="1" spc="-137">
+            </a:pPr>
+            <a:r>
+              <a:rPr lang="en-US" sz="2499" b="1" spc="-137" dirty="0">
                 <a:solidFill>
                   <a:srgbClr val="FFFFFF"/>
                 </a:solidFill>
@@ -6013,7 +5897,31 @@
                 <a:cs typeface="Work Sans Bold"/>
                 <a:sym typeface="Work Sans Bold"/>
               </a:rPr>
-              <a:t>UniqueID construction:  </a:t>
+              <a:t>2. </a:t>
+            </a:r>
+            <a:r>
+              <a:rPr lang="en-US" sz="2499" b="1" spc="-137" dirty="0" err="1">
+                <a:solidFill>
+                  <a:srgbClr val="FFFFFF"/>
+                </a:solidFill>
+                <a:latin typeface="Work Sans Bold"/>
+                <a:ea typeface="Work Sans Bold"/>
+                <a:cs typeface="Work Sans Bold"/>
+                <a:sym typeface="Work Sans Bold"/>
+              </a:rPr>
+              <a:t>UniqueID</a:t>
+            </a:r>
+            <a:r>
+              <a:rPr lang="en-US" sz="2499" b="1" spc="-137" dirty="0">
+                <a:solidFill>
+                  <a:srgbClr val="FFFFFF"/>
+                </a:solidFill>
+                <a:latin typeface="Work Sans Bold"/>
+                <a:ea typeface="Work Sans Bold"/>
+                <a:cs typeface="Work Sans Bold"/>
+                <a:sym typeface="Work Sans Bold"/>
+              </a:rPr>
+              <a:t> construction:  </a:t>
             </a:r>
           </a:p>
           <a:p>
@@ -6025,7 +5933,7 @@
               <a:buChar char="⚬"/>
             </a:pPr>
             <a:r>
-              <a:rPr lang="en-US" sz="2499" spc="-137">
+              <a:rPr lang="en-US" sz="2499" spc="-137" dirty="0">
                 <a:solidFill>
                   <a:srgbClr val="FFFFFF"/>
                 </a:solidFill>
@@ -6038,30 +5946,41 @@
             </a:r>
           </a:p>
           <a:p>
-            <a:pPr algn="l">
+            <a:pPr marL="269874" lvl="1" algn="l">
               <a:lnSpc>
                 <a:spcPts val="3249"/>
               </a:lnSpc>
             </a:pPr>
-            <a:endParaRPr lang="en-US" sz="2499" spc="-137">
+            <a:endParaRPr lang="en-US" sz="2499" spc="-137" dirty="0">
               <a:solidFill>
                 <a:srgbClr val="FFFFFF"/>
               </a:solidFill>
               <a:latin typeface="Work Sans"/>
-              <a:ea typeface="Work Sans"/>
-              <a:cs typeface="Work Sans"/>
+              <a:ea typeface="Work Sans Bold"/>
+              <a:cs typeface="Work Sans Bold"/>
               <a:sym typeface="Work Sans"/>
             </a:endParaRPr>
           </a:p>
           <a:p>
-            <a:pPr marL="539749" lvl="1" indent="-269875" algn="l">
+            <a:pPr marL="269874" lvl="1" algn="l">
               <a:lnSpc>
                 <a:spcPts val="3249"/>
               </a:lnSpc>
-              <a:buAutoNum type="arabicPeriod"/>
-            </a:pPr>
-            <a:r>
-              <a:rPr lang="en-US" sz="2499" b="1" spc="-137">
+            </a:pPr>
+            <a:r>
+              <a:rPr lang="en-US" sz="2499" b="1" spc="-137" dirty="0">
+                <a:solidFill>
+                  <a:srgbClr val="FFFFFF"/>
+                </a:solidFill>
+                <a:latin typeface="Work Sans"/>
+                <a:ea typeface="Work Sans Bold"/>
+                <a:cs typeface="Work Sans Bold"/>
+                <a:sym typeface="Work Sans"/>
+              </a:rPr>
+              <a:t>3. </a:t>
+            </a:r>
+            <a:r>
+              <a:rPr lang="en-US" sz="2499" b="1" spc="-137" dirty="0">
                 <a:solidFill>
                   <a:srgbClr val="FFFFFF"/>
                 </a:solidFill>
@@ -6073,7 +5992,7 @@
               <a:t>Feature Engineering </a:t>
             </a:r>
             <a:r>
-              <a:rPr lang="en-US" sz="2499" spc="-137">
+              <a:rPr lang="en-US" sz="2499" spc="-137" dirty="0">
                 <a:solidFill>
                   <a:srgbClr val="FFFFFF"/>
                 </a:solidFill>
@@ -6082,7 +6001,7 @@
                 <a:cs typeface="Work Sans"/>
                 <a:sym typeface="Work Sans"/>
               </a:rPr>
-              <a:t>(23 features) - each transaction enriched with historical data from prior transactions only → no leakage guarantee</a:t>
+              <a:t>(24 features) - each transaction enriched with historical data from prior transactions only → no leakage guarantee</a:t>
             </a:r>
           </a:p>
           <a:p>
@@ -6094,7 +6013,7 @@
               <a:buChar char="⚬"/>
             </a:pPr>
             <a:r>
-              <a:rPr lang="en-US" sz="2499" spc="-137">
+              <a:rPr lang="en-US" sz="2499" spc="-137" dirty="0">
                 <a:solidFill>
                   <a:srgbClr val="FFFFFF"/>
                 </a:solidFill>
@@ -6115,7 +6034,7 @@
               <a:buChar char="⚬"/>
             </a:pPr>
             <a:r>
-              <a:rPr lang="en-US" sz="2499" spc="-137">
+              <a:rPr lang="en-US" sz="2499" spc="-137" dirty="0">
                 <a:solidFill>
                   <a:srgbClr val="FFFFFF"/>
                 </a:solidFill>
@@ -6136,7 +6055,7 @@
               <a:buChar char="⚬"/>
             </a:pPr>
             <a:r>
-              <a:rPr lang="en-US" sz="2499" spc="-137">
+              <a:rPr lang="en-US" sz="2499" spc="-137" dirty="0">
                 <a:solidFill>
                   <a:srgbClr val="FFFFFF"/>
                 </a:solidFill>
@@ -6155,7 +6074,7 @@
               </a:lnSpc>
             </a:pPr>
             <a:r>
-              <a:rPr lang="en-US" sz="2499" spc="-137">
+              <a:rPr lang="en-US" sz="2499" spc="-137" dirty="0">
                 <a:solidFill>
                   <a:srgbClr val="FFFFFF"/>
                 </a:solidFill>
@@ -6168,14 +6087,13 @@
             </a:r>
           </a:p>
           <a:p>
-            <a:pPr marL="539749" lvl="1" indent="-269875" algn="l">
+            <a:pPr marL="269874" lvl="1">
               <a:lnSpc>
                 <a:spcPts val="3249"/>
               </a:lnSpc>
-              <a:buAutoNum type="arabicPeriod"/>
-            </a:pPr>
-            <a:r>
-              <a:rPr lang="en-US" sz="2499" b="1" spc="-137">
+            </a:pPr>
+            <a:r>
+              <a:rPr lang="en-US" sz="2499" b="1" spc="-137" dirty="0">
                 <a:solidFill>
                   <a:srgbClr val="FFFFFF"/>
                 </a:solidFill>
@@ -6184,10 +6102,10 @@
                 <a:cs typeface="Work Sans Bold"/>
                 <a:sym typeface="Work Sans Bold"/>
               </a:rPr>
-              <a:t>Time-Based Split</a:t>
-            </a:r>
-            <a:r>
-              <a:rPr lang="en-US" sz="2499" spc="-137">
+              <a:t>4. Time-Based Split</a:t>
+            </a:r>
+            <a:r>
+              <a:rPr lang="en-US" sz="2499" spc="-137" dirty="0">
                 <a:solidFill>
                   <a:srgbClr val="FFFFFF"/>
                 </a:solidFill>
@@ -6196,28 +6114,55 @@
                 <a:cs typeface="Work Sans"/>
                 <a:sym typeface="Work Sans"/>
               </a:rPr>
-              <a:t> (80% train / 20% val):</a:t>
-            </a:r>
-          </a:p>
-          <a:p>
-            <a:pPr marL="1079499" lvl="2" indent="-359833" algn="l">
-              <a:lnSpc>
-                <a:spcPts val="3249"/>
-              </a:lnSpc>
-              <a:buFont typeface="Arial"/>
-              <a:buChar char="⚬"/>
-            </a:pPr>
-            <a:r>
-              <a:rPr lang="en-US" sz="2499" spc="-137">
-                <a:solidFill>
-                  <a:srgbClr val="FFFFFF"/>
+              <a:t> </a:t>
+            </a:r>
+            <a:r>
+              <a:rPr lang="en-US" sz="2499" spc="-137" dirty="0">
+                <a:solidFill>
+                  <a:schemeClr val="bg1"/>
                 </a:solidFill>
                 <a:latin typeface="Work Sans"/>
                 <a:ea typeface="Work Sans"/>
                 <a:cs typeface="Work Sans"/>
                 <a:sym typeface="Work Sans"/>
               </a:rPr>
-              <a:t>no shuffle  </a:t>
+              <a:t>(</a:t>
+            </a:r>
+            <a:r>
+              <a:rPr lang="en-US" sz="2800" dirty="0">
+                <a:solidFill>
+                  <a:schemeClr val="bg1"/>
+                </a:solidFill>
+              </a:rPr>
+              <a:t>60% train/ 20% </a:t>
+            </a:r>
+            <a:r>
+              <a:rPr lang="en-US" sz="2800" dirty="0" err="1">
+                <a:solidFill>
+                  <a:schemeClr val="bg1"/>
+                </a:solidFill>
+              </a:rPr>
+              <a:t>val</a:t>
+            </a:r>
+            <a:r>
+              <a:rPr lang="en-US" sz="2800" dirty="0">
+                <a:solidFill>
+                  <a:schemeClr val="bg1"/>
+                </a:solidFill>
+              </a:rPr>
+              <a:t> /20% frozen test</a:t>
+            </a:r>
+            <a:r>
+              <a:rPr lang="en-US" sz="2499" spc="-137" dirty="0">
+                <a:solidFill>
+                  <a:schemeClr val="bg1"/>
+                </a:solidFill>
+                <a:latin typeface="Work Sans"/>
+                <a:ea typeface="Work Sans"/>
+                <a:cs typeface="Work Sans"/>
+                <a:sym typeface="Work Sans"/>
+              </a:rPr>
+              <a:t>):</a:t>
             </a:r>
           </a:p>
           <a:p>
@@ -6229,7 +6174,28 @@
               <a:buChar char="⚬"/>
             </a:pPr>
             <a:r>
-              <a:rPr lang="en-US" sz="2499" spc="-137">
+              <a:rPr lang="en-US" sz="2499" spc="-137" dirty="0">
+                <a:solidFill>
+                  <a:srgbClr val="FFFFFF"/>
+                </a:solidFill>
+                <a:latin typeface="Work Sans"/>
+                <a:ea typeface="Work Sans"/>
+                <a:cs typeface="Work Sans"/>
+                <a:sym typeface="Work Sans"/>
+              </a:rPr>
+              <a:t>no shuffle  </a:t>
+            </a:r>
+          </a:p>
+          <a:p>
+            <a:pPr marL="1079499" lvl="2" indent="-359833" algn="l">
+              <a:lnSpc>
+                <a:spcPts val="3249"/>
+              </a:lnSpc>
+              <a:buFont typeface="Arial"/>
+              <a:buChar char="⚬"/>
+            </a:pPr>
+            <a:r>
+              <a:rPr lang="en-US" sz="2499" spc="-137" dirty="0">
                 <a:solidFill>
                   <a:srgbClr val="FFFFFF"/>
                 </a:solidFill>
@@ -6251,27 +6217,26 @@
         </p:nvSpPr>
         <p:spPr>
           <a:xfrm>
-            <a:off x="11169031" y="5469406"/>
-            <a:ext cx="6645174" cy="4502150"/>
+            <a:off x="10515600" y="4743533"/>
+            <a:ext cx="7546550" cy="5334794"/>
           </a:xfrm>
           <a:prstGeom prst="rect">
             <a:avLst/>
           </a:prstGeom>
         </p:spPr>
         <p:txBody>
-          <a:bodyPr lIns="0" tIns="0" rIns="0" bIns="0" rtlCol="0" anchor="t">
+          <a:bodyPr wrap="square" lIns="0" tIns="0" rIns="0" bIns="0" rtlCol="0" anchor="t">
             <a:spAutoFit/>
           </a:bodyPr>
           <a:lstStyle/>
           <a:p>
-            <a:pPr marL="539749" lvl="1" indent="-269875" algn="l">
+            <a:pPr marL="269874" lvl="1" algn="l">
               <a:lnSpc>
                 <a:spcPts val="3249"/>
               </a:lnSpc>
-              <a:buAutoNum type="arabicPeriod"/>
-            </a:pPr>
-            <a:r>
-              <a:rPr lang="en-US" sz="2499" b="1" u="none" strike="noStrike" spc="-137">
+            </a:pPr>
+            <a:r>
+              <a:rPr lang="en-US" sz="2499" b="1" spc="-137" dirty="0">
                 <a:solidFill>
                   <a:srgbClr val="FFFFFF"/>
                 </a:solidFill>
@@ -6280,7 +6245,55 @@
                 <a:cs typeface="Work Sans Bold"/>
                 <a:sym typeface="Work Sans Bold"/>
               </a:rPr>
-              <a:t>Optuna Tuning </a:t>
+              <a:t>5. </a:t>
+            </a:r>
+            <a:r>
+              <a:rPr lang="en-US" sz="2499" b="1" u="none" strike="noStrike" spc="-137" dirty="0" err="1">
+                <a:solidFill>
+                  <a:srgbClr val="FFFFFF"/>
+                </a:solidFill>
+                <a:latin typeface="Work Sans Bold"/>
+                <a:ea typeface="Work Sans Bold"/>
+                <a:cs typeface="Work Sans Bold"/>
+                <a:sym typeface="Work Sans Bold"/>
+              </a:rPr>
+              <a:t>Optuna</a:t>
+            </a:r>
+            <a:r>
+              <a:rPr lang="en-US" sz="2499" b="1" u="none" strike="noStrike" spc="-137" dirty="0">
+                <a:solidFill>
+                  <a:srgbClr val="FFFFFF"/>
+                </a:solidFill>
+                <a:latin typeface="Work Sans Bold"/>
+                <a:ea typeface="Work Sans Bold"/>
+                <a:cs typeface="Work Sans Bold"/>
+                <a:sym typeface="Work Sans Bold"/>
+              </a:rPr>
+              <a:t> Tuning with early stop (by selected </a:t>
+            </a:r>
+            <a:r>
+              <a:rPr lang="en-US" sz="2499" b="1" u="none" strike="noStrike" spc="-137" dirty="0" err="1">
+                <a:solidFill>
+                  <a:srgbClr val="FFFFFF"/>
+                </a:solidFill>
+                <a:latin typeface="Work Sans Bold"/>
+                <a:ea typeface="Work Sans Bold"/>
+                <a:cs typeface="Work Sans Bold"/>
+                <a:sym typeface="Work Sans Bold"/>
+              </a:rPr>
+              <a:t>metrica</a:t>
+            </a:r>
+            <a:r>
+              <a:rPr lang="en-US" sz="2499" b="1" u="none" strike="noStrike" spc="-137" dirty="0">
+                <a:solidFill>
+                  <a:srgbClr val="FFFFFF"/>
+                </a:solidFill>
+                <a:latin typeface="Work Sans Bold"/>
+                <a:ea typeface="Work Sans Bold"/>
+                <a:cs typeface="Work Sans Bold"/>
+                <a:sym typeface="Work Sans Bold"/>
+              </a:rPr>
+              <a:t>)</a:t>
             </a:r>
           </a:p>
           <a:p>
@@ -6292,7 +6305,7 @@
               <a:buChar char="⚬"/>
             </a:pPr>
             <a:r>
-              <a:rPr lang="en-US" sz="2499" u="none" strike="noStrike" spc="-137">
+              <a:rPr lang="en-US" sz="2499" u="none" strike="noStrike" spc="-137" dirty="0">
                 <a:solidFill>
                   <a:srgbClr val="FFFFFF"/>
                 </a:solidFill>
@@ -6305,7 +6318,7 @@
             </a:r>
           </a:p>
           <a:p>
-            <a:pPr marL="1079499" lvl="2" indent="-359833" algn="l">
+            <a:pPr marL="1079499" lvl="2" indent="-359833">
               <a:lnSpc>
                 <a:spcPts val="3249"/>
               </a:lnSpc>
@@ -6313,43 +6326,69 @@
               <a:buChar char="⚬"/>
             </a:pPr>
             <a:r>
-              <a:rPr lang="en-US" sz="2499" u="none" strike="noStrike" spc="-137">
-                <a:solidFill>
-                  <a:srgbClr val="FFFFFF"/>
-                </a:solidFill>
-                <a:latin typeface="Work Sans"/>
-                <a:ea typeface="Work Sans"/>
-                <a:cs typeface="Work Sans"/>
-                <a:sym typeface="Work Sans"/>
-              </a:rPr>
-              <a:t>different data coverage % for tuning</a:t>
-            </a:r>
-          </a:p>
-          <a:p>
-            <a:pPr algn="l">
+              <a:rPr lang="en-US" sz="2499" spc="-137" dirty="0">
+                <a:solidFill>
+                  <a:srgbClr val="FFFFFF"/>
+                </a:solidFill>
+                <a:latin typeface="Work Sans"/>
+              </a:rPr>
+              <a:t>V2: ROC AUC objective </a:t>
+            </a:r>
+          </a:p>
+          <a:p>
+            <a:pPr marL="1079499" lvl="2" indent="-359833">
               <a:lnSpc>
                 <a:spcPts val="3249"/>
               </a:lnSpc>
-            </a:pPr>
-            <a:endParaRPr lang="en-US" sz="2499" u="none" strike="noStrike" spc="-137">
+              <a:buFont typeface="Arial"/>
+              <a:buChar char="⚬"/>
+            </a:pPr>
+            <a:r>
+              <a:rPr lang="en-US" sz="2499" spc="-137" dirty="0">
+                <a:solidFill>
+                  <a:srgbClr val="FFFFFF"/>
+                </a:solidFill>
+                <a:latin typeface="Work Sans"/>
+              </a:rPr>
+              <a:t>V3: PR AUC objective + instance weighting</a:t>
+            </a:r>
+          </a:p>
+          <a:p>
+            <a:pPr marL="719666" lvl="2">
+              <a:lnSpc>
+                <a:spcPts val="3249"/>
+              </a:lnSpc>
+            </a:pPr>
+            <a:endParaRPr lang="en-US" sz="2499" spc="-137" dirty="0">
               <a:solidFill>
                 <a:srgbClr val="FFFFFF"/>
               </a:solidFill>
               <a:latin typeface="Work Sans"/>
-              <a:ea typeface="Work Sans"/>
-              <a:cs typeface="Work Sans"/>
+              <a:ea typeface="Work Sans Bold"/>
+              <a:cs typeface="Work Sans Bold"/>
               <a:sym typeface="Work Sans"/>
             </a:endParaRPr>
           </a:p>
           <a:p>
-            <a:pPr marL="539749" lvl="1" indent="-269875" algn="l">
+            <a:pPr marL="269874" lvl="1" algn="l">
               <a:lnSpc>
                 <a:spcPts val="3249"/>
               </a:lnSpc>
-              <a:buAutoNum type="arabicPeriod"/>
-            </a:pPr>
-            <a:r>
-              <a:rPr lang="en-US" sz="2499" b="1" u="none" strike="noStrike" spc="-137">
+            </a:pPr>
+            <a:r>
+              <a:rPr lang="en-US" sz="2499" b="1" u="none" strike="noStrike" spc="-137" dirty="0">
+                <a:solidFill>
+                  <a:srgbClr val="FFFFFF"/>
+                </a:solidFill>
+                <a:latin typeface="Work Sans"/>
+                <a:ea typeface="Work Sans Bold"/>
+                <a:cs typeface="Work Sans Bold"/>
+                <a:sym typeface="Work Sans"/>
+              </a:rPr>
+              <a:t>6. </a:t>
+            </a:r>
+            <a:r>
+              <a:rPr lang="en-US" sz="2499" b="1" u="none" strike="noStrike" spc="-137" dirty="0">
                 <a:solidFill>
                   <a:srgbClr val="FFFFFF"/>
                 </a:solidFill>
@@ -6362,7 +6401,7 @@
             </a:r>
           </a:p>
           <a:p>
-            <a:pPr marL="1079499" lvl="2" indent="-359833" algn="l">
+            <a:pPr marL="1079499" lvl="2" indent="-359833">
               <a:lnSpc>
                 <a:spcPts val="3249"/>
               </a:lnSpc>
@@ -6370,64 +6409,79 @@
               <a:buChar char="⚬"/>
             </a:pPr>
             <a:r>
-              <a:rPr lang="en-US" sz="2499" u="none" strike="noStrike" spc="-137">
-                <a:solidFill>
-                  <a:srgbClr val="FFFFFF"/>
-                </a:solidFill>
-                <a:latin typeface="Work Sans"/>
-                <a:ea typeface="Work Sans"/>
-                <a:cs typeface="Work Sans"/>
-                <a:sym typeface="Work Sans"/>
-              </a:rPr>
-              <a:t>LightGBM + XGBoost </a:t>
-            </a:r>
-          </a:p>
-          <a:p>
-            <a:pPr marL="1079499" lvl="2" indent="-359833" algn="l">
+              <a:rPr lang="en-US" sz="2800" dirty="0">
+                <a:solidFill>
+                  <a:schemeClr val="bg1"/>
+                </a:solidFill>
+              </a:rPr>
+              <a:t>Average between V2 </a:t>
+            </a:r>
+            <a:r>
+              <a:rPr lang="en-US" sz="2800" dirty="0" err="1">
+                <a:solidFill>
+                  <a:schemeClr val="bg1"/>
+                </a:solidFill>
+              </a:rPr>
+              <a:t>LightGBM</a:t>
+            </a:r>
+            <a:r>
+              <a:rPr lang="en-US" sz="2800" dirty="0">
+                <a:solidFill>
+                  <a:schemeClr val="bg1"/>
+                </a:solidFill>
+              </a:rPr>
+              <a:t> &amp;V3 </a:t>
+            </a:r>
+            <a:r>
+              <a:rPr lang="en-US" sz="2800" dirty="0" err="1">
+                <a:solidFill>
+                  <a:schemeClr val="bg1"/>
+                </a:solidFill>
+              </a:rPr>
+              <a:t>LightGBM</a:t>
+            </a:r>
+            <a:endParaRPr lang="en-US" sz="2800" dirty="0">
+              <a:solidFill>
+                <a:schemeClr val="bg1"/>
+              </a:solidFill>
+            </a:endParaRPr>
+          </a:p>
+          <a:p>
+            <a:pPr marL="719666" lvl="2">
               <a:lnSpc>
                 <a:spcPts val="3249"/>
               </a:lnSpc>
-              <a:buFont typeface="Arial"/>
-              <a:buChar char="⚬"/>
-            </a:pPr>
-            <a:r>
-              <a:rPr lang="en-US" sz="2499" u="none" strike="noStrike" spc="-137">
-                <a:solidFill>
-                  <a:srgbClr val="FFFFFF"/>
-                </a:solidFill>
-                <a:latin typeface="Work Sans"/>
-                <a:ea typeface="Work Sans"/>
-                <a:cs typeface="Work Sans"/>
-                <a:sym typeface="Work Sans"/>
-              </a:rPr>
-              <a:t>weighted average</a:t>
-            </a:r>
-          </a:p>
-          <a:p>
-            <a:pPr algn="l">
-              <a:lnSpc>
-                <a:spcPts val="3249"/>
-              </a:lnSpc>
-            </a:pPr>
-            <a:endParaRPr lang="en-US" sz="2499" u="none" strike="noStrike" spc="-137">
+            </a:pPr>
+            <a:endParaRPr lang="en-US" sz="2499" b="1" u="none" strike="noStrike" spc="-137" dirty="0">
               <a:solidFill>
-                <a:srgbClr val="FFFFFF"/>
+                <a:schemeClr val="bg1"/>
               </a:solidFill>
               <a:latin typeface="Work Sans"/>
-              <a:ea typeface="Work Sans"/>
-              <a:cs typeface="Work Sans"/>
+              <a:ea typeface="Work Sans Bold"/>
+              <a:cs typeface="Work Sans Bold"/>
               <a:sym typeface="Work Sans"/>
             </a:endParaRPr>
           </a:p>
           <a:p>
-            <a:pPr marL="539749" lvl="1" indent="-269875" algn="l">
+            <a:pPr marL="269874" lvl="1">
               <a:lnSpc>
                 <a:spcPts val="3249"/>
               </a:lnSpc>
-              <a:buAutoNum type="arabicPeriod"/>
-            </a:pPr>
-            <a:r>
-              <a:rPr lang="en-US" sz="2499" b="1" u="none" strike="noStrike" spc="-137">
+            </a:pPr>
+            <a:r>
+              <a:rPr lang="en-US" sz="2499" b="1" spc="-137" dirty="0">
+                <a:solidFill>
+                  <a:srgbClr val="FFFFFF"/>
+                </a:solidFill>
+                <a:latin typeface="Work Sans"/>
+                <a:ea typeface="Work Sans Bold"/>
+                <a:cs typeface="Work Sans Bold"/>
+                <a:sym typeface="Work Sans"/>
+              </a:rPr>
+              <a:t>7. </a:t>
+            </a:r>
+            <a:r>
+              <a:rPr lang="en-US" sz="2499" b="1" u="none" strike="noStrike" spc="-137" dirty="0">
                 <a:solidFill>
                   <a:srgbClr val="FFFFFF"/>
                 </a:solidFill>
@@ -6436,11 +6490,27 @@
                 <a:cs typeface="Work Sans Bold"/>
                 <a:sym typeface="Work Sans Bold"/>
               </a:rPr>
-              <a:t>Final selection: LightGBM:</a:t>
-            </a:r>
-          </a:p>
-          <a:p>
-            <a:pPr marL="1079499" lvl="2" indent="-359833" algn="l">
+              <a:t>Final selection - </a:t>
+            </a:r>
+            <a:r>
+              <a:rPr lang="en-US" sz="2499" b="1" spc="-137" dirty="0">
+                <a:solidFill>
+                  <a:srgbClr val="FFFFFF"/>
+                </a:solidFill>
+                <a:latin typeface="Work Sans Bold"/>
+              </a:rPr>
+              <a:t>Ensemble V2+V3</a:t>
+            </a:r>
+            <a:endParaRPr lang="en-US" sz="2499" b="1" spc="-137" dirty="0">
+              <a:solidFill>
+                <a:srgbClr val="FFFFFF"/>
+              </a:solidFill>
+              <a:latin typeface="Work Sans Bold"/>
+              <a:sym typeface="Work Sans Bold"/>
+            </a:endParaRPr>
+          </a:p>
+          <a:p>
+            <a:pPr marL="1079499" lvl="2" indent="-359833">
               <a:lnSpc>
                 <a:spcPts val="3249"/>
               </a:lnSpc>
@@ -6448,20 +6518,16 @@
               <a:buChar char="⚬"/>
             </a:pPr>
             <a:r>
-              <a:rPr lang="en-US" sz="2499" b="1" u="none" strike="noStrike" spc="-137">
-                <a:solidFill>
-                  <a:srgbClr val="FFFFFF"/>
-                </a:solidFill>
-                <a:latin typeface="Work Sans Bold"/>
-                <a:ea typeface="Work Sans Bold"/>
-                <a:cs typeface="Work Sans Bold"/>
-                <a:sym typeface="Work Sans Bold"/>
-              </a:rPr>
-              <a:t>ROC AUC = 0.9272 </a:t>
-            </a:r>
-          </a:p>
-          <a:p>
-            <a:pPr marL="1079499" lvl="2" indent="-359833" algn="l">
+              <a:rPr lang="en-US" sz="2800" dirty="0">
+                <a:solidFill>
+                  <a:schemeClr val="bg1"/>
+                </a:solidFill>
+              </a:rPr>
+              <a:t>Test ROC = 0.8990 </a:t>
+            </a:r>
+          </a:p>
+          <a:p>
+            <a:pPr marL="1079499" lvl="2" indent="-359833">
               <a:lnSpc>
                 <a:spcPts val="3249"/>
               </a:lnSpc>
@@ -6469,16 +6535,12 @@
               <a:buChar char="⚬"/>
             </a:pPr>
             <a:r>
-              <a:rPr lang="en-US" sz="2499" b="1" u="none" strike="noStrike" spc="-137">
-                <a:solidFill>
-                  <a:srgbClr val="FFFFFF"/>
-                </a:solidFill>
-                <a:latin typeface="Work Sans Bold"/>
-                <a:ea typeface="Work Sans Bold"/>
-                <a:cs typeface="Work Sans Bold"/>
-                <a:sym typeface="Work Sans Bold"/>
-              </a:rPr>
-              <a:t>PR AUC = 0.6039</a:t>
+              <a:rPr lang="en-US" sz="2800" dirty="0">
+                <a:solidFill>
+                  <a:schemeClr val="bg1"/>
+                </a:solidFill>
+              </a:rPr>
+              <a:t>Test PR = 0.5178</a:t>
             </a:r>
           </a:p>
         </p:txBody>
@@ -6516,596 +6578,6 @@
           <a:chExt cx="0" cy="0"/>
         </a:xfrm>
       </p:grpSpPr>
-      <p:graphicFrame>
-        <p:nvGraphicFramePr>
-          <p:cNvPr id="2" name="Table 2"/>
-          <p:cNvGraphicFramePr>
-            <a:graphicFrameLocks noGrp="1"/>
-          </p:cNvGraphicFramePr>
-          <p:nvPr/>
-        </p:nvGraphicFramePr>
-        <p:xfrm>
-          <a:off x="580786" y="3629648"/>
-          <a:ext cx="7315200" cy="3641997"/>
-        </p:xfrm>
-        <a:graphic>
-          <a:graphicData uri="http://schemas.openxmlformats.org/drawingml/2006/table">
-            <a:tbl>
-              <a:tblPr/>
-              <a:tblGrid>
-                <a:gridCol w="3657600">
-                  <a:extLst>
-                    <a:ext uri="{9D8B030D-6E8A-4147-A177-3AD203B41FA5}">
-                      <a16:colId xmlns:a16="http://schemas.microsoft.com/office/drawing/2014/main" val="20000"/>
-                    </a:ext>
-                  </a:extLst>
-                </a:gridCol>
-                <a:gridCol w="3657600">
-                  <a:extLst>
-                    <a:ext uri="{9D8B030D-6E8A-4147-A177-3AD203B41FA5}">
-                      <a16:colId xmlns:a16="http://schemas.microsoft.com/office/drawing/2014/main" val="20001"/>
-                    </a:ext>
-                  </a:extLst>
-                </a:gridCol>
-              </a:tblGrid>
-              <a:tr h="827246">
-                <a:tc>
-                  <a:txBody>
-                    <a:bodyPr/>
-                    <a:lstStyle/>
-                    <a:p>
-                      <a:pPr algn="ctr">
-                        <a:lnSpc>
-                          <a:spcPts val="2520"/>
-                        </a:lnSpc>
-                        <a:defRPr/>
-                      </a:pPr>
-                      <a:r>
-                        <a:rPr lang="en-US" sz="1800" b="1">
-                          <a:solidFill>
-                            <a:srgbClr val="000000"/>
-                          </a:solidFill>
-                          <a:latin typeface="Work Sans Bold"/>
-                          <a:ea typeface="Work Sans Bold"/>
-                          <a:cs typeface="Work Sans Bold"/>
-                          <a:sym typeface="Work Sans Bold"/>
-                        </a:rPr>
-                        <a:t>Tier</a:t>
-                      </a:r>
-                      <a:endParaRPr lang="en-US" sz="1100"/>
-                    </a:p>
-                  </a:txBody>
-                  <a:tcPr marL="190500" marR="190500" marT="190500" marB="190500" anchor="ctr">
-                    <a:lnL w="38100" cap="flat" cmpd="sng" algn="ctr">
-                      <a:solidFill>
-                        <a:srgbClr val="FFFFFF"/>
-                      </a:solidFill>
-                      <a:prstDash val="solid"/>
-                      <a:round/>
-                      <a:headEnd type="none" w="med" len="med"/>
-                      <a:tailEnd type="none" w="med" len="med"/>
-                    </a:lnL>
-                    <a:lnR w="38100" cap="flat" cmpd="sng" algn="ctr">
-                      <a:solidFill>
-                        <a:srgbClr val="FFFFFF"/>
-                      </a:solidFill>
-                      <a:prstDash val="solid"/>
-                      <a:round/>
-                      <a:headEnd type="none" w="med" len="med"/>
-                      <a:tailEnd type="none" w="med" len="med"/>
-                    </a:lnR>
-                    <a:lnT w="38100" cap="flat" cmpd="sng" algn="ctr">
-                      <a:solidFill>
-                        <a:srgbClr val="FFFFFF"/>
-                      </a:solidFill>
-                      <a:prstDash val="solid"/>
-                      <a:round/>
-                      <a:headEnd type="none" w="med" len="med"/>
-                      <a:tailEnd type="none" w="med" len="med"/>
-                    </a:lnT>
-                    <a:lnB w="38100" cap="flat" cmpd="sng" algn="ctr">
-                      <a:solidFill>
-                        <a:srgbClr val="FFFFFF"/>
-                      </a:solidFill>
-                      <a:prstDash val="solid"/>
-                      <a:round/>
-                      <a:headEnd type="none" w="med" len="med"/>
-                      <a:tailEnd type="none" w="med" len="med"/>
-                    </a:lnB>
-                    <a:solidFill>
-                      <a:srgbClr val="99DAFF"/>
-                    </a:solidFill>
-                  </a:tcPr>
-                </a:tc>
-                <a:tc>
-                  <a:txBody>
-                    <a:bodyPr/>
-                    <a:lstStyle/>
-                    <a:p>
-                      <a:pPr algn="ctr">
-                        <a:lnSpc>
-                          <a:spcPts val="2520"/>
-                        </a:lnSpc>
-                        <a:defRPr/>
-                      </a:pPr>
-                      <a:r>
-                        <a:rPr lang="en-US" sz="1800" b="1">
-                          <a:solidFill>
-                            <a:srgbClr val="000000"/>
-                          </a:solidFill>
-                          <a:latin typeface="Work Sans Bold"/>
-                          <a:ea typeface="Work Sans Bold"/>
-                          <a:cs typeface="Work Sans Bold"/>
-                          <a:sym typeface="Work Sans Bold"/>
-                        </a:rPr>
-                        <a:t>ROC AUC</a:t>
-                      </a:r>
-                      <a:endParaRPr lang="en-US" sz="1100"/>
-                    </a:p>
-                  </a:txBody>
-                  <a:tcPr marL="190500" marR="190500" marT="190500" marB="190500" anchor="ctr">
-                    <a:lnL w="38100" cap="flat" cmpd="sng" algn="ctr">
-                      <a:solidFill>
-                        <a:srgbClr val="FFFFFF"/>
-                      </a:solidFill>
-                      <a:prstDash val="solid"/>
-                      <a:round/>
-                      <a:headEnd type="none" w="med" len="med"/>
-                      <a:tailEnd type="none" w="med" len="med"/>
-                    </a:lnL>
-                    <a:lnR w="38100" cap="flat" cmpd="sng" algn="ctr">
-                      <a:solidFill>
-                        <a:srgbClr val="FFFFFF"/>
-                      </a:solidFill>
-                      <a:prstDash val="solid"/>
-                      <a:round/>
-                      <a:headEnd type="none" w="med" len="med"/>
-                      <a:tailEnd type="none" w="med" len="med"/>
-                    </a:lnR>
-                    <a:lnT w="38100" cap="flat" cmpd="sng" algn="ctr">
-                      <a:solidFill>
-                        <a:srgbClr val="FFFFFF"/>
-                      </a:solidFill>
-                      <a:prstDash val="solid"/>
-                      <a:round/>
-                      <a:headEnd type="none" w="med" len="med"/>
-                      <a:tailEnd type="none" w="med" len="med"/>
-                    </a:lnT>
-                    <a:lnB w="38100" cap="flat" cmpd="sng" algn="ctr">
-                      <a:solidFill>
-                        <a:srgbClr val="FFFFFF"/>
-                      </a:solidFill>
-                      <a:prstDash val="solid"/>
-                      <a:round/>
-                      <a:headEnd type="none" w="med" len="med"/>
-                      <a:tailEnd type="none" w="med" len="med"/>
-                    </a:lnB>
-                    <a:solidFill>
-                      <a:srgbClr val="99DAFF"/>
-                    </a:solidFill>
-                  </a:tcPr>
-                </a:tc>
-                <a:extLst>
-                  <a:ext uri="{0D108BD9-81ED-4DB2-BD59-A6C34878D82A}">
-                    <a16:rowId xmlns:a16="http://schemas.microsoft.com/office/drawing/2014/main" val="10000"/>
-                  </a:ext>
-                </a:extLst>
-              </a:tr>
-              <a:tr h="899640">
-                <a:tc>
-                  <a:txBody>
-                    <a:bodyPr/>
-                    <a:lstStyle/>
-                    <a:p>
-                      <a:pPr algn="ctr">
-                        <a:lnSpc>
-                          <a:spcPts val="2520"/>
-                        </a:lnSpc>
-                        <a:defRPr/>
-                      </a:pPr>
-                      <a:r>
-                        <a:rPr lang="en-US" sz="1800">
-                          <a:solidFill>
-                            <a:srgbClr val="FFFFFF"/>
-                          </a:solidFill>
-                          <a:latin typeface="Work Sans"/>
-                          <a:ea typeface="Work Sans"/>
-                          <a:cs typeface="Work Sans"/>
-                          <a:sym typeface="Work Sans"/>
-                        </a:rPr>
-                        <a:t>1st place</a:t>
-                      </a:r>
-                      <a:endParaRPr lang="en-US" sz="1100"/>
-                    </a:p>
-                  </a:txBody>
-                  <a:tcPr marL="190500" marR="190500" marT="190500" marB="190500" anchor="ctr">
-                    <a:lnL w="38100" cap="flat" cmpd="sng" algn="ctr">
-                      <a:solidFill>
-                        <a:srgbClr val="FFFFFF"/>
-                      </a:solidFill>
-                      <a:prstDash val="solid"/>
-                      <a:round/>
-                      <a:headEnd type="none" w="med" len="med"/>
-                      <a:tailEnd type="none" w="med" len="med"/>
-                    </a:lnL>
-                    <a:lnR w="38100" cap="flat" cmpd="sng" algn="ctr">
-                      <a:solidFill>
-                        <a:srgbClr val="FFFFFF"/>
-                      </a:solidFill>
-                      <a:prstDash val="solid"/>
-                      <a:round/>
-                      <a:headEnd type="none" w="med" len="med"/>
-                      <a:tailEnd type="none" w="med" len="med"/>
-                    </a:lnR>
-                    <a:lnT w="38100" cap="flat" cmpd="sng" algn="ctr">
-                      <a:solidFill>
-                        <a:srgbClr val="FFFFFF"/>
-                      </a:solidFill>
-                      <a:prstDash val="solid"/>
-                      <a:round/>
-                      <a:headEnd type="none" w="med" len="med"/>
-                      <a:tailEnd type="none" w="med" len="med"/>
-                    </a:lnT>
-                    <a:lnB w="38100" cap="flat" cmpd="sng" algn="ctr">
-                      <a:solidFill>
-                        <a:srgbClr val="FFFFFF"/>
-                      </a:solidFill>
-                      <a:prstDash val="solid"/>
-                      <a:round/>
-                      <a:headEnd type="none" w="med" len="med"/>
-                      <a:tailEnd type="none" w="med" len="med"/>
-                    </a:lnB>
-                  </a:tcPr>
-                </a:tc>
-                <a:tc>
-                  <a:txBody>
-                    <a:bodyPr/>
-                    <a:lstStyle/>
-                    <a:p>
-                      <a:pPr algn="ctr">
-                        <a:lnSpc>
-                          <a:spcPts val="2520"/>
-                        </a:lnSpc>
-                        <a:defRPr/>
-                      </a:pPr>
-                      <a:r>
-                        <a:rPr lang="en-US" sz="1800">
-                          <a:solidFill>
-                            <a:srgbClr val="FFFFFF"/>
-                          </a:solidFill>
-                          <a:latin typeface="Work Sans"/>
-                          <a:ea typeface="Work Sans"/>
-                          <a:cs typeface="Work Sans"/>
-                          <a:sym typeface="Work Sans"/>
-                        </a:rPr>
-                        <a:t>0.9459</a:t>
-                      </a:r>
-                      <a:endParaRPr lang="en-US" sz="1100"/>
-                    </a:p>
-                  </a:txBody>
-                  <a:tcPr marL="190500" marR="190500" marT="190500" marB="190500" anchor="ctr">
-                    <a:lnL w="38100" cap="flat" cmpd="sng" algn="ctr">
-                      <a:solidFill>
-                        <a:srgbClr val="FFFFFF"/>
-                      </a:solidFill>
-                      <a:prstDash val="solid"/>
-                      <a:round/>
-                      <a:headEnd type="none" w="med" len="med"/>
-                      <a:tailEnd type="none" w="med" len="med"/>
-                    </a:lnL>
-                    <a:lnR w="38100" cap="flat" cmpd="sng" algn="ctr">
-                      <a:solidFill>
-                        <a:srgbClr val="FFFFFF"/>
-                      </a:solidFill>
-                      <a:prstDash val="solid"/>
-                      <a:round/>
-                      <a:headEnd type="none" w="med" len="med"/>
-                      <a:tailEnd type="none" w="med" len="med"/>
-                    </a:lnR>
-                    <a:lnT w="38100" cap="flat" cmpd="sng" algn="ctr">
-                      <a:solidFill>
-                        <a:srgbClr val="FFFFFF"/>
-                      </a:solidFill>
-                      <a:prstDash val="solid"/>
-                      <a:round/>
-                      <a:headEnd type="none" w="med" len="med"/>
-                      <a:tailEnd type="none" w="med" len="med"/>
-                    </a:lnT>
-                    <a:lnB w="38100" cap="flat" cmpd="sng" algn="ctr">
-                      <a:solidFill>
-                        <a:srgbClr val="FFFFFF"/>
-                      </a:solidFill>
-                      <a:prstDash val="solid"/>
-                      <a:round/>
-                      <a:headEnd type="none" w="med" len="med"/>
-                      <a:tailEnd type="none" w="med" len="med"/>
-                    </a:lnB>
-                  </a:tcPr>
-                </a:tc>
-                <a:extLst>
-                  <a:ext uri="{0D108BD9-81ED-4DB2-BD59-A6C34878D82A}">
-                    <a16:rowId xmlns:a16="http://schemas.microsoft.com/office/drawing/2014/main" val="10001"/>
-                  </a:ext>
-                </a:extLst>
-              </a:tr>
-              <a:tr h="943077">
-                <a:tc>
-                  <a:txBody>
-                    <a:bodyPr/>
-                    <a:lstStyle/>
-                    <a:p>
-                      <a:pPr algn="ctr">
-                        <a:lnSpc>
-                          <a:spcPts val="2520"/>
-                        </a:lnSpc>
-                        <a:defRPr/>
-                      </a:pPr>
-                      <a:r>
-                        <a:rPr lang="en-US" sz="1800">
-                          <a:solidFill>
-                            <a:srgbClr val="FFFFFF"/>
-                          </a:solidFill>
-                          <a:latin typeface="Work Sans"/>
-                          <a:ea typeface="Work Sans"/>
-                          <a:cs typeface="Work Sans"/>
-                          <a:sym typeface="Work Sans"/>
-                        </a:rPr>
-                        <a:t>Top 5% (~319 teams)</a:t>
-                      </a:r>
-                      <a:endParaRPr lang="en-US" sz="1100"/>
-                    </a:p>
-                  </a:txBody>
-                  <a:tcPr marL="190500" marR="190500" marT="190500" marB="190500" anchor="ctr">
-                    <a:lnL w="38100" cap="flat" cmpd="sng" algn="ctr">
-                      <a:solidFill>
-                        <a:srgbClr val="FFFFFF"/>
-                      </a:solidFill>
-                      <a:prstDash val="solid"/>
-                      <a:round/>
-                      <a:headEnd type="none" w="med" len="med"/>
-                      <a:tailEnd type="none" w="med" len="med"/>
-                    </a:lnL>
-                    <a:lnR w="38100" cap="flat" cmpd="sng" algn="ctr">
-                      <a:solidFill>
-                        <a:srgbClr val="FFFFFF"/>
-                      </a:solidFill>
-                      <a:prstDash val="solid"/>
-                      <a:round/>
-                      <a:headEnd type="none" w="med" len="med"/>
-                      <a:tailEnd type="none" w="med" len="med"/>
-                    </a:lnR>
-                    <a:lnT w="38100" cap="flat" cmpd="sng" algn="ctr">
-                      <a:solidFill>
-                        <a:srgbClr val="FFFFFF"/>
-                      </a:solidFill>
-                      <a:prstDash val="solid"/>
-                      <a:round/>
-                      <a:headEnd type="none" w="med" len="med"/>
-                      <a:tailEnd type="none" w="med" len="med"/>
-                    </a:lnT>
-                    <a:lnB w="38100" cap="flat" cmpd="sng" algn="ctr">
-                      <a:solidFill>
-                        <a:srgbClr val="FFFFFF"/>
-                      </a:solidFill>
-                      <a:prstDash val="solid"/>
-                      <a:round/>
-                      <a:headEnd type="none" w="med" len="med"/>
-                      <a:tailEnd type="none" w="med" len="med"/>
-                    </a:lnB>
-                  </a:tcPr>
-                </a:tc>
-                <a:tc>
-                  <a:txBody>
-                    <a:bodyPr/>
-                    <a:lstStyle/>
-                    <a:p>
-                      <a:pPr algn="ctr">
-                        <a:lnSpc>
-                          <a:spcPts val="2520"/>
-                        </a:lnSpc>
-                        <a:defRPr/>
-                      </a:pPr>
-                      <a:r>
-                        <a:rPr lang="en-US" sz="1800">
-                          <a:solidFill>
-                            <a:srgbClr val="FFFFFF"/>
-                          </a:solidFill>
-                          <a:latin typeface="Work Sans"/>
-                          <a:ea typeface="Work Sans"/>
-                          <a:cs typeface="Work Sans"/>
-                          <a:sym typeface="Work Sans"/>
-                        </a:rPr>
-                        <a:t>≥ 0.9230</a:t>
-                      </a:r>
-                      <a:endParaRPr lang="en-US" sz="1100"/>
-                    </a:p>
-                  </a:txBody>
-                  <a:tcPr marL="190500" marR="190500" marT="190500" marB="190500" anchor="ctr">
-                    <a:lnL w="38100" cap="flat" cmpd="sng" algn="ctr">
-                      <a:solidFill>
-                        <a:srgbClr val="FFFFFF"/>
-                      </a:solidFill>
-                      <a:prstDash val="solid"/>
-                      <a:round/>
-                      <a:headEnd type="none" w="med" len="med"/>
-                      <a:tailEnd type="none" w="med" len="med"/>
-                    </a:lnL>
-                    <a:lnR w="38100" cap="flat" cmpd="sng" algn="ctr">
-                      <a:solidFill>
-                        <a:srgbClr val="FFFFFF"/>
-                      </a:solidFill>
-                      <a:prstDash val="solid"/>
-                      <a:round/>
-                      <a:headEnd type="none" w="med" len="med"/>
-                      <a:tailEnd type="none" w="med" len="med"/>
-                    </a:lnR>
-                    <a:lnT w="38100" cap="flat" cmpd="sng" algn="ctr">
-                      <a:solidFill>
-                        <a:srgbClr val="FFFFFF"/>
-                      </a:solidFill>
-                      <a:prstDash val="solid"/>
-                      <a:round/>
-                      <a:headEnd type="none" w="med" len="med"/>
-                      <a:tailEnd type="none" w="med" len="med"/>
-                    </a:lnT>
-                    <a:lnB w="38100" cap="flat" cmpd="sng" algn="ctr">
-                      <a:solidFill>
-                        <a:srgbClr val="FFFFFF"/>
-                      </a:solidFill>
-                      <a:prstDash val="solid"/>
-                      <a:round/>
-                      <a:headEnd type="none" w="med" len="med"/>
-                      <a:tailEnd type="none" w="med" len="med"/>
-                    </a:lnB>
-                  </a:tcPr>
-                </a:tc>
-                <a:extLst>
-                  <a:ext uri="{0D108BD9-81ED-4DB2-BD59-A6C34878D82A}">
-                    <a16:rowId xmlns:a16="http://schemas.microsoft.com/office/drawing/2014/main" val="10002"/>
-                  </a:ext>
-                </a:extLst>
-              </a:tr>
-              <a:tr h="972034">
-                <a:tc>
-                  <a:txBody>
-                    <a:bodyPr/>
-                    <a:lstStyle/>
-                    <a:p>
-                      <a:pPr algn="ctr">
-                        <a:lnSpc>
-                          <a:spcPts val="2520"/>
-                        </a:lnSpc>
-                        <a:defRPr/>
-                      </a:pPr>
-                      <a:r>
-                        <a:rPr lang="en-US" sz="1800">
-                          <a:solidFill>
-                            <a:srgbClr val="FFFFFF"/>
-                          </a:solidFill>
-                          <a:latin typeface="Work Sans"/>
-                          <a:ea typeface="Work Sans"/>
-                          <a:cs typeface="Work Sans"/>
-                          <a:sym typeface="Work Sans"/>
-                        </a:rPr>
-                        <a:t>Top 10% (~638 teams)</a:t>
-                      </a:r>
-                      <a:endParaRPr lang="en-US" sz="1100"/>
-                    </a:p>
-                  </a:txBody>
-                  <a:tcPr marL="190500" marR="190500" marT="190500" marB="190500" anchor="ctr">
-                    <a:lnL w="38100" cap="flat" cmpd="sng" algn="ctr">
-                      <a:solidFill>
-                        <a:srgbClr val="FFFFFF"/>
-                      </a:solidFill>
-                      <a:prstDash val="solid"/>
-                      <a:round/>
-                      <a:headEnd type="none" w="med" len="med"/>
-                      <a:tailEnd type="none" w="med" len="med"/>
-                    </a:lnL>
-                    <a:lnR w="38100" cap="flat" cmpd="sng" algn="ctr">
-                      <a:solidFill>
-                        <a:srgbClr val="FFFFFF"/>
-                      </a:solidFill>
-                      <a:prstDash val="solid"/>
-                      <a:round/>
-                      <a:headEnd type="none" w="med" len="med"/>
-                      <a:tailEnd type="none" w="med" len="med"/>
-                    </a:lnR>
-                    <a:lnT w="38100" cap="flat" cmpd="sng" algn="ctr">
-                      <a:solidFill>
-                        <a:srgbClr val="FFFFFF"/>
-                      </a:solidFill>
-                      <a:prstDash val="solid"/>
-                      <a:round/>
-                      <a:headEnd type="none" w="med" len="med"/>
-                      <a:tailEnd type="none" w="med" len="med"/>
-                    </a:lnT>
-                    <a:lnB w="38100" cap="flat" cmpd="sng" algn="ctr">
-                      <a:solidFill>
-                        <a:srgbClr val="FFFFFF"/>
-                      </a:solidFill>
-                      <a:prstDash val="solid"/>
-                      <a:round/>
-                      <a:headEnd type="none" w="med" len="med"/>
-                      <a:tailEnd type="none" w="med" len="med"/>
-                    </a:lnB>
-                  </a:tcPr>
-                </a:tc>
-                <a:tc>
-                  <a:txBody>
-                    <a:bodyPr/>
-                    <a:lstStyle/>
-                    <a:p>
-                      <a:pPr algn="ctr">
-                        <a:lnSpc>
-                          <a:spcPts val="2520"/>
-                        </a:lnSpc>
-                        <a:defRPr/>
-                      </a:pPr>
-                      <a:r>
-                        <a:rPr lang="en-US" sz="1800">
-                          <a:solidFill>
-                            <a:srgbClr val="FFFFFF"/>
-                          </a:solidFill>
-                          <a:latin typeface="Work Sans"/>
-                          <a:ea typeface="Work Sans"/>
-                          <a:cs typeface="Work Sans"/>
-                          <a:sym typeface="Work Sans"/>
-                        </a:rPr>
-                        <a:t>≥ 0.9150</a:t>
-                      </a:r>
-                      <a:endParaRPr lang="en-US" sz="1100"/>
-                    </a:p>
-                  </a:txBody>
-                  <a:tcPr marL="190500" marR="190500" marT="190500" marB="190500" anchor="ctr">
-                    <a:lnL w="38100" cap="flat" cmpd="sng" algn="ctr">
-                      <a:solidFill>
-                        <a:srgbClr val="FFFFFF"/>
-                      </a:solidFill>
-                      <a:prstDash val="solid"/>
-                      <a:round/>
-                      <a:headEnd type="none" w="med" len="med"/>
-                      <a:tailEnd type="none" w="med" len="med"/>
-                    </a:lnL>
-                    <a:lnR w="38100" cap="flat" cmpd="sng" algn="ctr">
-                      <a:solidFill>
-                        <a:srgbClr val="FFFFFF"/>
-                      </a:solidFill>
-                      <a:prstDash val="solid"/>
-                      <a:round/>
-                      <a:headEnd type="none" w="med" len="med"/>
-                      <a:tailEnd type="none" w="med" len="med"/>
-                    </a:lnR>
-                    <a:lnT w="38100" cap="flat" cmpd="sng" algn="ctr">
-                      <a:solidFill>
-                        <a:srgbClr val="FFFFFF"/>
-                      </a:solidFill>
-                      <a:prstDash val="solid"/>
-                      <a:round/>
-                      <a:headEnd type="none" w="med" len="med"/>
-                      <a:tailEnd type="none" w="med" len="med"/>
-                    </a:lnT>
-                    <a:lnB w="38100" cap="flat" cmpd="sng" algn="ctr">
-                      <a:solidFill>
-                        <a:srgbClr val="FFFFFF"/>
-                      </a:solidFill>
-                      <a:prstDash val="solid"/>
-                      <a:round/>
-                      <a:headEnd type="none" w="med" len="med"/>
-                      <a:tailEnd type="none" w="med" len="med"/>
-                    </a:lnB>
-                  </a:tcPr>
-                </a:tc>
-                <a:extLst>
-                  <a:ext uri="{0D108BD9-81ED-4DB2-BD59-A6C34878D82A}">
-                    <a16:rowId xmlns:a16="http://schemas.microsoft.com/office/drawing/2014/main" val="10003"/>
-                  </a:ext>
-                </a:extLst>
-              </a:tr>
-            </a:tbl>
-          </a:graphicData>
-        </a:graphic>
-      </p:graphicFrame>
       <p:grpSp>
         <p:nvGrpSpPr>
           <p:cNvPr id="3" name="Group 3"/>
@@ -7203,6 +6675,13 @@
               <a:srgbClr val="103760"/>
             </a:solidFill>
           </p:spPr>
+          <p:txBody>
+            <a:bodyPr/>
+            <a:lstStyle/>
+            <a:p>
+              <a:endParaRPr lang="en-IL" dirty="0"/>
+            </a:p>
+          </p:txBody>
         </p:sp>
       </p:grpSp>
       <p:sp>
@@ -7213,8 +6692,8 @@
         </p:nvSpPr>
         <p:spPr>
           <a:xfrm>
-            <a:off x="10288211" y="5149863"/>
-            <a:ext cx="7748974" cy="4796014"/>
+            <a:off x="15087600" y="926325"/>
+            <a:ext cx="3009907" cy="1949746"/>
           </a:xfrm>
           <a:custGeom>
             <a:avLst/>
@@ -7250,163 +6729,11 @@
             </a:stretch>
           </a:blipFill>
         </p:spPr>
-      </p:sp>
-      <p:sp>
-        <p:nvSpPr>
-          <p:cNvPr id="6" name="TextBox 6"/>
-          <p:cNvSpPr txBox="1"/>
-          <p:nvPr/>
-        </p:nvSpPr>
-        <p:spPr>
-          <a:xfrm>
-            <a:off x="580786" y="3122956"/>
-            <a:ext cx="5957292" cy="406400"/>
-          </a:xfrm>
-          <a:prstGeom prst="rect">
-            <a:avLst/>
-          </a:prstGeom>
-        </p:spPr>
         <p:txBody>
-          <a:bodyPr lIns="0" tIns="0" rIns="0" bIns="0" rtlCol="0" anchor="t">
-            <a:spAutoFit/>
-          </a:bodyPr>
+          <a:bodyPr/>
           <a:lstStyle/>
           <a:p>
-            <a:pPr algn="l">
-              <a:lnSpc>
-                <a:spcPts val="3249"/>
-              </a:lnSpc>
-              <a:spcBef>
-                <a:spcPct val="0"/>
-              </a:spcBef>
-            </a:pPr>
-            <a:r>
-              <a:rPr lang="en-US" sz="2499" b="1" u="none" strike="noStrike" spc="-137">
-                <a:solidFill>
-                  <a:srgbClr val="38B6FF"/>
-                </a:solidFill>
-                <a:latin typeface="Work Sans Bold"/>
-                <a:ea typeface="Work Sans Bold"/>
-                <a:cs typeface="Work Sans Bold"/>
-                <a:sym typeface="Work Sans Bold"/>
-              </a:rPr>
-              <a:t>Kaggle Leaderboard Context (6,381 teams)</a:t>
-            </a:r>
-          </a:p>
-        </p:txBody>
-      </p:sp>
-      <p:sp>
-        <p:nvSpPr>
-          <p:cNvPr id="7" name="TextBox 7"/>
-          <p:cNvSpPr txBox="1"/>
-          <p:nvPr/>
-        </p:nvSpPr>
-        <p:spPr>
-          <a:xfrm>
-            <a:off x="580786" y="7595495"/>
-            <a:ext cx="8343900" cy="2530475"/>
-          </a:xfrm>
-          <a:prstGeom prst="rect">
-            <a:avLst/>
-          </a:prstGeom>
-        </p:spPr>
-        <p:txBody>
-          <a:bodyPr lIns="0" tIns="0" rIns="0" bIns="0" rtlCol="0" anchor="t">
-            <a:spAutoFit/>
-          </a:bodyPr>
-          <a:lstStyle/>
-          <a:p>
-            <a:pPr algn="l">
-              <a:lnSpc>
-                <a:spcPts val="2499"/>
-              </a:lnSpc>
-            </a:pPr>
-            <a:r>
-              <a:rPr lang="en-US" sz="2499" b="1" spc="-137">
-                <a:solidFill>
-                  <a:srgbClr val="38B6FF"/>
-                </a:solidFill>
-                <a:latin typeface="Work Sans Bold"/>
-                <a:ea typeface="Work Sans Bold"/>
-                <a:cs typeface="Work Sans Bold"/>
-                <a:sym typeface="Work Sans Bold"/>
-              </a:rPr>
-              <a:t>My results’ category:</a:t>
-            </a:r>
-          </a:p>
-          <a:p>
-            <a:pPr algn="l">
-              <a:lnSpc>
-                <a:spcPts val="2499"/>
-              </a:lnSpc>
-            </a:pPr>
-            <a:endParaRPr lang="en-US" sz="2499" b="1" spc="-137">
-              <a:solidFill>
-                <a:srgbClr val="38B6FF"/>
-              </a:solidFill>
-              <a:latin typeface="Work Sans Bold"/>
-              <a:ea typeface="Work Sans Bold"/>
-              <a:cs typeface="Work Sans Bold"/>
-              <a:sym typeface="Work Sans Bold"/>
-            </a:endParaRPr>
-          </a:p>
-          <a:p>
-            <a:pPr marL="539749" lvl="1" indent="-269875" algn="l">
-              <a:lnSpc>
-                <a:spcPts val="2499"/>
-              </a:lnSpc>
-              <a:buFont typeface="Arial"/>
-              <a:buChar char="•"/>
-            </a:pPr>
-            <a:r>
-              <a:rPr lang="en-US" sz="2499" spc="-137">
-                <a:solidFill>
-                  <a:srgbClr val="FFFFFF"/>
-                </a:solidFill>
-                <a:latin typeface="Work Sans"/>
-                <a:ea typeface="Work Sans"/>
-                <a:cs typeface="Work Sans"/>
-                <a:sym typeface="Work Sans"/>
-              </a:rPr>
-              <a:t>Result (0.9272) exceeds the community-reported Top 5% threshold (≥ 0.9230). </a:t>
-            </a:r>
-          </a:p>
-          <a:p>
-            <a:pPr algn="l">
-              <a:lnSpc>
-                <a:spcPts val="2499"/>
-              </a:lnSpc>
-            </a:pPr>
-            <a:endParaRPr lang="en-US" sz="2499" spc="-137">
-              <a:solidFill>
-                <a:srgbClr val="FFFFFF"/>
-              </a:solidFill>
-              <a:latin typeface="Work Sans"/>
-              <a:ea typeface="Work Sans"/>
-              <a:cs typeface="Work Sans"/>
-              <a:sym typeface="Work Sans"/>
-            </a:endParaRPr>
-          </a:p>
-          <a:p>
-            <a:pPr marL="539749" lvl="1" indent="-269875" algn="l">
-              <a:lnSpc>
-                <a:spcPts val="2499"/>
-              </a:lnSpc>
-              <a:buFont typeface="Arial"/>
-              <a:buChar char="•"/>
-            </a:pPr>
-            <a:r>
-              <a:rPr lang="en-US" sz="2499" spc="-137">
-                <a:solidFill>
-                  <a:srgbClr val="FFFFFF"/>
-                </a:solidFill>
-                <a:latin typeface="Work Sans"/>
-                <a:ea typeface="Work Sans"/>
-                <a:cs typeface="Work Sans"/>
-                <a:sym typeface="Work Sans"/>
-              </a:rPr>
-              <a:t>Direct comparison is approximate — different test sets — but the result is competitive with top-tier submissions.</a:t>
-            </a:r>
+            <a:endParaRPr lang="en-IL"/>
           </a:p>
         </p:txBody>
       </p:sp>
@@ -7418,15 +6745,15 @@
         </p:nvSpPr>
         <p:spPr>
           <a:xfrm>
-            <a:off x="3796382" y="1019965"/>
-            <a:ext cx="10695236" cy="930275"/>
+            <a:off x="1143000" y="647700"/>
+            <a:ext cx="14141909" cy="1795363"/>
           </a:xfrm>
           <a:prstGeom prst="rect">
             <a:avLst/>
           </a:prstGeom>
         </p:spPr>
         <p:txBody>
-          <a:bodyPr lIns="0" tIns="0" rIns="0" bIns="0" rtlCol="0" anchor="t">
+          <a:bodyPr wrap="square" lIns="0" tIns="0" rIns="0" bIns="0" rtlCol="0" anchor="t">
             <a:spAutoFit/>
           </a:bodyPr>
           <a:lstStyle/>
@@ -7440,20 +6767,821 @@
               </a:spcBef>
             </a:pPr>
             <a:r>
-              <a:rPr lang="en-US" sz="6999" b="1" spc="-384">
+              <a:rPr lang="en-US" sz="6999" b="1" spc="-384" dirty="0">
                 <a:solidFill>
                   <a:srgbClr val="FFFFFF"/>
                 </a:solidFill>
                 <a:latin typeface="Work Sans Semi-Bold"/>
-                <a:ea typeface="Work Sans Semi-Bold"/>
-                <a:cs typeface="Work Sans Semi-Bold"/>
-                <a:sym typeface="Work Sans Semi-Bold"/>
-              </a:rPr>
-              <a:t>Summary &amp; Kaggle Context</a:t>
-            </a:r>
+              </a:rPr>
+              <a:t>Kaggle Leaderboard Context &amp; </a:t>
+            </a:r>
+          </a:p>
+          <a:p>
+            <a:pPr algn="ctr">
+              <a:lnSpc>
+                <a:spcPts val="6999"/>
+              </a:lnSpc>
+              <a:spcBef>
+                <a:spcPct val="0"/>
+              </a:spcBef>
+            </a:pPr>
+            <a:r>
+              <a:rPr lang="en-US" sz="6999" b="1" spc="-384" dirty="0">
+                <a:solidFill>
+                  <a:srgbClr val="FFFFFF"/>
+                </a:solidFill>
+                <a:latin typeface="Work Sans Semi-Bold"/>
+              </a:rPr>
+              <a:t>Why Top Solutions Scored Higher</a:t>
+            </a:r>
+            <a:endParaRPr lang="en-US" sz="6999" b="1" spc="-384" dirty="0">
+              <a:solidFill>
+                <a:srgbClr val="FFFFFF"/>
+              </a:solidFill>
+              <a:latin typeface="Work Sans Semi-Bold"/>
+              <a:sym typeface="Work Sans Semi-Bold"/>
+            </a:endParaRPr>
           </a:p>
         </p:txBody>
       </p:sp>
+      <p:sp>
+        <p:nvSpPr>
+          <p:cNvPr id="11" name="TextBox 10">
+            <a:extLst>
+              <a:ext uri="{FF2B5EF4-FFF2-40B4-BE49-F238E27FC236}">
+                <a16:creationId xmlns:a16="http://schemas.microsoft.com/office/drawing/2014/main" id="{0B9E9947-0DBE-94F3-7F82-05E16BAA8D58}"/>
+              </a:ext>
+            </a:extLst>
+          </p:cNvPr>
+          <p:cNvSpPr txBox="1"/>
+          <p:nvPr/>
+        </p:nvSpPr>
+        <p:spPr>
+          <a:xfrm>
+            <a:off x="654435" y="8839350"/>
+            <a:ext cx="16046909" cy="1246110"/>
+          </a:xfrm>
+          <a:prstGeom prst="rect">
+            <a:avLst/>
+          </a:prstGeom>
+          <a:noFill/>
+        </p:spPr>
+        <p:txBody>
+          <a:bodyPr wrap="square">
+            <a:spAutoFit/>
+          </a:bodyPr>
+          <a:lstStyle/>
+          <a:p>
+            <a:r>
+              <a:rPr lang="en-US" sz="2499" spc="-137" dirty="0">
+                <a:solidFill>
+                  <a:srgbClr val="FFFFFF"/>
+                </a:solidFill>
+                <a:latin typeface="Work Sans"/>
+              </a:rPr>
+              <a:t>My Final chose: Ensemble V2+V3</a:t>
+            </a:r>
+          </a:p>
+          <a:p>
+            <a:pPr marL="342900" indent="-342900">
+              <a:buFont typeface="Arial" panose="020B0604020202020204" pitchFamily="34" charset="0"/>
+              <a:buChar char="•"/>
+            </a:pPr>
+            <a:r>
+              <a:rPr lang="en-US" sz="2499" spc="-137" dirty="0">
+                <a:solidFill>
+                  <a:srgbClr val="FFFFFF"/>
+                </a:solidFill>
+                <a:latin typeface="Work Sans"/>
+              </a:rPr>
+              <a:t>Test ROC 0.8990 → comparable to top 20% of 6,381 teams. </a:t>
+            </a:r>
+          </a:p>
+          <a:p>
+            <a:pPr marL="342900" indent="-342900">
+              <a:buFont typeface="Arial" panose="020B0604020202020204" pitchFamily="34" charset="0"/>
+              <a:buChar char="•"/>
+            </a:pPr>
+            <a:r>
+              <a:rPr lang="en-US" sz="2499" spc="-137" dirty="0">
+                <a:solidFill>
+                  <a:srgbClr val="FFFFFF"/>
+                </a:solidFill>
+                <a:latin typeface="Work Sans"/>
+              </a:rPr>
+              <a:t>Note: direct comparison is approximate — different test periods.</a:t>
+            </a:r>
+            <a:endParaRPr lang="en-IL" sz="2499" spc="-137" dirty="0">
+              <a:solidFill>
+                <a:srgbClr val="FFFFFF"/>
+              </a:solidFill>
+              <a:latin typeface="Work Sans"/>
+            </a:endParaRPr>
+          </a:p>
+        </p:txBody>
+      </p:sp>
+      <p:graphicFrame>
+        <p:nvGraphicFramePr>
+          <p:cNvPr id="12" name="Table 11">
+            <a:extLst>
+              <a:ext uri="{FF2B5EF4-FFF2-40B4-BE49-F238E27FC236}">
+                <a16:creationId xmlns:a16="http://schemas.microsoft.com/office/drawing/2014/main" id="{1376D453-B8E3-F763-25B0-442101930AE8}"/>
+              </a:ext>
+            </a:extLst>
+          </p:cNvPr>
+          <p:cNvGraphicFramePr>
+            <a:graphicFrameLocks noGrp="1"/>
+          </p:cNvGraphicFramePr>
+          <p:nvPr>
+            <p:extLst>
+              <p:ext uri="{D42A27DB-BD31-4B8C-83A1-F6EECF244321}">
+                <p14:modId xmlns:p14="http://schemas.microsoft.com/office/powerpoint/2010/main" val="1873406385"/>
+              </p:ext>
+            </p:extLst>
+          </p:nvPr>
+        </p:nvGraphicFramePr>
+        <p:xfrm>
+          <a:off x="677384" y="3456246"/>
+          <a:ext cx="17229616" cy="4937760"/>
+        </p:xfrm>
+        <a:graphic>
+          <a:graphicData uri="http://schemas.openxmlformats.org/drawingml/2006/table">
+            <a:tbl>
+              <a:tblPr firstRow="1" bandRow="1">
+                <a:tableStyleId>{5C22544A-7EE6-4342-B048-85BDC9FD1C3A}</a:tableStyleId>
+              </a:tblPr>
+              <a:tblGrid>
+                <a:gridCol w="4673617">
+                  <a:extLst>
+                    <a:ext uri="{9D8B030D-6E8A-4147-A177-3AD203B41FA5}">
+                      <a16:colId xmlns:a16="http://schemas.microsoft.com/office/drawing/2014/main" val="1645635008"/>
+                    </a:ext>
+                  </a:extLst>
+                </a:gridCol>
+                <a:gridCol w="5850399">
+                  <a:extLst>
+                    <a:ext uri="{9D8B030D-6E8A-4147-A177-3AD203B41FA5}">
+                      <a16:colId xmlns:a16="http://schemas.microsoft.com/office/drawing/2014/main" val="60289018"/>
+                    </a:ext>
+                  </a:extLst>
+                </a:gridCol>
+                <a:gridCol w="6705600">
+                  <a:extLst>
+                    <a:ext uri="{9D8B030D-6E8A-4147-A177-3AD203B41FA5}">
+                      <a16:colId xmlns:a16="http://schemas.microsoft.com/office/drawing/2014/main" val="442122394"/>
+                    </a:ext>
+                  </a:extLst>
+                </a:gridCol>
+              </a:tblGrid>
+              <a:tr h="370840">
+                <a:tc>
+                  <a:txBody>
+                    <a:bodyPr/>
+                    <a:lstStyle/>
+                    <a:p>
+                      <a:pPr>
+                        <a:buNone/>
+                      </a:pPr>
+                      <a:r>
+                        <a:rPr lang="en-US" sz="2400" dirty="0"/>
+                        <a:t>Technique</a:t>
+                      </a:r>
+                    </a:p>
+                  </a:txBody>
+                  <a:tcPr anchor="ctr"/>
+                </a:tc>
+                <a:tc>
+                  <a:txBody>
+                    <a:bodyPr/>
+                    <a:lstStyle/>
+                    <a:p>
+                      <a:pPr>
+                        <a:buNone/>
+                      </a:pPr>
+                      <a:r>
+                        <a:rPr lang="en-US" sz="2400"/>
+                        <a:t>Why top solutions used it</a:t>
+                      </a:r>
+                    </a:p>
+                  </a:txBody>
+                  <a:tcPr anchor="ctr"/>
+                </a:tc>
+                <a:tc>
+                  <a:txBody>
+                    <a:bodyPr/>
+                    <a:lstStyle/>
+                    <a:p>
+                      <a:pPr>
+                        <a:buNone/>
+                      </a:pPr>
+                      <a:r>
+                        <a:rPr lang="en-US" sz="2400"/>
+                        <a:t>Why we couldn't / didn't</a:t>
+                      </a:r>
+                    </a:p>
+                  </a:txBody>
+                  <a:tcPr anchor="ctr"/>
+                </a:tc>
+                <a:extLst>
+                  <a:ext uri="{0D108BD9-81ED-4DB2-BD59-A6C34878D82A}">
+                    <a16:rowId xmlns:a16="http://schemas.microsoft.com/office/drawing/2014/main" val="4053182141"/>
+                  </a:ext>
+                </a:extLst>
+              </a:tr>
+              <a:tr h="370840">
+                <a:tc>
+                  <a:txBody>
+                    <a:bodyPr/>
+                    <a:lstStyle/>
+                    <a:p>
+                      <a:pPr>
+                        <a:buNone/>
+                      </a:pPr>
+                      <a:r>
+                        <a:rPr lang="en-US" sz="2400" kern="1200" dirty="0">
+                          <a:solidFill>
+                            <a:schemeClr val="tx1"/>
+                          </a:solidFill>
+                          <a:latin typeface="+mn-lt"/>
+                          <a:ea typeface="+mn-ea"/>
+                          <a:cs typeface="+mn-cs"/>
+                        </a:rPr>
+                        <a:t>Full </a:t>
+                      </a:r>
+                      <a:r>
+                        <a:rPr lang="en-US" sz="2400" kern="1200" dirty="0" err="1">
+                          <a:solidFill>
+                            <a:schemeClr val="tx1"/>
+                          </a:solidFill>
+                          <a:latin typeface="+mn-lt"/>
+                          <a:ea typeface="+mn-ea"/>
+                          <a:cs typeface="+mn-cs"/>
+                        </a:rPr>
+                        <a:t>CatBoost</a:t>
+                      </a:r>
+                      <a:r>
+                        <a:rPr lang="en-US" sz="2400" kern="1200" dirty="0">
+                          <a:solidFill>
+                            <a:schemeClr val="tx1"/>
+                          </a:solidFill>
+                          <a:latin typeface="+mn-lt"/>
+                          <a:ea typeface="+mn-ea"/>
+                          <a:cs typeface="+mn-cs"/>
+                        </a:rPr>
+                        <a:t> </a:t>
+                      </a:r>
+                      <a:r>
+                        <a:rPr lang="en-US" sz="2400" kern="1200" dirty="0" err="1">
+                          <a:solidFill>
+                            <a:schemeClr val="tx1"/>
+                          </a:solidFill>
+                          <a:latin typeface="+mn-lt"/>
+                          <a:ea typeface="+mn-ea"/>
+                          <a:cs typeface="+mn-cs"/>
+                        </a:rPr>
+                        <a:t>Optuna</a:t>
+                      </a:r>
+                      <a:r>
+                        <a:rPr lang="en-US" sz="2400" kern="1200" dirty="0">
+                          <a:solidFill>
+                            <a:schemeClr val="tx1"/>
+                          </a:solidFill>
+                          <a:latin typeface="+mn-lt"/>
+                          <a:ea typeface="+mn-ea"/>
+                          <a:cs typeface="+mn-cs"/>
+                        </a:rPr>
+                        <a:t> tuning</a:t>
+                      </a:r>
+                    </a:p>
+                  </a:txBody>
+                  <a:tcPr anchor="ctr"/>
+                </a:tc>
+                <a:tc>
+                  <a:txBody>
+                    <a:bodyPr/>
+                    <a:lstStyle/>
+                    <a:p>
+                      <a:pPr>
+                        <a:buNone/>
+                      </a:pPr>
+                      <a:r>
+                        <a:rPr lang="en-US" sz="2400" kern="1200">
+                          <a:solidFill>
+                            <a:schemeClr val="tx1"/>
+                          </a:solidFill>
+                          <a:latin typeface="+mn-lt"/>
+                          <a:ea typeface="+mn-ea"/>
+                          <a:cs typeface="+mn-cs"/>
+                        </a:rPr>
+                        <a:t>Adds genuine architectural diversity to ensemble</a:t>
+                      </a:r>
+                    </a:p>
+                  </a:txBody>
+                  <a:tcPr anchor="ctr"/>
+                </a:tc>
+                <a:tc>
+                  <a:txBody>
+                    <a:bodyPr/>
+                    <a:lstStyle/>
+                    <a:p>
+                      <a:pPr>
+                        <a:buNone/>
+                      </a:pPr>
+                      <a:r>
+                        <a:rPr lang="en-US" sz="2400" kern="1200" dirty="0">
+                          <a:solidFill>
+                            <a:schemeClr val="tx1"/>
+                          </a:solidFill>
+                          <a:latin typeface="+mn-lt"/>
+                          <a:ea typeface="+mn-ea"/>
+                          <a:cs typeface="+mn-cs"/>
+                        </a:rPr>
+                        <a:t>~17h/trial on CPU — infeasible. Default params below </a:t>
+                      </a:r>
+                      <a:r>
+                        <a:rPr lang="en-US" sz="2400" dirty="0" err="1"/>
+                        <a:t>LightGBM</a:t>
+                      </a:r>
+                      <a:r>
+                        <a:rPr lang="en-US" sz="2400" kern="1200" dirty="0">
+                          <a:solidFill>
+                            <a:schemeClr val="tx1"/>
+                          </a:solidFill>
+                          <a:latin typeface="+mn-lt"/>
+                          <a:ea typeface="+mn-ea"/>
+                          <a:cs typeface="+mn-cs"/>
+                        </a:rPr>
+                        <a:t>.</a:t>
+                      </a:r>
+                    </a:p>
+                  </a:txBody>
+                  <a:tcPr anchor="ctr"/>
+                </a:tc>
+                <a:extLst>
+                  <a:ext uri="{0D108BD9-81ED-4DB2-BD59-A6C34878D82A}">
+                    <a16:rowId xmlns:a16="http://schemas.microsoft.com/office/drawing/2014/main" val="3757206942"/>
+                  </a:ext>
+                </a:extLst>
+              </a:tr>
+              <a:tr h="370840">
+                <a:tc>
+                  <a:txBody>
+                    <a:bodyPr/>
+                    <a:lstStyle/>
+                    <a:p>
+                      <a:pPr>
+                        <a:buNone/>
+                      </a:pPr>
+                      <a:r>
+                        <a:rPr lang="en-US" sz="2400" kern="1200" dirty="0" err="1">
+                          <a:solidFill>
+                            <a:schemeClr val="tx1"/>
+                          </a:solidFill>
+                          <a:latin typeface="+mn-lt"/>
+                          <a:ea typeface="+mn-ea"/>
+                          <a:cs typeface="+mn-cs"/>
+                        </a:rPr>
+                        <a:t>XGBoost</a:t>
+                      </a:r>
+                      <a:r>
+                        <a:rPr lang="en-US" sz="2400" kern="1200" dirty="0">
+                          <a:solidFill>
+                            <a:schemeClr val="tx1"/>
+                          </a:solidFill>
+                          <a:latin typeface="+mn-lt"/>
+                          <a:ea typeface="+mn-ea"/>
+                          <a:cs typeface="+mn-cs"/>
+                        </a:rPr>
+                        <a:t> + </a:t>
+                      </a:r>
+                      <a:r>
+                        <a:rPr lang="en-US" sz="2400" kern="1200" dirty="0" err="1">
+                          <a:solidFill>
+                            <a:schemeClr val="tx1"/>
+                          </a:solidFill>
+                          <a:latin typeface="+mn-lt"/>
+                          <a:ea typeface="+mn-ea"/>
+                          <a:cs typeface="+mn-cs"/>
+                        </a:rPr>
+                        <a:t>LightGBM</a:t>
+                      </a:r>
+                      <a:r>
+                        <a:rPr lang="en-US" sz="2400" kern="1200" dirty="0">
+                          <a:solidFill>
+                            <a:schemeClr val="tx1"/>
+                          </a:solidFill>
+                          <a:latin typeface="+mn-lt"/>
+                          <a:ea typeface="+mn-ea"/>
+                          <a:cs typeface="+mn-cs"/>
+                        </a:rPr>
+                        <a:t> + </a:t>
+                      </a:r>
+                      <a:r>
+                        <a:rPr lang="en-US" sz="2400" kern="1200" dirty="0" err="1">
+                          <a:solidFill>
+                            <a:schemeClr val="tx1"/>
+                          </a:solidFill>
+                          <a:latin typeface="+mn-lt"/>
+                          <a:ea typeface="+mn-ea"/>
+                          <a:cs typeface="+mn-cs"/>
+                        </a:rPr>
+                        <a:t>CatBoost</a:t>
+                      </a:r>
+                      <a:r>
+                        <a:rPr lang="en-US" sz="2400" kern="1200" dirty="0">
+                          <a:solidFill>
+                            <a:schemeClr val="tx1"/>
+                          </a:solidFill>
+                          <a:latin typeface="+mn-lt"/>
+                          <a:ea typeface="+mn-ea"/>
+                          <a:cs typeface="+mn-cs"/>
+                        </a:rPr>
+                        <a:t> ensemble</a:t>
+                      </a:r>
+                    </a:p>
+                  </a:txBody>
+                  <a:tcPr anchor="ctr"/>
+                </a:tc>
+                <a:tc>
+                  <a:txBody>
+                    <a:bodyPr/>
+                    <a:lstStyle/>
+                    <a:p>
+                      <a:pPr>
+                        <a:buNone/>
+                      </a:pPr>
+                      <a:r>
+                        <a:rPr lang="en-US" sz="2400" kern="1200">
+                          <a:solidFill>
+                            <a:schemeClr val="tx1"/>
+                          </a:solidFill>
+                          <a:latin typeface="+mn-lt"/>
+                          <a:ea typeface="+mn-ea"/>
+                          <a:cs typeface="+mn-cs"/>
+                        </a:rPr>
+                        <a:t>Three architecturally different models, uncorrelated errors</a:t>
+                      </a:r>
+                    </a:p>
+                  </a:txBody>
+                  <a:tcPr anchor="ctr"/>
+                </a:tc>
+                <a:tc>
+                  <a:txBody>
+                    <a:bodyPr/>
+                    <a:lstStyle/>
+                    <a:p>
+                      <a:pPr>
+                        <a:buNone/>
+                      </a:pPr>
+                      <a:r>
+                        <a:rPr lang="en-US" sz="2400" kern="1200" dirty="0" err="1">
+                          <a:solidFill>
+                            <a:schemeClr val="tx1"/>
+                          </a:solidFill>
+                          <a:latin typeface="+mn-lt"/>
+                          <a:ea typeface="+mn-ea"/>
+                          <a:cs typeface="+mn-cs"/>
+                        </a:rPr>
+                        <a:t>CatBoost</a:t>
+                      </a:r>
+                      <a:r>
+                        <a:rPr lang="en-US" sz="2400" kern="1200" dirty="0">
+                          <a:solidFill>
+                            <a:schemeClr val="tx1"/>
+                          </a:solidFill>
+                          <a:latin typeface="+mn-lt"/>
+                          <a:ea typeface="+mn-ea"/>
+                          <a:cs typeface="+mn-cs"/>
+                        </a:rPr>
+                        <a:t> excluded — see above</a:t>
+                      </a:r>
+                      <a:r>
+                        <a:rPr lang="en-US" sz="2400" kern="1200">
+                          <a:solidFill>
+                            <a:schemeClr val="tx1"/>
+                          </a:solidFill>
+                          <a:latin typeface="+mn-lt"/>
+                          <a:ea typeface="+mn-ea"/>
+                          <a:cs typeface="+mn-cs"/>
+                        </a:rPr>
+                        <a:t>. </a:t>
+                      </a:r>
+                    </a:p>
+                    <a:p>
+                      <a:pPr>
+                        <a:buNone/>
+                      </a:pPr>
+                      <a:r>
+                        <a:rPr lang="en-US" sz="2400"/>
+                        <a:t>XGBoost</a:t>
+                      </a:r>
+                      <a:r>
+                        <a:rPr lang="en-US" sz="2400" dirty="0"/>
+                        <a:t> alone below </a:t>
+                      </a:r>
+                      <a:r>
+                        <a:rPr lang="en-US" sz="2400" dirty="0" err="1"/>
+                        <a:t>LightGBM</a:t>
+                      </a:r>
+                      <a:r>
+                        <a:rPr lang="en-US" sz="2400" dirty="0"/>
+                        <a:t> on PR AUC.</a:t>
+                      </a:r>
+                      <a:endParaRPr lang="en-US" sz="2400" kern="1200" dirty="0">
+                        <a:solidFill>
+                          <a:schemeClr val="tx1"/>
+                        </a:solidFill>
+                        <a:latin typeface="+mn-lt"/>
+                        <a:ea typeface="+mn-ea"/>
+                        <a:cs typeface="+mn-cs"/>
+                      </a:endParaRPr>
+                    </a:p>
+                  </a:txBody>
+                  <a:tcPr anchor="ctr"/>
+                </a:tc>
+                <a:extLst>
+                  <a:ext uri="{0D108BD9-81ED-4DB2-BD59-A6C34878D82A}">
+                    <a16:rowId xmlns:a16="http://schemas.microsoft.com/office/drawing/2014/main" val="1760811203"/>
+                  </a:ext>
+                </a:extLst>
+              </a:tr>
+              <a:tr h="370840">
+                <a:tc>
+                  <a:txBody>
+                    <a:bodyPr/>
+                    <a:lstStyle/>
+                    <a:p>
+                      <a:pPr>
+                        <a:buNone/>
+                      </a:pPr>
+                      <a:r>
+                        <a:rPr lang="en-US" sz="2400" kern="1200" dirty="0">
+                          <a:solidFill>
+                            <a:schemeClr val="tx1"/>
+                          </a:solidFill>
+                          <a:latin typeface="+mn-lt"/>
+                          <a:ea typeface="+mn-ea"/>
+                          <a:cs typeface="+mn-cs"/>
+                        </a:rPr>
+                        <a:t>100s of feature iterations</a:t>
+                      </a:r>
+                    </a:p>
+                  </a:txBody>
+                  <a:tcPr anchor="ctr"/>
+                </a:tc>
+                <a:tc>
+                  <a:txBody>
+                    <a:bodyPr/>
+                    <a:lstStyle/>
+                    <a:p>
+                      <a:pPr>
+                        <a:buNone/>
+                      </a:pPr>
+                      <a:r>
+                        <a:rPr lang="en-US" sz="2400" kern="1200">
+                          <a:solidFill>
+                            <a:schemeClr val="tx1"/>
+                          </a:solidFill>
+                          <a:latin typeface="+mn-lt"/>
+                          <a:ea typeface="+mn-ea"/>
+                          <a:cs typeface="+mn-cs"/>
+                        </a:rPr>
+                        <a:t>GPU → train+evaluate in minutes → rapid exploration</a:t>
+                      </a:r>
+                    </a:p>
+                  </a:txBody>
+                  <a:tcPr anchor="ctr"/>
+                </a:tc>
+                <a:tc>
+                  <a:txBody>
+                    <a:bodyPr/>
+                    <a:lstStyle/>
+                    <a:p>
+                      <a:pPr>
+                        <a:buNone/>
+                      </a:pPr>
+                      <a:r>
+                        <a:rPr lang="en-US" sz="2400" kern="1200">
+                          <a:solidFill>
+                            <a:schemeClr val="tx1"/>
+                          </a:solidFill>
+                          <a:latin typeface="+mn-lt"/>
+                          <a:ea typeface="+mn-ea"/>
+                          <a:cs typeface="+mn-cs"/>
+                        </a:rPr>
+                        <a:t>Each iteration hours on CPU → only 5–10 experiments feasible</a:t>
+                      </a:r>
+                    </a:p>
+                  </a:txBody>
+                  <a:tcPr anchor="ctr"/>
+                </a:tc>
+                <a:extLst>
+                  <a:ext uri="{0D108BD9-81ED-4DB2-BD59-A6C34878D82A}">
+                    <a16:rowId xmlns:a16="http://schemas.microsoft.com/office/drawing/2014/main" val="1504518317"/>
+                  </a:ext>
+                </a:extLst>
+              </a:tr>
+              <a:tr h="370840">
+                <a:tc>
+                  <a:txBody>
+                    <a:bodyPr/>
+                    <a:lstStyle/>
+                    <a:p>
+                      <a:pPr>
+                        <a:buNone/>
+                      </a:pPr>
+                      <a:r>
+                        <a:rPr lang="en-US" sz="2400" kern="1200" dirty="0">
+                          <a:solidFill>
+                            <a:schemeClr val="tx1"/>
+                          </a:solidFill>
+                          <a:latin typeface="+mn-lt"/>
+                          <a:ea typeface="+mn-ea"/>
+                          <a:cs typeface="+mn-cs"/>
+                        </a:rPr>
+                        <a:t>UID anchor (</a:t>
+                      </a:r>
+                      <a:r>
+                        <a:rPr lang="en-US" sz="2400" kern="1200" dirty="0" err="1">
+                          <a:solidFill>
+                            <a:schemeClr val="tx1"/>
+                          </a:solidFill>
+                          <a:latin typeface="+mn-lt"/>
+                          <a:ea typeface="+mn-ea"/>
+                          <a:cs typeface="+mn-cs"/>
+                        </a:rPr>
+                        <a:t>TransactionDT</a:t>
+                      </a:r>
+                      <a:r>
+                        <a:rPr lang="en-US" sz="2400" kern="1200" dirty="0">
+                          <a:solidFill>
+                            <a:schemeClr val="tx1"/>
+                          </a:solidFill>
+                          <a:latin typeface="+mn-lt"/>
+                          <a:ea typeface="+mn-ea"/>
+                          <a:cs typeface="+mn-cs"/>
+                        </a:rPr>
+                        <a:t> − D1)</a:t>
+                      </a:r>
+                    </a:p>
+                  </a:txBody>
+                  <a:tcPr anchor="ctr"/>
+                </a:tc>
+                <a:tc>
+                  <a:txBody>
+                    <a:bodyPr/>
+                    <a:lstStyle/>
+                    <a:p>
+                      <a:pPr>
+                        <a:buNone/>
+                      </a:pPr>
+                      <a:r>
+                        <a:rPr lang="en-US" sz="2400" kern="1200" dirty="0">
+                          <a:solidFill>
+                            <a:schemeClr val="tx1"/>
+                          </a:solidFill>
+                          <a:latin typeface="+mn-lt"/>
+                          <a:ea typeface="+mn-ea"/>
+                          <a:cs typeface="+mn-cs"/>
+                        </a:rPr>
+                        <a:t>Adds aggregation features on finer sub-groups</a:t>
+                      </a:r>
+                    </a:p>
+                  </a:txBody>
+                  <a:tcPr anchor="ctr"/>
+                </a:tc>
+                <a:tc>
+                  <a:txBody>
+                    <a:bodyPr/>
+                    <a:lstStyle/>
+                    <a:p>
+                      <a:pPr>
+                        <a:buNone/>
+                      </a:pPr>
+                      <a:r>
+                        <a:rPr lang="en-US" sz="2400" dirty="0"/>
+                        <a:t>Tested in EDA: ×5.3 group fragmentation, fraud purity drops. Not viable as UID replacement.</a:t>
+                      </a:r>
+                      <a:endParaRPr lang="en-US" sz="2400" kern="1200" dirty="0">
+                        <a:solidFill>
+                          <a:schemeClr val="tx1"/>
+                        </a:solidFill>
+                        <a:latin typeface="+mn-lt"/>
+                        <a:ea typeface="+mn-ea"/>
+                        <a:cs typeface="+mn-cs"/>
+                      </a:endParaRPr>
+                    </a:p>
+                  </a:txBody>
+                  <a:tcPr anchor="ctr"/>
+                </a:tc>
+                <a:extLst>
+                  <a:ext uri="{0D108BD9-81ED-4DB2-BD59-A6C34878D82A}">
+                    <a16:rowId xmlns:a16="http://schemas.microsoft.com/office/drawing/2014/main" val="3438598490"/>
+                  </a:ext>
+                </a:extLst>
+              </a:tr>
+              <a:tr h="370840">
+                <a:tc>
+                  <a:txBody>
+                    <a:bodyPr/>
+                    <a:lstStyle/>
+                    <a:p>
+                      <a:pPr>
+                        <a:buNone/>
+                      </a:pPr>
+                      <a:r>
+                        <a:rPr lang="en-US" sz="2400" kern="1200">
+                          <a:solidFill>
+                            <a:schemeClr val="tx1"/>
+                          </a:solidFill>
+                          <a:latin typeface="+mn-lt"/>
+                          <a:ea typeface="+mn-ea"/>
+                          <a:cs typeface="+mn-cs"/>
+                        </a:rPr>
+                        <a:t>Feature selection (V-columns)</a:t>
+                      </a:r>
+                    </a:p>
+                  </a:txBody>
+                  <a:tcPr anchor="ctr"/>
+                </a:tc>
+                <a:tc>
+                  <a:txBody>
+                    <a:bodyPr/>
+                    <a:lstStyle/>
+                    <a:p>
+                      <a:pPr>
+                        <a:buNone/>
+                      </a:pPr>
+                      <a:r>
+                        <a:rPr lang="en-US" sz="2400" kern="1200" dirty="0">
+                          <a:solidFill>
+                            <a:schemeClr val="tx1"/>
+                          </a:solidFill>
+                          <a:latin typeface="+mn-lt"/>
+                          <a:ea typeface="+mn-ea"/>
+                          <a:cs typeface="+mn-cs"/>
+                        </a:rPr>
+                        <a:t>Reduce noise, speed up training</a:t>
+                      </a:r>
+                    </a:p>
+                  </a:txBody>
+                  <a:tcPr anchor="ctr"/>
+                </a:tc>
+                <a:tc>
+                  <a:txBody>
+                    <a:bodyPr/>
+                    <a:lstStyle/>
+                    <a:p>
+                      <a:pPr>
+                        <a:buNone/>
+                      </a:pPr>
+                      <a:r>
+                        <a:rPr lang="en-US" sz="2400" kern="1200" dirty="0">
+                          <a:solidFill>
+                            <a:schemeClr val="tx1"/>
+                          </a:solidFill>
+                          <a:latin typeface="+mn-lt"/>
+                          <a:ea typeface="+mn-ea"/>
+                          <a:cs typeface="+mn-cs"/>
+                        </a:rPr>
+                        <a:t>V-columns anonymous — </a:t>
+                      </a:r>
+                      <a:r>
+                        <a:rPr lang="en-US" sz="2400" kern="1200" dirty="0" err="1">
+                          <a:solidFill>
+                            <a:schemeClr val="tx1"/>
+                          </a:solidFill>
+                          <a:latin typeface="+mn-lt"/>
+                          <a:ea typeface="+mn-ea"/>
+                          <a:cs typeface="+mn-cs"/>
+                        </a:rPr>
+                        <a:t>LightGBM</a:t>
+                      </a:r>
+                      <a:r>
+                        <a:rPr lang="en-US" sz="2400" kern="1200" dirty="0">
+                          <a:solidFill>
+                            <a:schemeClr val="tx1"/>
+                          </a:solidFill>
+                          <a:latin typeface="+mn-lt"/>
+                          <a:ea typeface="+mn-ea"/>
+                          <a:cs typeface="+mn-cs"/>
+                        </a:rPr>
+                        <a:t> handles selection implicitly. Manual removal risks discarding valid signal.</a:t>
+                      </a:r>
+                    </a:p>
+                  </a:txBody>
+                  <a:tcPr anchor="ctr"/>
+                </a:tc>
+                <a:extLst>
+                  <a:ext uri="{0D108BD9-81ED-4DB2-BD59-A6C34878D82A}">
+                    <a16:rowId xmlns:a16="http://schemas.microsoft.com/office/drawing/2014/main" val="4284130410"/>
+                  </a:ext>
+                </a:extLst>
+              </a:tr>
+            </a:tbl>
+          </a:graphicData>
+        </a:graphic>
+      </p:graphicFrame>
     </p:spTree>
   </p:cSld>
   <p:clrMapOvr>
@@ -7584,6 +7712,13 @@
               <a:srgbClr val="103760"/>
             </a:solidFill>
           </p:spPr>
+          <p:txBody>
+            <a:bodyPr/>
+            <a:lstStyle/>
+            <a:p>
+              <a:endParaRPr lang="en-IL"/>
+            </a:p>
+          </p:txBody>
         </p:sp>
       </p:grpSp>
       <p:sp>
@@ -7639,7 +7774,7 @@
         <p:spPr>
           <a:xfrm>
             <a:off x="666750" y="3196156"/>
-            <a:ext cx="16954500" cy="6847856"/>
+            <a:ext cx="16954500" cy="4924425"/>
           </a:xfrm>
           <a:prstGeom prst="rect">
             <a:avLst/>
@@ -7659,7 +7794,7 @@
               <a:buChar char="•"/>
             </a:pPr>
             <a:r>
-              <a:rPr lang="en-US" sz="2456" b="1" spc="-135">
+              <a:rPr lang="en-US" sz="2456" b="1" spc="-135" dirty="0" err="1">
                 <a:solidFill>
                   <a:srgbClr val="FFFFFF"/>
                 </a:solidFill>
@@ -7668,10 +7803,22 @@
                 <a:cs typeface="Work Sans Bold"/>
                 <a:sym typeface="Work Sans Bold"/>
               </a:rPr>
-              <a:t>CatBoost with GPU</a:t>
-            </a:r>
-            <a:r>
-              <a:rPr lang="en-US" sz="2456" spc="-135">
+              <a:t>CatBoost</a:t>
+            </a:r>
+            <a:r>
+              <a:rPr lang="en-US" sz="2456" b="1" spc="-135" dirty="0">
+                <a:solidFill>
+                  <a:srgbClr val="FFFFFF"/>
+                </a:solidFill>
+                <a:latin typeface="Work Sans Bold"/>
+                <a:ea typeface="Work Sans Bold"/>
+                <a:cs typeface="Work Sans Bold"/>
+                <a:sym typeface="Work Sans Bold"/>
+              </a:rPr>
+              <a:t> with GPU</a:t>
+            </a:r>
+            <a:r>
+              <a:rPr lang="en-US" sz="2456" spc="-135" dirty="0">
                 <a:solidFill>
                   <a:srgbClr val="FFFFFF"/>
                 </a:solidFill>
@@ -7684,96 +7831,12 @@
             </a:r>
           </a:p>
           <a:p>
-            <a:pPr marL="1060611" lvl="2" indent="-353537" algn="l">
+            <a:pPr algn="l">
               <a:lnSpc>
                 <a:spcPts val="3193"/>
               </a:lnSpc>
-              <a:buFont typeface="Arial"/>
-              <a:buChar char="⚬"/>
-            </a:pPr>
-            <a:r>
-              <a:rPr lang="en-US" sz="2456" spc="-135">
-                <a:solidFill>
-                  <a:srgbClr val="FFFFFF"/>
-                </a:solidFill>
-                <a:latin typeface="Work Sans"/>
-                <a:ea typeface="Work Sans"/>
-                <a:cs typeface="Work Sans"/>
-                <a:sym typeface="Work Sans"/>
-              </a:rPr>
-              <a:t>architecturally different from LightGBM </a:t>
-            </a:r>
-          </a:p>
-          <a:p>
-            <a:pPr marL="1060611" lvl="2" indent="-353537" algn="l">
-              <a:lnSpc>
-                <a:spcPts val="3193"/>
-              </a:lnSpc>
-              <a:buFont typeface="Arial"/>
-              <a:buChar char="⚬"/>
-            </a:pPr>
-            <a:r>
-              <a:rPr lang="en-US" sz="2456" spc="-135">
-                <a:solidFill>
-                  <a:srgbClr val="FFFFFF"/>
-                </a:solidFill>
-                <a:latin typeface="Work Sans"/>
-                <a:ea typeface="Work Sans"/>
-                <a:cs typeface="Work Sans"/>
-                <a:sym typeface="Work Sans"/>
-              </a:rPr>
-              <a:t>ordered boosting </a:t>
-            </a:r>
-          </a:p>
-          <a:p>
-            <a:pPr marL="1060611" lvl="2" indent="-353537" algn="l">
-              <a:lnSpc>
-                <a:spcPts val="3193"/>
-              </a:lnSpc>
-              <a:buFont typeface="Arial"/>
-              <a:buChar char="⚬"/>
-            </a:pPr>
-            <a:r>
-              <a:rPr lang="en-US" sz="2456" spc="-135">
-                <a:solidFill>
-                  <a:srgbClr val="FFFFFF"/>
-                </a:solidFill>
-                <a:latin typeface="Work Sans"/>
-                <a:ea typeface="Work Sans"/>
-                <a:cs typeface="Work Sans"/>
-                <a:sym typeface="Work Sans"/>
-              </a:rPr>
-              <a:t>native categorical encoding </a:t>
-            </a:r>
-          </a:p>
-          <a:p>
-            <a:pPr marL="1060611" lvl="2" indent="-353537" algn="l">
-              <a:lnSpc>
-                <a:spcPts val="3193"/>
-              </a:lnSpc>
-              <a:buFont typeface="Arial"/>
-              <a:buChar char="⚬"/>
-            </a:pPr>
-            <a:r>
-              <a:rPr lang="en-US" sz="2456" spc="-135">
-                <a:solidFill>
-                  <a:srgbClr val="FFFFFF"/>
-                </a:solidFill>
-                <a:latin typeface="Work Sans"/>
-                <a:ea typeface="Work Sans"/>
-                <a:cs typeface="Work Sans"/>
-                <a:sym typeface="Work Sans"/>
-              </a:rPr>
-              <a:t>strongest Ensemble candidate </a:t>
-            </a:r>
-          </a:p>
-          <a:p>
-            <a:pPr algn="l">
-              <a:lnSpc>
-                <a:spcPts val="3193"/>
-              </a:lnSpc>
-            </a:pPr>
-            <a:endParaRPr lang="en-US" sz="2456" spc="-135">
+            </a:pPr>
+            <a:endParaRPr lang="en-US" sz="2456" spc="-135" dirty="0">
               <a:solidFill>
                 <a:srgbClr val="FFFFFF"/>
               </a:solidFill>
@@ -7792,7 +7855,7 @@
               <a:buChar char="•"/>
             </a:pPr>
             <a:r>
-              <a:rPr lang="en-US" sz="2456" b="1" spc="-135">
+              <a:rPr lang="en-US" sz="2456" b="1" spc="-135" dirty="0">
                 <a:solidFill>
                   <a:srgbClr val="FFFFFF"/>
                 </a:solidFill>
@@ -7804,7 +7867,7 @@
               <a:t>MLP (Neural Network) with GPU</a:t>
             </a:r>
             <a:r>
-              <a:rPr lang="en-US" sz="2456" spc="-135">
+              <a:rPr lang="en-US" sz="2456" spc="-135" dirty="0">
                 <a:solidFill>
                   <a:srgbClr val="FFFFFF"/>
                 </a:solidFill>
@@ -7825,7 +7888,7 @@
               <a:buChar char="⚬"/>
             </a:pPr>
             <a:r>
-              <a:rPr lang="en-US" sz="2456" spc="-135">
+              <a:rPr lang="en-US" sz="2456" spc="-135" dirty="0">
                 <a:solidFill>
                   <a:srgbClr val="FFFFFF"/>
                 </a:solidFill>
@@ -7838,27 +7901,6 @@
             </a:r>
           </a:p>
           <a:p>
-            <a:pPr marL="1060611" lvl="2" indent="-353537" algn="l">
-              <a:lnSpc>
-                <a:spcPts val="3193"/>
-              </a:lnSpc>
-              <a:buFont typeface="Arial"/>
-              <a:buChar char="⚬"/>
-            </a:pPr>
-            <a:r>
-              <a:rPr lang="en-US" sz="2456" spc="-135">
-                <a:solidFill>
-                  <a:srgbClr val="FFFFFF"/>
-                </a:solidFill>
-                <a:latin typeface="Work Sans"/>
-                <a:ea typeface="Work Sans"/>
-                <a:cs typeface="Work Sans"/>
-                <a:sym typeface="Work Sans"/>
-              </a:rPr>
-              <a:t>weakly correlated with LightGBM → genuine ensemble diversity</a:t>
-            </a:r>
-          </a:p>
-          <a:p>
             <a:pPr marL="530306" lvl="1" indent="-265153" algn="l">
               <a:lnSpc>
                 <a:spcPts val="3193"/>
@@ -7866,7 +7908,7 @@
               <a:buFont typeface="Arial"/>
               <a:buChar char="•"/>
             </a:pPr>
-            <a:endParaRPr lang="en-US" sz="2456" spc="-135">
+            <a:endParaRPr lang="en-US" sz="2456" spc="-135" dirty="0">
               <a:solidFill>
                 <a:srgbClr val="FFFFFF"/>
               </a:solidFill>
@@ -7885,7 +7927,7 @@
               <a:buChar char="•"/>
             </a:pPr>
             <a:r>
-              <a:rPr lang="en-US" sz="2456" b="1" spc="-135">
+              <a:rPr lang="en-US" sz="2456" b="1" spc="-135" dirty="0">
                 <a:solidFill>
                   <a:srgbClr val="FFFFFF"/>
                 </a:solidFill>
@@ -7897,7 +7939,7 @@
               <a:t>Isolation Forest as meta-feature</a:t>
             </a:r>
             <a:r>
-              <a:rPr lang="en-US" sz="2456" spc="-135">
+              <a:rPr lang="en-US" sz="2456" spc="-135" dirty="0">
                 <a:solidFill>
                   <a:srgbClr val="FFFFFF"/>
                 </a:solidFill>
@@ -7918,7 +7960,7 @@
               <a:buChar char="⚬"/>
             </a:pPr>
             <a:r>
-              <a:rPr lang="en-US" sz="2456" spc="-135">
+              <a:rPr lang="en-US" sz="2456" spc="-135" dirty="0">
                 <a:solidFill>
                   <a:srgbClr val="FFFFFF"/>
                 </a:solidFill>
@@ -7939,7 +7981,7 @@
               <a:buChar char="⚬"/>
             </a:pPr>
             <a:r>
-              <a:rPr lang="en-US" sz="2456" spc="-135">
+              <a:rPr lang="en-US" sz="2456" spc="-135" dirty="0">
                 <a:solidFill>
                   <a:srgbClr val="FFFFFF"/>
                 </a:solidFill>
@@ -7957,7 +7999,7 @@
                 <a:spcPts val="3193"/>
               </a:lnSpc>
             </a:pPr>
-            <a:endParaRPr lang="en-US" sz="2456" spc="-135">
+            <a:endParaRPr lang="en-US" sz="2456" spc="-135" dirty="0">
               <a:solidFill>
                 <a:srgbClr val="FFFFFF"/>
               </a:solidFill>
@@ -7968,7 +8010,7 @@
             </a:endParaRPr>
           </a:p>
           <a:p>
-            <a:pPr marL="530306" lvl="1" indent="-265153" algn="l">
+            <a:pPr marL="530306" lvl="1" indent="-265153">
               <a:lnSpc>
                 <a:spcPts val="3193"/>
               </a:lnSpc>
@@ -7976,7 +8018,7 @@
               <a:buChar char="•"/>
             </a:pPr>
             <a:r>
-              <a:rPr lang="en-US" sz="2456" b="1" spc="-135">
+              <a:rPr lang="en-US" sz="2456" b="1" spc="-135" dirty="0">
                 <a:solidFill>
                   <a:srgbClr val="FFFFFF"/>
                 </a:solidFill>
@@ -7985,8 +8027,52 @@
                 <a:cs typeface="Work Sans Bold"/>
                 <a:sym typeface="Work Sans Bold"/>
               </a:rPr>
-              <a:t>Target Encoding </a:t>
-            </a:r>
+              <a:t>Target </a:t>
+            </a:r>
+            <a:r>
+              <a:rPr lang="en-US" sz="2456" b="1" spc="-135" dirty="0">
+                <a:solidFill>
+                  <a:srgbClr val="FFFFFF"/>
+                </a:solidFill>
+                <a:latin typeface="Work Sans Bold"/>
+                <a:sym typeface="Work Sans Bold"/>
+              </a:rPr>
+              <a:t>Encoding </a:t>
+            </a:r>
+            <a:r>
+              <a:rPr lang="en-US" sz="2456" b="1" spc="-135" dirty="0">
+                <a:solidFill>
+                  <a:srgbClr val="FFFFFF"/>
+                </a:solidFill>
+                <a:latin typeface="Work Sans Bold"/>
+              </a:rPr>
+              <a:t>(card1, addr1, </a:t>
+            </a:r>
+            <a:r>
+              <a:rPr lang="en-US" sz="2456" b="1" spc="-135" dirty="0" err="1">
+                <a:solidFill>
+                  <a:srgbClr val="FFFFFF"/>
+                </a:solidFill>
+                <a:latin typeface="Work Sans Bold"/>
+              </a:rPr>
+              <a:t>P_emaildomain</a:t>
+            </a:r>
+            <a:r>
+              <a:rPr lang="en-US" sz="2456" b="1" spc="-135" dirty="0">
+                <a:solidFill>
+                  <a:srgbClr val="FFFFFF"/>
+                </a:solidFill>
+                <a:latin typeface="Work Sans Bold"/>
+              </a:rPr>
+              <a:t>)</a:t>
+            </a:r>
+            <a:endParaRPr lang="en-US" sz="2456" b="1" spc="-135" dirty="0">
+              <a:solidFill>
+                <a:srgbClr val="FFFFFF"/>
+              </a:solidFill>
+              <a:latin typeface="Work Sans Bold"/>
+              <a:sym typeface="Work Sans Bold"/>
+            </a:endParaRPr>
           </a:p>
           <a:p>
             <a:pPr marL="1060611" lvl="2" indent="-353537" algn="l">
@@ -7997,7 +8083,7 @@
               <a:buChar char="⚬"/>
             </a:pPr>
             <a:r>
-              <a:rPr lang="en-US" sz="2456" spc="-135">
+              <a:rPr lang="en-US" sz="2456" spc="-135" dirty="0">
                 <a:solidFill>
                   <a:srgbClr val="FFFFFF"/>
                 </a:solidFill>
@@ -8006,22 +8092,72 @@
                 <a:cs typeface="Work Sans"/>
                 <a:sym typeface="Work Sans"/>
               </a:rPr>
-              <a:t>leave-one-out target encoding for card1, addr1, P_emaildomain </a:t>
-            </a:r>
-          </a:p>
-          <a:p>
-            <a:pPr algn="l">
+              <a:t>leave-one-out target encoding for card1, addr1, </a:t>
+            </a:r>
+            <a:r>
+              <a:rPr lang="en-US" sz="2456" spc="-135" dirty="0" err="1">
+                <a:solidFill>
+                  <a:srgbClr val="FFFFFF"/>
+                </a:solidFill>
+                <a:latin typeface="Work Sans"/>
+                <a:ea typeface="Work Sans"/>
+                <a:cs typeface="Work Sans"/>
+                <a:sym typeface="Work Sans"/>
+              </a:rPr>
+              <a:t>P_emaildomain</a:t>
+            </a:r>
+            <a:r>
+              <a:rPr lang="en-US" sz="2456" spc="-135" dirty="0">
+                <a:solidFill>
+                  <a:srgbClr val="FFFFFF"/>
+                </a:solidFill>
+                <a:latin typeface="Work Sans"/>
+                <a:ea typeface="Work Sans"/>
+                <a:cs typeface="Work Sans"/>
+                <a:sym typeface="Work Sans"/>
+              </a:rPr>
+              <a:t> </a:t>
+            </a:r>
+          </a:p>
+          <a:p>
+            <a:pPr marL="1060611" lvl="2" indent="-353537">
               <a:lnSpc>
                 <a:spcPts val="3193"/>
               </a:lnSpc>
-            </a:pPr>
-            <a:endParaRPr lang="en-US" sz="2456" spc="-135">
+              <a:buFont typeface="Arial"/>
+              <a:buChar char="⚬"/>
+            </a:pPr>
+            <a:r>
+              <a:rPr lang="en-US" sz="2456" spc="-135" dirty="0">
+                <a:solidFill>
+                  <a:srgbClr val="FFFFFF"/>
+                </a:solidFill>
+                <a:latin typeface="Work Sans"/>
+              </a:rPr>
+              <a:t>requires careful OOF implementation — added complexity</a:t>
+            </a:r>
+            <a:r>
+              <a:rPr lang="en-US" sz="2456" spc="-135" dirty="0">
+                <a:solidFill>
+                  <a:schemeClr val="bg1"/>
+                </a:solidFill>
+                <a:latin typeface="Work Sans"/>
+              </a:rPr>
+              <a:t> </a:t>
+            </a:r>
+            <a:r>
+              <a:rPr lang="en-US" sz="2800" dirty="0">
+                <a:solidFill>
+                  <a:schemeClr val="bg1"/>
+                </a:solidFill>
+              </a:rPr>
+              <a:t>on CPU each experiment takes long hours/days</a:t>
+            </a:r>
+            <a:endParaRPr lang="en-US" sz="2456" spc="-135" dirty="0">
               <a:solidFill>
-                <a:srgbClr val="FFFFFF"/>
+                <a:schemeClr val="bg1"/>
               </a:solidFill>
               <a:latin typeface="Work Sans"/>
-              <a:ea typeface="Work Sans"/>
-              <a:cs typeface="Work Sans"/>
               <a:sym typeface="Work Sans"/>
             </a:endParaRPr>
           </a:p>
@@ -8126,6 +8262,13 @@
               </a:stretch>
             </a:blipFill>
           </p:spPr>
+          <p:txBody>
+            <a:bodyPr/>
+            <a:lstStyle/>
+            <a:p>
+              <a:endParaRPr lang="en-IL"/>
+            </a:p>
+          </p:txBody>
         </p:sp>
       </p:grpSp>
     </p:spTree>
@@ -8206,6 +8349,13 @@
             </a:stretch>
           </a:blipFill>
         </p:spPr>
+        <p:txBody>
+          <a:bodyPr/>
+          <a:lstStyle/>
+          <a:p>
+            <a:endParaRPr lang="en-IL"/>
+          </a:p>
+        </p:txBody>
       </p:sp>
     </p:spTree>
   </p:cSld>
@@ -8337,6 +8487,13 @@
               <a:srgbClr val="103760"/>
             </a:solidFill>
           </p:spPr>
+          <p:txBody>
+            <a:bodyPr/>
+            <a:lstStyle/>
+            <a:p>
+              <a:endParaRPr lang="en-IL"/>
+            </a:p>
+          </p:txBody>
         </p:sp>
       </p:grpSp>
       <p:sp>
@@ -8384,6 +8541,13 @@
             </a:stretch>
           </a:blipFill>
         </p:spPr>
+        <p:txBody>
+          <a:bodyPr/>
+          <a:lstStyle/>
+          <a:p>
+            <a:endParaRPr lang="en-IL"/>
+          </a:p>
+        </p:txBody>
       </p:sp>
       <p:sp>
         <p:nvSpPr>
@@ -8792,319 +8956,6 @@
           <a:chExt cx="0" cy="0"/>
         </a:xfrm>
       </p:grpSpPr>
-      <p:graphicFrame>
-        <p:nvGraphicFramePr>
-          <p:cNvPr id="2" name="Table 2"/>
-          <p:cNvGraphicFramePr>
-            <a:graphicFrameLocks noGrp="1"/>
-          </p:cNvGraphicFramePr>
-          <p:nvPr/>
-        </p:nvGraphicFramePr>
-        <p:xfrm>
-          <a:off x="4100216" y="3423535"/>
-          <a:ext cx="3790666" cy="1938377"/>
-        </p:xfrm>
-        <a:graphic>
-          <a:graphicData uri="http://schemas.openxmlformats.org/drawingml/2006/table">
-            <a:tbl>
-              <a:tblPr/>
-              <a:tblGrid>
-                <a:gridCol w="1895333">
-                  <a:extLst>
-                    <a:ext uri="{9D8B030D-6E8A-4147-A177-3AD203B41FA5}">
-                      <a16:colId xmlns:a16="http://schemas.microsoft.com/office/drawing/2014/main" val="20000"/>
-                    </a:ext>
-                  </a:extLst>
-                </a:gridCol>
-                <a:gridCol w="1895333">
-                  <a:extLst>
-                    <a:ext uri="{9D8B030D-6E8A-4147-A177-3AD203B41FA5}">
-                      <a16:colId xmlns:a16="http://schemas.microsoft.com/office/drawing/2014/main" val="20001"/>
-                    </a:ext>
-                  </a:extLst>
-                </a:gridCol>
-              </a:tblGrid>
-              <a:tr h="976496">
-                <a:tc>
-                  <a:txBody>
-                    <a:bodyPr/>
-                    <a:lstStyle/>
-                    <a:p>
-                      <a:pPr algn="l">
-                        <a:lnSpc>
-                          <a:spcPts val="3499"/>
-                        </a:lnSpc>
-                        <a:defRPr/>
-                      </a:pPr>
-                      <a:r>
-                        <a:rPr lang="en-US" sz="2499" spc="-137">
-                          <a:solidFill>
-                            <a:srgbClr val="FFFFFF"/>
-                          </a:solidFill>
-                          <a:latin typeface="Work Sans"/>
-                          <a:ea typeface="Work Sans"/>
-                          <a:cs typeface="Work Sans"/>
-                          <a:sym typeface="Work Sans"/>
-                        </a:rPr>
-                        <a:t>Legitimate</a:t>
-                      </a:r>
-                      <a:endParaRPr lang="en-US" sz="1100"/>
-                    </a:p>
-                  </a:txBody>
-                  <a:tcPr marL="190500" marR="190500" marT="190500" marB="190500" anchor="ctr">
-                    <a:lnL w="38100" cap="flat" cmpd="sng" algn="ctr">
-                      <a:solidFill>
-                        <a:srgbClr val="FFFFFF"/>
-                      </a:solidFill>
-                      <a:prstDash val="solid"/>
-                      <a:round/>
-                      <a:headEnd type="none" w="med" len="med"/>
-                      <a:tailEnd type="none" w="med" len="med"/>
-                    </a:lnL>
-                    <a:lnR w="38100" cap="flat" cmpd="sng" algn="ctr">
-                      <a:solidFill>
-                        <a:srgbClr val="FFFFFF"/>
-                      </a:solidFill>
-                      <a:prstDash val="solid"/>
-                      <a:round/>
-                      <a:headEnd type="none" w="med" len="med"/>
-                      <a:tailEnd type="none" w="med" len="med"/>
-                    </a:lnR>
-                    <a:lnT w="38100" cap="flat" cmpd="sng" algn="ctr">
-                      <a:solidFill>
-                        <a:srgbClr val="FFFFFF"/>
-                      </a:solidFill>
-                      <a:prstDash val="solid"/>
-                      <a:round/>
-                      <a:headEnd type="none" w="med" len="med"/>
-                      <a:tailEnd type="none" w="med" len="med"/>
-                    </a:lnT>
-                    <a:lnB w="38100" cap="flat" cmpd="sng" algn="ctr">
-                      <a:solidFill>
-                        <a:srgbClr val="FFFFFF"/>
-                      </a:solidFill>
-                      <a:prstDash val="solid"/>
-                      <a:round/>
-                      <a:headEnd type="none" w="med" len="med"/>
-                      <a:tailEnd type="none" w="med" len="med"/>
-                    </a:lnB>
-                  </a:tcPr>
-                </a:tc>
-                <a:tc>
-                  <a:txBody>
-                    <a:bodyPr/>
-                    <a:lstStyle/>
-                    <a:p>
-                      <a:pPr algn="l">
-                        <a:lnSpc>
-                          <a:spcPts val="3499"/>
-                        </a:lnSpc>
-                        <a:defRPr/>
-                      </a:pPr>
-                      <a:r>
-                        <a:rPr lang="en-US" sz="2499" spc="-137">
-                          <a:solidFill>
-                            <a:srgbClr val="FFFFFF"/>
-                          </a:solidFill>
-                          <a:latin typeface="Work Sans"/>
-                          <a:ea typeface="Work Sans"/>
-                          <a:cs typeface="Work Sans"/>
-                          <a:sym typeface="Work Sans"/>
-                        </a:rPr>
-                        <a:t>96.5%</a:t>
-                      </a:r>
-                      <a:endParaRPr lang="en-US" sz="1100"/>
-                    </a:p>
-                  </a:txBody>
-                  <a:tcPr marL="190500" marR="190500" marT="190500" marB="190500" anchor="ctr">
-                    <a:lnL w="38100" cap="flat" cmpd="sng" algn="ctr">
-                      <a:solidFill>
-                        <a:srgbClr val="FFFFFF"/>
-                      </a:solidFill>
-                      <a:prstDash val="solid"/>
-                      <a:round/>
-                      <a:headEnd type="none" w="med" len="med"/>
-                      <a:tailEnd type="none" w="med" len="med"/>
-                    </a:lnL>
-                    <a:lnR w="38100" cap="flat" cmpd="sng" algn="ctr">
-                      <a:solidFill>
-                        <a:srgbClr val="FFFFFF"/>
-                      </a:solidFill>
-                      <a:prstDash val="solid"/>
-                      <a:round/>
-                      <a:headEnd type="none" w="med" len="med"/>
-                      <a:tailEnd type="none" w="med" len="med"/>
-                    </a:lnR>
-                    <a:lnT w="38100" cap="flat" cmpd="sng" algn="ctr">
-                      <a:solidFill>
-                        <a:srgbClr val="FFFFFF"/>
-                      </a:solidFill>
-                      <a:prstDash val="solid"/>
-                      <a:round/>
-                      <a:headEnd type="none" w="med" len="med"/>
-                      <a:tailEnd type="none" w="med" len="med"/>
-                    </a:lnT>
-                    <a:lnB w="38100" cap="flat" cmpd="sng" algn="ctr">
-                      <a:solidFill>
-                        <a:srgbClr val="FFFFFF"/>
-                      </a:solidFill>
-                      <a:prstDash val="solid"/>
-                      <a:round/>
-                      <a:headEnd type="none" w="med" len="med"/>
-                      <a:tailEnd type="none" w="med" len="med"/>
-                    </a:lnB>
-                  </a:tcPr>
-                </a:tc>
-                <a:extLst>
-                  <a:ext uri="{0D108BD9-81ED-4DB2-BD59-A6C34878D82A}">
-                    <a16:rowId xmlns:a16="http://schemas.microsoft.com/office/drawing/2014/main" val="10000"/>
-                  </a:ext>
-                </a:extLst>
-              </a:tr>
-              <a:tr h="961881">
-                <a:tc>
-                  <a:txBody>
-                    <a:bodyPr/>
-                    <a:lstStyle/>
-                    <a:p>
-                      <a:pPr algn="l">
-                        <a:lnSpc>
-                          <a:spcPts val="3499"/>
-                        </a:lnSpc>
-                        <a:defRPr/>
-                      </a:pPr>
-                      <a:r>
-                        <a:rPr lang="en-US" sz="2499" spc="-137">
-                          <a:solidFill>
-                            <a:srgbClr val="FFFFFF"/>
-                          </a:solidFill>
-                          <a:latin typeface="Work Sans"/>
-                          <a:ea typeface="Work Sans"/>
-                          <a:cs typeface="Work Sans"/>
-                          <a:sym typeface="Work Sans"/>
-                        </a:rPr>
-                        <a:t>Fraud</a:t>
-                      </a:r>
-                      <a:endParaRPr lang="en-US" sz="1100"/>
-                    </a:p>
-                  </a:txBody>
-                  <a:tcPr marL="190500" marR="190500" marT="190500" marB="190500" anchor="ctr">
-                    <a:lnL w="38100" cap="flat" cmpd="sng" algn="ctr">
-                      <a:solidFill>
-                        <a:srgbClr val="FFFFFF"/>
-                      </a:solidFill>
-                      <a:prstDash val="solid"/>
-                      <a:round/>
-                      <a:headEnd type="none" w="med" len="med"/>
-                      <a:tailEnd type="none" w="med" len="med"/>
-                    </a:lnL>
-                    <a:lnR w="38100" cap="flat" cmpd="sng" algn="ctr">
-                      <a:solidFill>
-                        <a:srgbClr val="FFFFFF"/>
-                      </a:solidFill>
-                      <a:prstDash val="solid"/>
-                      <a:round/>
-                      <a:headEnd type="none" w="med" len="med"/>
-                      <a:tailEnd type="none" w="med" len="med"/>
-                    </a:lnR>
-                    <a:lnT w="38100" cap="flat" cmpd="sng" algn="ctr">
-                      <a:solidFill>
-                        <a:srgbClr val="FFFFFF"/>
-                      </a:solidFill>
-                      <a:prstDash val="solid"/>
-                      <a:round/>
-                      <a:headEnd type="none" w="med" len="med"/>
-                      <a:tailEnd type="none" w="med" len="med"/>
-                    </a:lnT>
-                    <a:lnB w="38100" cap="flat" cmpd="sng" algn="ctr">
-                      <a:solidFill>
-                        <a:srgbClr val="FFFFFF"/>
-                      </a:solidFill>
-                      <a:prstDash val="solid"/>
-                      <a:round/>
-                      <a:headEnd type="none" w="med" len="med"/>
-                      <a:tailEnd type="none" w="med" len="med"/>
-                    </a:lnB>
-                  </a:tcPr>
-                </a:tc>
-                <a:tc>
-                  <a:txBody>
-                    <a:bodyPr/>
-                    <a:lstStyle/>
-                    <a:p>
-                      <a:pPr marL="0" lvl="0" indent="0" algn="l">
-                        <a:lnSpc>
-                          <a:spcPts val="3499"/>
-                        </a:lnSpc>
-                        <a:spcBef>
-                          <a:spcPct val="0"/>
-                        </a:spcBef>
-                        <a:defRPr/>
-                      </a:pPr>
-                      <a:r>
-                        <a:rPr lang="en-US" sz="2499" u="none" strike="noStrike" spc="-137">
-                          <a:solidFill>
-                            <a:srgbClr val="FFFFFF"/>
-                          </a:solidFill>
-                          <a:latin typeface="Work Sans"/>
-                          <a:ea typeface="Work Sans"/>
-                          <a:cs typeface="Work Sans"/>
-                          <a:sym typeface="Work Sans"/>
-                        </a:rPr>
-                        <a:t>3.5%</a:t>
-                      </a:r>
-                      <a:endParaRPr lang="en-US" sz="1100"/>
-                    </a:p>
-                  </a:txBody>
-                  <a:tcPr marL="190500" marR="190500" marT="190500" marB="190500" anchor="ctr">
-                    <a:lnL w="38100" cap="flat" cmpd="sng" algn="ctr">
-                      <a:solidFill>
-                        <a:srgbClr val="FFFFFF"/>
-                      </a:solidFill>
-                      <a:prstDash val="solid"/>
-                      <a:round/>
-                      <a:headEnd type="none" w="med" len="med"/>
-                      <a:tailEnd type="none" w="med" len="med"/>
-                    </a:lnL>
-                    <a:lnR w="38100" cap="flat" cmpd="sng" algn="ctr">
-                      <a:solidFill>
-                        <a:srgbClr val="FFFFFF"/>
-                      </a:solidFill>
-                      <a:prstDash val="solid"/>
-                      <a:round/>
-                      <a:headEnd type="none" w="med" len="med"/>
-                      <a:tailEnd type="none" w="med" len="med"/>
-                    </a:lnR>
-                    <a:lnT w="38100" cap="flat" cmpd="sng" algn="ctr">
-                      <a:solidFill>
-                        <a:srgbClr val="FFFFFF"/>
-                      </a:solidFill>
-                      <a:prstDash val="solid"/>
-                      <a:round/>
-                      <a:headEnd type="none" w="med" len="med"/>
-                      <a:tailEnd type="none" w="med" len="med"/>
-                    </a:lnT>
-                    <a:lnB w="38100" cap="flat" cmpd="sng" algn="ctr">
-                      <a:solidFill>
-                        <a:srgbClr val="FFFFFF"/>
-                      </a:solidFill>
-                      <a:prstDash val="solid"/>
-                      <a:round/>
-                      <a:headEnd type="none" w="med" len="med"/>
-                      <a:tailEnd type="none" w="med" len="med"/>
-                    </a:lnB>
-                  </a:tcPr>
-                </a:tc>
-                <a:extLst>
-                  <a:ext uri="{0D108BD9-81ED-4DB2-BD59-A6C34878D82A}">
-                    <a16:rowId xmlns:a16="http://schemas.microsoft.com/office/drawing/2014/main" val="10001"/>
-                  </a:ext>
-                </a:extLst>
-              </a:tr>
-            </a:tbl>
-          </a:graphicData>
-        </a:graphic>
-      </p:graphicFrame>
       <p:grpSp>
         <p:nvGrpSpPr>
           <p:cNvPr id="3" name="Group 3"/>
@@ -9202,6 +9053,13 @@
               <a:srgbClr val="103760"/>
             </a:solidFill>
           </p:spPr>
+          <p:txBody>
+            <a:bodyPr/>
+            <a:lstStyle/>
+            <a:p>
+              <a:endParaRPr lang="en-IL"/>
+            </a:p>
+          </p:txBody>
         </p:sp>
       </p:grpSp>
       <p:grpSp>
@@ -9301,6 +9159,13 @@
               <a:srgbClr val="103760"/>
             </a:solidFill>
           </p:spPr>
+          <p:txBody>
+            <a:bodyPr/>
+            <a:lstStyle/>
+            <a:p>
+              <a:endParaRPr lang="en-IL"/>
+            </a:p>
+          </p:txBody>
         </p:sp>
       </p:grpSp>
       <p:grpSp>
@@ -9382,6 +9247,13 @@
               </a:stretch>
             </a:blipFill>
           </p:spPr>
+          <p:txBody>
+            <a:bodyPr/>
+            <a:lstStyle/>
+            <a:p>
+              <a:endParaRPr lang="en-IL"/>
+            </a:p>
+          </p:txBody>
         </p:sp>
         <p:sp>
           <p:nvSpPr>
@@ -9500,6 +9372,13 @@
               <a:srgbClr val="2A3541"/>
             </a:solidFill>
           </p:spPr>
+          <p:txBody>
+            <a:bodyPr/>
+            <a:lstStyle/>
+            <a:p>
+              <a:endParaRPr lang="en-IL"/>
+            </a:p>
+          </p:txBody>
         </p:sp>
       </p:grpSp>
       <p:sp>
@@ -9554,20 +9433,20 @@
         </p:nvSpPr>
         <p:spPr>
           <a:xfrm>
-            <a:off x="510653" y="3485618"/>
-            <a:ext cx="3291780" cy="907105"/>
+            <a:off x="510652" y="3485618"/>
+            <a:ext cx="9677025" cy="1329082"/>
           </a:xfrm>
           <a:prstGeom prst="rect">
             <a:avLst/>
           </a:prstGeom>
         </p:spPr>
         <p:txBody>
-          <a:bodyPr lIns="0" tIns="0" rIns="0" bIns="0" rtlCol="0" anchor="t">
+          <a:bodyPr wrap="square" lIns="0" tIns="0" rIns="0" bIns="0" rtlCol="0" anchor="t">
             <a:spAutoFit/>
           </a:bodyPr>
           <a:lstStyle/>
           <a:p>
-            <a:pPr marL="0" lvl="0" indent="0" algn="ctr">
+            <a:pPr marL="0" lvl="0" indent="0">
               <a:lnSpc>
                 <a:spcPts val="3462"/>
               </a:lnSpc>
@@ -9576,7 +9455,7 @@
               </a:spcBef>
             </a:pPr>
             <a:r>
-              <a:rPr lang="en-US" sz="3462" b="1" u="sng" strike="noStrike" spc="-190">
+              <a:rPr lang="en-US" sz="3462" b="1" u="sng" strike="noStrike" spc="-190" dirty="0">
                 <a:solidFill>
                   <a:srgbClr val="38B6FF"/>
                 </a:solidFill>
@@ -9587,17 +9466,7 @@
               </a:rPr>
               <a:t>Class Imbalance </a:t>
             </a:r>
-          </a:p>
-          <a:p>
-            <a:pPr marL="0" lvl="0" indent="0" algn="ctr">
-              <a:lnSpc>
-                <a:spcPts val="3462"/>
-              </a:lnSpc>
-              <a:spcBef>
-                <a:spcPct val="0"/>
-              </a:spcBef>
-            </a:pPr>
-            <a:endParaRPr lang="en-US" sz="3462" b="1" u="sng" strike="noStrike" spc="-190">
+            <a:endParaRPr lang="en-US" sz="3462" b="1" u="sng" spc="-190" dirty="0">
               <a:solidFill>
                 <a:srgbClr val="38B6FF"/>
               </a:solidFill>
@@ -9607,6 +9476,41 @@
               <a:sym typeface="Work Sans Semi-Bold"/>
             </a:endParaRPr>
           </a:p>
+          <a:p>
+            <a:pPr marL="342900" lvl="0" indent="-342900">
+              <a:lnSpc>
+                <a:spcPts val="3462"/>
+              </a:lnSpc>
+              <a:spcBef>
+                <a:spcPct val="0"/>
+              </a:spcBef>
+              <a:buFont typeface="Arial" panose="020B0604020202020204" pitchFamily="34" charset="0"/>
+              <a:buChar char="•"/>
+            </a:pPr>
+            <a:r>
+              <a:rPr lang="en-US" sz="2800" b="1" dirty="0">
+                <a:solidFill>
+                  <a:schemeClr val="bg1"/>
+                </a:solidFill>
+              </a:rPr>
+              <a:t>Statistical baseline: </a:t>
+            </a:r>
+            <a:r>
+              <a:rPr lang="en-US" sz="2800" dirty="0">
+                <a:solidFill>
+                  <a:schemeClr val="bg1"/>
+                </a:solidFill>
+              </a:rPr>
+              <a:t>predict everything as legitimate → 96.5% accuracy, 0% fraud caught.</a:t>
+            </a:r>
+            <a:endParaRPr lang="en-US" sz="2499" spc="-137" dirty="0">
+              <a:solidFill>
+                <a:schemeClr val="bg1"/>
+              </a:solidFill>
+              <a:latin typeface="Work Sans"/>
+              <a:sym typeface="Work Sans Semi-Bold"/>
+            </a:endParaRPr>
+          </a:p>
         </p:txBody>
       </p:sp>
       <p:graphicFrame>
@@ -9615,25 +9519,31 @@
           <p:cNvGraphicFramePr>
             <a:graphicFrameLocks noGrp="1"/>
           </p:cNvGraphicFramePr>
-          <p:nvPr/>
+          <p:nvPr>
+            <p:extLst>
+              <p:ext uri="{D42A27DB-BD31-4B8C-83A1-F6EECF244321}">
+                <p14:modId xmlns:p14="http://schemas.microsoft.com/office/powerpoint/2010/main" val="1791615329"/>
+              </p:ext>
+            </p:extLst>
+          </p:nvPr>
         </p:nvGraphicFramePr>
         <p:xfrm>
           <a:off x="10904089" y="4392724"/>
-          <a:ext cx="7125973" cy="5530503"/>
+          <a:ext cx="6661975" cy="5530502"/>
         </p:xfrm>
         <a:graphic>
           <a:graphicData uri="http://schemas.openxmlformats.org/drawingml/2006/table">
             <a:tbl>
               <a:tblPr/>
               <a:tblGrid>
-                <a:gridCol w="2413719">
+                <a:gridCol w="1509713">
                   <a:extLst>
                     <a:ext uri="{9D8B030D-6E8A-4147-A177-3AD203B41FA5}">
                       <a16:colId xmlns:a16="http://schemas.microsoft.com/office/drawing/2014/main" val="20000"/>
                     </a:ext>
                   </a:extLst>
                 </a:gridCol>
-                <a:gridCol w="4712254">
+                <a:gridCol w="5152262">
                   <a:extLst>
                     <a:ext uri="{9D8B030D-6E8A-4147-A177-3AD203B41FA5}">
                       <a16:colId xmlns:a16="http://schemas.microsoft.com/office/drawing/2014/main" val="20001"/>
@@ -9654,7 +9564,7 @@
                         <a:defRPr/>
                       </a:pPr>
                       <a:r>
-                        <a:rPr lang="en-US" sz="1999">
+                        <a:rPr lang="en-US" sz="1999" dirty="0">
                           <a:solidFill>
                             <a:srgbClr val="FFFFFF"/>
                           </a:solidFill>
@@ -9665,7 +9575,7 @@
                         </a:rPr>
                         <a:t>Source</a:t>
                       </a:r>
-                      <a:endParaRPr lang="en-US" sz="1100"/>
+                      <a:endParaRPr lang="en-US" sz="1100" dirty="0"/>
                     </a:p>
                   </a:txBody>
                   <a:tcPr marL="190500" marR="190500" marT="190500" marB="190500" anchor="ctr">
@@ -9993,7 +9903,7 @@
                         <a:defRPr/>
                       </a:pPr>
                       <a:r>
-                        <a:rPr lang="en-US" sz="1999">
+                        <a:rPr lang="en-US" sz="1999" dirty="0">
                           <a:solidFill>
                             <a:srgbClr val="FFFFFF"/>
                           </a:solidFill>
@@ -10002,9 +9912,9 @@
                           <a:cs typeface="Canva Sans"/>
                           <a:sym typeface="Canva Sans"/>
                         </a:rPr>
-                        <a:t>434 raw + 23 engineered = 457 total</a:t>
+                        <a:t>434 raw + 24 engineered = 458 total</a:t>
                       </a:r>
-                      <a:endParaRPr lang="en-US" sz="1100"/>
+                      <a:endParaRPr lang="en-US" sz="1100" dirty="0"/>
                     </a:p>
                   </a:txBody>
                   <a:tcPr marL="190500" marR="190500" marT="190500" marB="190500" anchor="ctr">
@@ -10130,18 +10040,49 @@
                         <a:defRPr/>
                       </a:pPr>
                       <a:r>
-                        <a:rPr lang="en-US" sz="1999">
+                        <a:rPr lang="en-US" sz="1999" kern="1200" dirty="0">
                           <a:solidFill>
                             <a:srgbClr val="FFFFFF"/>
                           </a:solidFill>
                           <a:latin typeface="Canva Sans"/>
-                          <a:ea typeface="Canva Sans"/>
-                          <a:cs typeface="Canva Sans"/>
-                          <a:sym typeface="Canva Sans"/>
                         </a:rPr>
-                        <a:t>80% train / 20% val — time-based</a:t>
+                        <a:t>60% train / 20% </a:t>
                       </a:r>
-                      <a:endParaRPr lang="en-US" sz="1100"/>
+                      <a:r>
+                        <a:rPr lang="en-US" sz="1999" kern="1200" dirty="0" err="1">
+                          <a:solidFill>
+                            <a:srgbClr val="FFFFFF"/>
+                          </a:solidFill>
+                          <a:latin typeface="Canva Sans"/>
+                        </a:rPr>
+                        <a:t>val</a:t>
+                      </a:r>
+                      <a:r>
+                        <a:rPr lang="en-US" sz="1999" kern="1200" dirty="0">
+                          <a:solidFill>
+                            <a:srgbClr val="FFFFFF"/>
+                          </a:solidFill>
+                          <a:latin typeface="Canva Sans"/>
+                        </a:rPr>
+                        <a:t> / 20% test —</a:t>
+                      </a:r>
+                    </a:p>
+                    <a:p>
+                      <a:pPr algn="l">
+                        <a:lnSpc>
+                          <a:spcPts val="2799"/>
+                        </a:lnSpc>
+                        <a:defRPr/>
+                      </a:pPr>
+                      <a:r>
+                        <a:rPr lang="en-US" sz="1999" kern="1200" dirty="0">
+                          <a:solidFill>
+                            <a:srgbClr val="FFFFFF"/>
+                          </a:solidFill>
+                          <a:latin typeface="Canva Sans"/>
+                        </a:rPr>
+                        <a:t>time-based (3-way split)</a:t>
+                      </a:r>
                     </a:p>
                   </a:txBody>
                   <a:tcPr marL="190500" marR="190500" marT="190500" marB="190500" anchor="ctr">
@@ -10267,7 +10208,7 @@
                         <a:defRPr/>
                       </a:pPr>
                       <a:r>
-                        <a:rPr lang="en-US" sz="1999">
+                        <a:rPr lang="en-US" sz="1999" dirty="0">
                           <a:solidFill>
                             <a:srgbClr val="FFFFFF"/>
                           </a:solidFill>
@@ -10278,7 +10219,7 @@
                         </a:rPr>
                         <a:t>ROC AUC (official) + PR AUC</a:t>
                       </a:r>
-                      <a:endParaRPr lang="en-US" sz="1100"/>
+                      <a:endParaRPr lang="en-US" sz="1100" dirty="0"/>
                     </a:p>
                   </a:txBody>
                   <a:tcPr marL="190500" marR="190500" marT="190500" marB="190500" anchor="ctr">
@@ -10338,15 +10279,15 @@
         </p:nvSpPr>
         <p:spPr>
           <a:xfrm>
-            <a:off x="10904089" y="3485618"/>
-            <a:ext cx="1504950" cy="468955"/>
+            <a:off x="10904088" y="3485618"/>
+            <a:ext cx="1897511" cy="448841"/>
           </a:xfrm>
           <a:prstGeom prst="rect">
             <a:avLst/>
           </a:prstGeom>
         </p:spPr>
         <p:txBody>
-          <a:bodyPr lIns="0" tIns="0" rIns="0" bIns="0" rtlCol="0" anchor="t">
+          <a:bodyPr wrap="square" lIns="0" tIns="0" rIns="0" bIns="0" rtlCol="0" anchor="t">
             <a:spAutoFit/>
           </a:bodyPr>
           <a:lstStyle/>
@@ -10360,7 +10301,7 @@
               </a:spcBef>
             </a:pPr>
             <a:r>
-              <a:rPr lang="en-US" sz="3462" b="1" u="sng" spc="-190">
+              <a:rPr lang="en-US" sz="3462" b="1" u="sng" spc="-190" dirty="0">
                 <a:solidFill>
                   <a:srgbClr val="02A8E7"/>
                 </a:solidFill>
@@ -10403,7 +10344,7 @@
               <a:buChar char="•"/>
             </a:pPr>
             <a:r>
-              <a:rPr lang="en-US" sz="2499" b="1" u="none" strike="noStrike" spc="-137">
+              <a:rPr lang="en-US" sz="2499" b="1" u="none" strike="noStrike" spc="-137" dirty="0">
                 <a:solidFill>
                   <a:srgbClr val="58A6FF"/>
                 </a:solidFill>
@@ -10415,7 +10356,7 @@
               <a:t>ROC AUC</a:t>
             </a:r>
             <a:r>
-              <a:rPr lang="en-US" sz="2499" u="none" strike="noStrike" spc="-137">
+              <a:rPr lang="en-US" sz="2499" u="none" strike="noStrike" spc="-137" dirty="0">
                 <a:solidFill>
                   <a:srgbClr val="58A6FF"/>
                 </a:solidFill>
@@ -10427,7 +10368,7 @@
               <a:t> — Kaggle's official metric.</a:t>
             </a:r>
             <a:r>
-              <a:rPr lang="en-US" sz="2499" u="none" strike="noStrike" spc="-137">
+              <a:rPr lang="en-US" sz="2499" u="none" strike="noStrike" spc="-137" dirty="0">
                 <a:solidFill>
                   <a:srgbClr val="FFFFFF"/>
                 </a:solidFill>
@@ -10445,7 +10386,7 @@
                 <a:spcPts val="3249"/>
               </a:lnSpc>
             </a:pPr>
-            <a:endParaRPr lang="en-US" sz="2499" u="none" strike="noStrike" spc="-137">
+            <a:endParaRPr lang="en-US" sz="2499" u="none" strike="noStrike" spc="-137" dirty="0">
               <a:solidFill>
                 <a:srgbClr val="FFFFFF"/>
               </a:solidFill>
@@ -10464,7 +10405,7 @@
               <a:buChar char="•"/>
             </a:pPr>
             <a:r>
-              <a:rPr lang="en-US" sz="2499" b="1" u="none" strike="noStrike" spc="-137">
+              <a:rPr lang="en-US" sz="2499" b="1" u="none" strike="noStrike" spc="-137" dirty="0">
                 <a:solidFill>
                   <a:srgbClr val="D9D9D9"/>
                 </a:solidFill>
@@ -10476,7 +10417,7 @@
               <a:t>PR AUC</a:t>
             </a:r>
             <a:r>
-              <a:rPr lang="en-US" sz="2499" b="1" u="none" strike="noStrike" spc="-137">
+              <a:rPr lang="en-US" sz="2499" b="1" u="none" strike="noStrike" spc="-137" dirty="0">
                 <a:solidFill>
                   <a:srgbClr val="FFFFFF"/>
                 </a:solidFill>
@@ -10488,7 +10429,7 @@
               <a:t> </a:t>
             </a:r>
             <a:r>
-              <a:rPr lang="en-US" sz="2499" u="none" strike="noStrike" spc="-137">
+              <a:rPr lang="en-US" sz="2499" u="none" strike="noStrike" spc="-137" dirty="0">
                 <a:solidFill>
                   <a:srgbClr val="FFFFFF"/>
                 </a:solidFill>
@@ -10506,7 +10447,7 @@
                 <a:spcPts val="3249"/>
               </a:lnSpc>
             </a:pPr>
-            <a:endParaRPr lang="en-US" sz="2499" u="none" strike="noStrike" spc="-137">
+            <a:endParaRPr lang="en-US" sz="2499" u="none" strike="noStrike" spc="-137" dirty="0">
               <a:solidFill>
                 <a:srgbClr val="FFFFFF"/>
               </a:solidFill>
@@ -10525,7 +10466,7 @@
               <a:buChar char="•"/>
             </a:pPr>
             <a:r>
-              <a:rPr lang="en-US" sz="2499" b="1" u="none" strike="noStrike" spc="-137">
+              <a:rPr lang="en-US" sz="2499" b="1" u="none" strike="noStrike" spc="-137" dirty="0">
                 <a:solidFill>
                   <a:srgbClr val="FFFFFF"/>
                 </a:solidFill>
@@ -10537,7 +10478,7 @@
               <a:t>Accuracy  — </a:t>
             </a:r>
             <a:r>
-              <a:rPr lang="en-US" sz="2499" u="none" strike="noStrike" spc="-137">
+              <a:rPr lang="en-US" sz="2499" u="none" strike="noStrike" spc="-137" dirty="0">
                 <a:solidFill>
                   <a:srgbClr val="FFFFFF"/>
                 </a:solidFill>
@@ -10560,14 +10501,14 @@
         <p:spPr>
           <a:xfrm>
             <a:off x="510653" y="5537468"/>
-            <a:ext cx="1450925" cy="468955"/>
+            <a:ext cx="1775347" cy="448841"/>
           </a:xfrm>
           <a:prstGeom prst="rect">
             <a:avLst/>
           </a:prstGeom>
         </p:spPr>
         <p:txBody>
-          <a:bodyPr lIns="0" tIns="0" rIns="0" bIns="0" rtlCol="0" anchor="t">
+          <a:bodyPr wrap="square" lIns="0" tIns="0" rIns="0" bIns="0" rtlCol="0" anchor="t">
             <a:spAutoFit/>
           </a:bodyPr>
           <a:lstStyle/>
@@ -10581,7 +10522,7 @@
               </a:spcBef>
             </a:pPr>
             <a:r>
-              <a:rPr lang="en-US" sz="3462" b="1" u="sng" spc="-190">
+              <a:rPr lang="en-US" sz="3462" b="1" u="sng" spc="-190" dirty="0">
                 <a:solidFill>
                   <a:srgbClr val="38B6FF"/>
                 </a:solidFill>
@@ -10725,6 +10666,13 @@
               <a:srgbClr val="103760"/>
             </a:solidFill>
           </p:spPr>
+          <p:txBody>
+            <a:bodyPr/>
+            <a:lstStyle/>
+            <a:p>
+              <a:endParaRPr lang="en-IL"/>
+            </a:p>
+          </p:txBody>
         </p:sp>
       </p:grpSp>
       <p:sp>
@@ -10772,6 +10720,13 @@
             </a:stretch>
           </a:blipFill>
         </p:spPr>
+        <p:txBody>
+          <a:bodyPr/>
+          <a:lstStyle/>
+          <a:p>
+            <a:endParaRPr lang="en-IL"/>
+          </a:p>
+        </p:txBody>
       </p:sp>
       <p:sp>
         <p:nvSpPr>
@@ -11056,6 +11011,13 @@
             </a:stretch>
           </a:blipFill>
         </p:spPr>
+        <p:txBody>
+          <a:bodyPr/>
+          <a:lstStyle/>
+          <a:p>
+            <a:endParaRPr lang="en-IL"/>
+          </a:p>
+        </p:txBody>
       </p:sp>
       <p:sp>
         <p:nvSpPr>
@@ -11102,6 +11064,13 @@
             </a:stretch>
           </a:blipFill>
         </p:spPr>
+        <p:txBody>
+          <a:bodyPr/>
+          <a:lstStyle/>
+          <a:p>
+            <a:endParaRPr lang="en-IL"/>
+          </a:p>
+        </p:txBody>
       </p:sp>
       <p:sp>
         <p:nvSpPr>
@@ -11259,6 +11228,13 @@
               </a:stretch>
             </a:blipFill>
           </p:spPr>
+          <p:txBody>
+            <a:bodyPr/>
+            <a:lstStyle/>
+            <a:p>
+              <a:endParaRPr lang="en-IL"/>
+            </a:p>
+          </p:txBody>
         </p:sp>
         <p:sp>
           <p:nvSpPr>
@@ -11377,6 +11353,13 @@
               <a:srgbClr val="2A3541"/>
             </a:solidFill>
           </p:spPr>
+          <p:txBody>
+            <a:bodyPr/>
+            <a:lstStyle/>
+            <a:p>
+              <a:endParaRPr lang="en-IL"/>
+            </a:p>
+          </p:txBody>
         </p:sp>
       </p:grpSp>
       <p:sp>
@@ -11424,6 +11407,13 @@
             </a:stretch>
           </a:blipFill>
         </p:spPr>
+        <p:txBody>
+          <a:bodyPr/>
+          <a:lstStyle/>
+          <a:p>
+            <a:endParaRPr lang="en-IL"/>
+          </a:p>
+        </p:txBody>
       </p:sp>
       <p:sp>
         <p:nvSpPr>
@@ -11470,6 +11460,13 @@
             </a:stretch>
           </a:blipFill>
         </p:spPr>
+        <p:txBody>
+          <a:bodyPr/>
+          <a:lstStyle/>
+          <a:p>
+            <a:endParaRPr lang="en-IL"/>
+          </a:p>
+        </p:txBody>
       </p:sp>
       <p:grpSp>
         <p:nvGrpSpPr>
@@ -11568,6 +11565,13 @@
               <a:srgbClr val="103760"/>
             </a:solidFill>
           </p:spPr>
+          <p:txBody>
+            <a:bodyPr/>
+            <a:lstStyle/>
+            <a:p>
+              <a:endParaRPr lang="en-IL"/>
+            </a:p>
+          </p:txBody>
         </p:sp>
       </p:grpSp>
       <p:grpSp>
@@ -11667,6 +11671,13 @@
               <a:srgbClr val="103760"/>
             </a:solidFill>
           </p:spPr>
+          <p:txBody>
+            <a:bodyPr/>
+            <a:lstStyle/>
+            <a:p>
+              <a:endParaRPr lang="en-IL"/>
+            </a:p>
+          </p:txBody>
         </p:sp>
       </p:grpSp>
       <p:grpSp>
@@ -11766,6 +11777,13 @@
               <a:srgbClr val="103760"/>
             </a:solidFill>
           </p:spPr>
+          <p:txBody>
+            <a:bodyPr/>
+            <a:lstStyle/>
+            <a:p>
+              <a:endParaRPr lang="en-IL"/>
+            </a:p>
+          </p:txBody>
         </p:sp>
       </p:grpSp>
       <p:sp>
@@ -11815,6 +11833,13 @@
             </a:stretch>
           </a:blipFill>
         </p:spPr>
+        <p:txBody>
+          <a:bodyPr/>
+          <a:lstStyle/>
+          <a:p>
+            <a:endParaRPr lang="en-IL"/>
+          </a:p>
+        </p:txBody>
       </p:sp>
       <p:sp>
         <p:nvSpPr>
@@ -12298,6 +12323,13 @@
               <a:srgbClr val="103760"/>
             </a:solidFill>
           </p:spPr>
+          <p:txBody>
+            <a:bodyPr/>
+            <a:lstStyle/>
+            <a:p>
+              <a:endParaRPr lang="en-IL"/>
+            </a:p>
+          </p:txBody>
         </p:sp>
       </p:grpSp>
       <p:sp>
@@ -12347,6 +12379,13 @@
             </a:stretch>
           </a:blipFill>
         </p:spPr>
+        <p:txBody>
+          <a:bodyPr/>
+          <a:lstStyle/>
+          <a:p>
+            <a:endParaRPr lang="en-IL"/>
+          </a:p>
+        </p:txBody>
       </p:sp>
       <p:sp>
         <p:nvSpPr>
@@ -12422,15 +12461,15 @@
         </p:nvSpPr>
         <p:spPr>
           <a:xfrm>
-            <a:off x="588476" y="3564488"/>
-            <a:ext cx="8169883" cy="5730875"/>
+            <a:off x="568153" y="3386319"/>
+            <a:ext cx="8575847" cy="5619167"/>
           </a:xfrm>
           <a:prstGeom prst="rect">
             <a:avLst/>
           </a:prstGeom>
         </p:spPr>
         <p:txBody>
-          <a:bodyPr lIns="0" tIns="0" rIns="0" bIns="0" rtlCol="0" anchor="t">
+          <a:bodyPr wrap="square" lIns="0" tIns="0" rIns="0" bIns="0" rtlCol="0" anchor="t">
             <a:spAutoFit/>
           </a:bodyPr>
           <a:lstStyle/>
@@ -12441,7 +12480,7 @@
               </a:lnSpc>
             </a:pPr>
             <a:r>
-              <a:rPr lang="en-US" sz="2499" b="1" spc="-137">
+              <a:rPr lang="en-US" sz="2499" b="1" spc="-137" dirty="0">
                 <a:solidFill>
                   <a:srgbClr val="38B6FF"/>
                 </a:solidFill>
@@ -12450,7 +12489,31 @@
                 <a:cs typeface="Work Sans Bold"/>
                 <a:sym typeface="Work Sans Bold"/>
               </a:rPr>
-              <a:t>The dataset has no UserID — identity must be reconstructed.</a:t>
+              <a:t>The dataset has no </a:t>
+            </a:r>
+            <a:r>
+              <a:rPr lang="en-US" sz="2499" b="1" spc="-137" dirty="0" err="1">
+                <a:solidFill>
+                  <a:srgbClr val="38B6FF"/>
+                </a:solidFill>
+                <a:latin typeface="Work Sans Bold"/>
+                <a:ea typeface="Work Sans Bold"/>
+                <a:cs typeface="Work Sans Bold"/>
+                <a:sym typeface="Work Sans Bold"/>
+              </a:rPr>
+              <a:t>UserID</a:t>
+            </a:r>
+            <a:r>
+              <a:rPr lang="en-US" sz="2499" b="1" spc="-137" dirty="0">
+                <a:solidFill>
+                  <a:srgbClr val="38B6FF"/>
+                </a:solidFill>
+                <a:latin typeface="Work Sans Bold"/>
+                <a:ea typeface="Work Sans Bold"/>
+                <a:cs typeface="Work Sans Bold"/>
+                <a:sym typeface="Work Sans Bold"/>
+              </a:rPr>
+              <a:t> — identity must be reconstructed.</a:t>
             </a:r>
           </a:p>
           <a:p>
@@ -12459,7 +12522,7 @@
                 <a:spcPts val="3249"/>
               </a:lnSpc>
             </a:pPr>
-            <a:endParaRPr lang="en-US" sz="2499" b="1" spc="-137">
+            <a:endParaRPr lang="en-US" sz="2499" b="1" spc="-137" dirty="0">
               <a:solidFill>
                 <a:srgbClr val="38B6FF"/>
               </a:solidFill>
@@ -12476,7 +12539,7 @@
               </a:lnSpc>
             </a:pPr>
             <a:r>
-              <a:rPr lang="en-US" sz="2499" b="1" spc="-137">
+              <a:rPr lang="en-US" sz="2499" b="1" spc="-137" dirty="0">
                 <a:solidFill>
                   <a:srgbClr val="38B6FF"/>
                 </a:solidFill>
@@ -12488,7 +12551,7 @@
               <a:t>UID = card1 + addr1</a:t>
             </a:r>
             <a:r>
-              <a:rPr lang="en-US" sz="2499" spc="-137">
+              <a:rPr lang="en-US" sz="2499" spc="-137" dirty="0">
                 <a:solidFill>
                   <a:srgbClr val="38B6FF"/>
                 </a:solidFill>
@@ -12509,7 +12572,7 @@
               <a:buChar char="•"/>
             </a:pPr>
             <a:r>
-              <a:rPr lang="en-US" sz="2499" spc="-137">
+              <a:rPr lang="en-US" sz="2499" spc="-137" dirty="0">
                 <a:solidFill>
                   <a:srgbClr val="FFFFFF"/>
                 </a:solidFill>
@@ -12530,7 +12593,7 @@
               <a:buChar char="•"/>
             </a:pPr>
             <a:r>
-              <a:rPr lang="en-US" sz="2499" spc="-137">
+              <a:rPr lang="en-US" sz="2499" spc="-137" dirty="0">
                 <a:solidFill>
                   <a:srgbClr val="FFFFFF"/>
                 </a:solidFill>
@@ -12551,7 +12614,7 @@
               <a:buChar char="•"/>
             </a:pPr>
             <a:r>
-              <a:rPr lang="en-US" sz="2499" spc="-137">
+              <a:rPr lang="en-US" sz="2499" spc="-137" dirty="0">
                 <a:solidFill>
                   <a:srgbClr val="FFFFFF"/>
                 </a:solidFill>
@@ -12569,7 +12632,7 @@
                 <a:spcPts val="3249"/>
               </a:lnSpc>
             </a:pPr>
-            <a:endParaRPr lang="en-US" sz="2499" spc="-137">
+            <a:endParaRPr lang="en-US" sz="2499" spc="-137" dirty="0">
               <a:solidFill>
                 <a:srgbClr val="FFFFFF"/>
               </a:solidFill>
@@ -12585,7 +12648,87 @@
                 <a:spcPts val="3249"/>
               </a:lnSpc>
             </a:pPr>
-            <a:endParaRPr lang="en-US" sz="2499" spc="-137">
+            <a:r>
+              <a:rPr lang="en-US" sz="2499" b="1" spc="-137" dirty="0">
+                <a:solidFill>
+                  <a:srgbClr val="FFFFFF"/>
+                </a:solidFill>
+                <a:latin typeface="Work Sans Bold"/>
+                <a:ea typeface="Work Sans Bold"/>
+                <a:cs typeface="Work Sans Bold"/>
+                <a:sym typeface="Work Sans Bold"/>
+              </a:rPr>
+              <a:t>Why not D1?</a:t>
+            </a:r>
+            <a:r>
+              <a:rPr lang="en-US" sz="2499" spc="-137" dirty="0">
+                <a:solidFill>
+                  <a:srgbClr val="FFFFFF"/>
+                </a:solidFill>
+                <a:latin typeface="Work Sans"/>
+                <a:ea typeface="Work Sans"/>
+                <a:cs typeface="Work Sans"/>
+                <a:sym typeface="Work Sans"/>
+              </a:rPr>
+              <a:t> (used by many Kaggle solutions) </a:t>
+            </a:r>
+          </a:p>
+          <a:p>
+            <a:pPr marL="342900" lvl="0" indent="-342900" eaLnBrk="0" fontAlgn="base" hangingPunct="0">
+              <a:spcBef>
+                <a:spcPct val="0"/>
+              </a:spcBef>
+              <a:spcAft>
+                <a:spcPct val="0"/>
+              </a:spcAft>
+              <a:buFont typeface="Arial" panose="020B0604020202020204" pitchFamily="34" charset="0"/>
+              <a:buChar char="•"/>
+            </a:pPr>
+            <a:r>
+              <a:rPr lang="en-IL" altLang="en-IL" sz="2499" spc="-137" dirty="0">
+                <a:solidFill>
+                  <a:srgbClr val="FFFFFF"/>
+                </a:solidFill>
+                <a:latin typeface="Work Sans"/>
+              </a:rPr>
+              <a:t>D1 drifts over time — it shifts as cards age, fragmenting groups </a:t>
+            </a:r>
+          </a:p>
+          <a:p>
+            <a:pPr marL="342900" lvl="0" indent="-342900" eaLnBrk="0" fontAlgn="base" hangingPunct="0">
+              <a:spcBef>
+                <a:spcPct val="0"/>
+              </a:spcBef>
+              <a:spcAft>
+                <a:spcPct val="0"/>
+              </a:spcAft>
+              <a:buFont typeface="Arial" panose="020B0604020202020204" pitchFamily="34" charset="0"/>
+              <a:buChar char="•"/>
+            </a:pPr>
+            <a:r>
+              <a:rPr lang="en-IL" altLang="en-IL" sz="2499" spc="-137" dirty="0">
+                <a:solidFill>
+                  <a:srgbClr val="FFFFFF"/>
+                </a:solidFill>
+                <a:latin typeface="Work Sans"/>
+              </a:rPr>
+              <a:t>Adding D1 multiplies group count, leaving most groups with a single transaction (no history to aggregate) </a:t>
+            </a:r>
+            <a:endParaRPr lang="en-US" sz="2499" spc="-137" dirty="0">
+              <a:solidFill>
+                <a:srgbClr val="FFFFFF"/>
+              </a:solidFill>
+              <a:latin typeface="Work Sans"/>
+              <a:sym typeface="Work Sans"/>
+            </a:endParaRPr>
+          </a:p>
+          <a:p>
+            <a:pPr algn="l">
+              <a:lnSpc>
+                <a:spcPts val="3249"/>
+              </a:lnSpc>
+            </a:pPr>
+            <a:endParaRPr lang="en-US" sz="2499" spc="-137" dirty="0">
               <a:solidFill>
                 <a:srgbClr val="FFFFFF"/>
               </a:solidFill>
@@ -12594,79 +12737,6 @@
               <a:cs typeface="Work Sans"/>
               <a:sym typeface="Work Sans"/>
             </a:endParaRPr>
-          </a:p>
-          <a:p>
-            <a:pPr algn="l">
-              <a:lnSpc>
-                <a:spcPts val="3249"/>
-              </a:lnSpc>
-            </a:pPr>
-            <a:r>
-              <a:rPr lang="en-US" sz="2499" b="1" spc="-137">
-                <a:solidFill>
-                  <a:srgbClr val="FFFFFF"/>
-                </a:solidFill>
-                <a:latin typeface="Work Sans Bold"/>
-                <a:ea typeface="Work Sans Bold"/>
-                <a:cs typeface="Work Sans Bold"/>
-                <a:sym typeface="Work Sans Bold"/>
-              </a:rPr>
-              <a:t>Why not D1?</a:t>
-            </a:r>
-            <a:r>
-              <a:rPr lang="en-US" sz="2499" spc="-137">
-                <a:solidFill>
-                  <a:srgbClr val="FFFFFF"/>
-                </a:solidFill>
-                <a:latin typeface="Work Sans"/>
-                <a:ea typeface="Work Sans"/>
-                <a:cs typeface="Work Sans"/>
-                <a:sym typeface="Work Sans"/>
-              </a:rPr>
-              <a:t> (used by many Kaggle solutions) </a:t>
-            </a:r>
-          </a:p>
-          <a:p>
-            <a:pPr marL="539749" lvl="1" indent="-269875" algn="l">
-              <a:lnSpc>
-                <a:spcPts val="3249"/>
-              </a:lnSpc>
-              <a:buFont typeface="Arial"/>
-              <a:buChar char="•"/>
-            </a:pPr>
-            <a:r>
-              <a:rPr lang="en-US" sz="2499" spc="-137">
-                <a:solidFill>
-                  <a:srgbClr val="FFFFFF"/>
-                </a:solidFill>
-                <a:latin typeface="Work Sans"/>
-                <a:ea typeface="Work Sans"/>
-                <a:cs typeface="Work Sans"/>
-                <a:sym typeface="Work Sans"/>
-              </a:rPr>
-              <a:t>D1 drifts over time — it shifts as cards age, fragmenting groups </a:t>
-            </a:r>
-          </a:p>
-          <a:p>
-            <a:pPr marL="539749" lvl="1" indent="-269875" algn="l">
-              <a:lnSpc>
-                <a:spcPts val="3249"/>
-              </a:lnSpc>
-              <a:buFont typeface="Arial"/>
-              <a:buChar char="•"/>
-            </a:pPr>
-            <a:r>
-              <a:rPr lang="en-US" sz="2499" spc="-137">
-                <a:solidFill>
-                  <a:srgbClr val="FFFFFF"/>
-                </a:solidFill>
-                <a:latin typeface="Work Sans"/>
-                <a:ea typeface="Work Sans"/>
-                <a:cs typeface="Work Sans"/>
-                <a:sym typeface="Work Sans"/>
-              </a:rPr>
-              <a:t>Adding D1 multiplies group count, leaving most groups with a single transaction (no history to aggregate)</a:t>
-            </a:r>
           </a:p>
         </p:txBody>
       </p:sp>
@@ -12678,7 +12748,7 @@
         </p:nvSpPr>
         <p:spPr>
           <a:xfrm>
-            <a:off x="9753440" y="3564488"/>
+            <a:off x="9729728" y="3386319"/>
             <a:ext cx="7990119" cy="6140450"/>
           </a:xfrm>
           <a:prstGeom prst="rect">
@@ -12697,7 +12767,7 @@
               </a:lnSpc>
             </a:pPr>
             <a:r>
-              <a:rPr lang="en-US" sz="2499" b="1" spc="-137">
+              <a:rPr lang="en-US" sz="2499" b="1" spc="-137" dirty="0">
                 <a:solidFill>
                   <a:srgbClr val="38B6FF"/>
                 </a:solidFill>
@@ -12718,7 +12788,7 @@
               <a:buChar char="•"/>
             </a:pPr>
             <a:r>
-              <a:rPr lang="en-US" sz="2499" i="1" spc="-137">
+              <a:rPr lang="en-US" sz="2499" i="1" spc="-137" dirty="0">
                 <a:solidFill>
                   <a:srgbClr val="FFFFFF"/>
                 </a:solidFill>
@@ -12730,7 +12800,7 @@
               <a:t>Aggregation features - </a:t>
             </a:r>
             <a:r>
-              <a:rPr lang="en-US" sz="2499" spc="-137">
+              <a:rPr lang="en-US" sz="2499" spc="-137" dirty="0">
                 <a:solidFill>
                   <a:srgbClr val="FFFFFF"/>
                 </a:solidFill>
@@ -12751,7 +12821,7 @@
               <a:buChar char="•"/>
             </a:pPr>
             <a:r>
-              <a:rPr lang="en-US" sz="2499" i="1" spc="-137">
+              <a:rPr lang="en-US" sz="2499" i="1" spc="-137" dirty="0">
                 <a:solidFill>
                   <a:srgbClr val="FFFFFF"/>
                 </a:solidFill>
@@ -12763,7 +12833,7 @@
               <a:t>Behavioral fingerprint -</a:t>
             </a:r>
             <a:r>
-              <a:rPr lang="en-US" sz="2499" spc="-137">
+              <a:rPr lang="en-US" sz="2499" spc="-137" dirty="0">
                 <a:solidFill>
                   <a:srgbClr val="FFFFFF"/>
                 </a:solidFill>
@@ -12784,7 +12854,7 @@
               <a:buChar char="•"/>
             </a:pPr>
             <a:r>
-              <a:rPr lang="en-US" sz="2499" i="1" spc="-137">
+              <a:rPr lang="en-US" sz="2499" i="1" spc="-137" dirty="0">
                 <a:solidFill>
                   <a:srgbClr val="FFFFFF"/>
                 </a:solidFill>
@@ -12796,7 +12866,7 @@
               <a:t>Product/service profile</a:t>
             </a:r>
             <a:r>
-              <a:rPr lang="en-US" sz="2499" spc="-137">
+              <a:rPr lang="en-US" sz="2499" spc="-137" dirty="0">
                 <a:solidFill>
                   <a:srgbClr val="FFFFFF"/>
                 </a:solidFill>
@@ -12814,7 +12884,7 @@
                 <a:spcPts val="3249"/>
               </a:lnSpc>
             </a:pPr>
-            <a:endParaRPr lang="en-US" sz="2499" spc="-137">
+            <a:endParaRPr lang="en-US" sz="2499" spc="-137" dirty="0">
               <a:solidFill>
                 <a:srgbClr val="FFFFFF"/>
               </a:solidFill>
@@ -12831,7 +12901,7 @@
               </a:lnSpc>
             </a:pPr>
             <a:r>
-              <a:rPr lang="en-US" sz="2499" b="1" spc="-137">
+              <a:rPr lang="en-US" sz="2499" b="1" spc="-137" dirty="0">
                 <a:solidFill>
                   <a:srgbClr val="38B6FF"/>
                 </a:solidFill>
@@ -12852,7 +12922,7 @@
               <a:buChar char="•"/>
             </a:pPr>
             <a:r>
-              <a:rPr lang="en-US" sz="2499" spc="-137">
+              <a:rPr lang="en-US" sz="2499" spc="-137" dirty="0">
                 <a:solidFill>
                   <a:srgbClr val="FFFFFF"/>
                 </a:solidFill>
@@ -12871,7 +12941,7 @@
               </a:lnSpc>
             </a:pPr>
             <a:r>
-              <a:rPr lang="en-US" sz="2499" spc="-137">
+              <a:rPr lang="en-US" sz="2499" spc="-137" dirty="0">
                 <a:solidFill>
                   <a:srgbClr val="FFFFFF"/>
                 </a:solidFill>
@@ -12892,7 +12962,7 @@
               <a:buChar char="•"/>
             </a:pPr>
             <a:r>
-              <a:rPr lang="en-US" sz="2499" spc="-137">
+              <a:rPr lang="en-US" sz="2499" spc="-137" dirty="0">
                 <a:solidFill>
                   <a:srgbClr val="FFFFFF"/>
                 </a:solidFill>
@@ -12910,7 +12980,7 @@
                 <a:spcPts val="3249"/>
               </a:lnSpc>
             </a:pPr>
-            <a:endParaRPr lang="en-US" sz="2499" spc="-137">
+            <a:endParaRPr lang="en-US" sz="2499" spc="-137" dirty="0">
               <a:solidFill>
                 <a:srgbClr val="FFFFFF"/>
               </a:solidFill>
@@ -13052,6 +13122,13 @@
               <a:srgbClr val="103760"/>
             </a:solidFill>
           </p:spPr>
+          <p:txBody>
+            <a:bodyPr/>
+            <a:lstStyle/>
+            <a:p>
+              <a:endParaRPr lang="en-IL"/>
+            </a:p>
+          </p:txBody>
         </p:sp>
       </p:grpSp>
       <p:sp>
@@ -13099,6 +13176,13 @@
             </a:stretch>
           </a:blipFill>
         </p:spPr>
+        <p:txBody>
+          <a:bodyPr/>
+          <a:lstStyle/>
+          <a:p>
+            <a:endParaRPr lang="en-IL"/>
+          </a:p>
+        </p:txBody>
       </p:sp>
       <p:sp>
         <p:nvSpPr>
@@ -13175,7 +13259,7 @@
         <p:spPr>
           <a:xfrm>
             <a:off x="498324" y="3230991"/>
-            <a:ext cx="8027439" cy="4911725"/>
+            <a:ext cx="8027439" cy="4491166"/>
           </a:xfrm>
           <a:prstGeom prst="rect">
             <a:avLst/>
@@ -13193,7 +13277,7 @@
               </a:lnSpc>
             </a:pPr>
             <a:r>
-              <a:rPr lang="en-US" sz="2499" b="1" spc="-137">
+              <a:rPr lang="en-US" sz="2499" b="1" spc="-137" dirty="0">
                 <a:solidFill>
                   <a:srgbClr val="38B6FF"/>
                 </a:solidFill>
@@ -13205,7 +13289,7 @@
               <a:t>Aggregation Features</a:t>
             </a:r>
             <a:r>
-              <a:rPr lang="en-US" sz="2499" spc="-137">
+              <a:rPr lang="en-US" sz="2499" spc="-137" dirty="0">
                 <a:solidFill>
                   <a:srgbClr val="FFFFFF"/>
                 </a:solidFill>
@@ -13217,7 +13301,7 @@
               <a:t> </a:t>
             </a:r>
             <a:r>
-              <a:rPr lang="en-US" sz="2499" b="1" spc="-137">
+              <a:rPr lang="en-US" sz="2499" b="1" spc="-137" dirty="0">
                 <a:solidFill>
                   <a:srgbClr val="FFFFFF"/>
                 </a:solidFill>
@@ -13238,7 +13322,7 @@
               <a:buChar char="•"/>
             </a:pPr>
             <a:r>
-              <a:rPr lang="en-US" sz="2499" i="1" spc="-137">
+              <a:rPr lang="en-US" sz="2499" i="1" spc="-137" dirty="0" err="1">
                 <a:solidFill>
                   <a:srgbClr val="FFFFFF"/>
                 </a:solidFill>
@@ -13247,52 +13331,10 @@
                 <a:cs typeface="Work Sans Italics"/>
                 <a:sym typeface="Work Sans Italics"/>
               </a:rPr>
-              <a:t>tx_amt_mean/std/min/max:</a:t>
-            </a:r>
-            <a:r>
-              <a:rPr lang="en-US" sz="2499" spc="-137">
-                <a:solidFill>
-                  <a:srgbClr val="FFFFFF"/>
-                </a:solidFill>
-                <a:latin typeface="Work Sans"/>
-                <a:ea typeface="Work Sans"/>
-                <a:cs typeface="Work Sans"/>
-                <a:sym typeface="Work Sans"/>
-              </a:rPr>
-              <a:t> </a:t>
-            </a:r>
-          </a:p>
-          <a:p>
-            <a:pPr marL="1079499" lvl="2" indent="-359833" algn="l">
-              <a:lnSpc>
-                <a:spcPts val="3249"/>
-              </a:lnSpc>
-              <a:buFont typeface="Arial"/>
-              <a:buChar char="⚬"/>
-            </a:pPr>
-            <a:r>
-              <a:rPr lang="en-US" sz="2499" spc="-137">
-                <a:solidFill>
-                  <a:srgbClr val="FFFFFF"/>
-                </a:solidFill>
-                <a:latin typeface="Work Sans"/>
-                <a:ea typeface="Work Sans"/>
-                <a:cs typeface="Work Sans"/>
-                <a:sym typeface="Work Sans"/>
-              </a:rPr>
-              <a:t>inconsistent amounts → card testing or abuse</a:t>
-            </a:r>
-          </a:p>
-          <a:p>
-            <a:pPr marL="539749" lvl="1" indent="-269875" algn="l">
-              <a:lnSpc>
-                <a:spcPts val="3249"/>
-              </a:lnSpc>
-              <a:buFont typeface="Arial"/>
-              <a:buChar char="•"/>
-            </a:pPr>
-            <a:r>
-              <a:rPr lang="en-US" sz="2499" i="1" spc="-137">
+              <a:t>tx_amt_mean</a:t>
+            </a:r>
+            <a:r>
+              <a:rPr lang="en-US" sz="2499" i="1" spc="-137" dirty="0">
                 <a:solidFill>
                   <a:srgbClr val="FFFFFF"/>
                 </a:solidFill>
@@ -13301,10 +13343,10 @@
                 <a:cs typeface="Work Sans Italics"/>
                 <a:sym typeface="Work Sans Italics"/>
               </a:rPr>
-              <a:t>tx_amt_ratio:</a:t>
-            </a:r>
-            <a:r>
-              <a:rPr lang="en-US" sz="2499" spc="-137">
+              <a:t>/std/min/max:</a:t>
+            </a:r>
+            <a:r>
+              <a:rPr lang="en-US" sz="2499" spc="-137" dirty="0">
                 <a:solidFill>
                   <a:srgbClr val="FFFFFF"/>
                 </a:solidFill>
@@ -13313,28 +13355,7 @@
                 <a:cs typeface="Work Sans"/>
                 <a:sym typeface="Work Sans"/>
               </a:rPr>
-              <a:t> </a:t>
-            </a:r>
-          </a:p>
-          <a:p>
-            <a:pPr marL="1079499" lvl="2" indent="-359833" algn="l">
-              <a:lnSpc>
-                <a:spcPts val="3249"/>
-              </a:lnSpc>
-              <a:buFont typeface="Arial"/>
-              <a:buChar char="⚬"/>
-            </a:pPr>
-            <a:r>
-              <a:rPr lang="en-US" sz="2499" spc="-137">
-                <a:solidFill>
-                  <a:srgbClr val="FFFFFF"/>
-                </a:solidFill>
-                <a:latin typeface="Work Sans"/>
-                <a:ea typeface="Work Sans"/>
-                <a:cs typeface="Work Sans"/>
-                <a:sym typeface="Work Sans"/>
-              </a:rPr>
-              <a:t>current amount &gt;&gt; card's typical → anomaly</a:t>
+              <a:t> inconsistent amounts → card testing or abuse</a:t>
             </a:r>
           </a:p>
           <a:p>
@@ -13346,7 +13367,7 @@
               <a:buChar char="•"/>
             </a:pPr>
             <a:r>
-              <a:rPr lang="en-US" sz="2499" i="1" spc="-137">
+              <a:rPr lang="en-US" sz="2499" i="1" spc="-137" dirty="0" err="1">
                 <a:solidFill>
                   <a:srgbClr val="FFFFFF"/>
                 </a:solidFill>
@@ -13355,52 +13376,10 @@
                 <a:cs typeface="Work Sans Italics"/>
                 <a:sym typeface="Work Sans Italics"/>
               </a:rPr>
-              <a:t>time_since_last_tx:</a:t>
-            </a:r>
-            <a:r>
-              <a:rPr lang="en-US" sz="2499" spc="-137">
-                <a:solidFill>
-                  <a:srgbClr val="FFFFFF"/>
-                </a:solidFill>
-                <a:latin typeface="Work Sans"/>
-                <a:ea typeface="Work Sans"/>
-                <a:cs typeface="Work Sans"/>
-                <a:sym typeface="Work Sans"/>
-              </a:rPr>
-              <a:t> </a:t>
-            </a:r>
-          </a:p>
-          <a:p>
-            <a:pPr marL="1079499" lvl="2" indent="-359833" algn="l">
-              <a:lnSpc>
-                <a:spcPts val="3249"/>
-              </a:lnSpc>
-              <a:buFont typeface="Arial"/>
-              <a:buChar char="⚬"/>
-            </a:pPr>
-            <a:r>
-              <a:rPr lang="en-US" sz="2499" spc="-137">
-                <a:solidFill>
-                  <a:srgbClr val="FFFFFF"/>
-                </a:solidFill>
-                <a:latin typeface="Work Sans"/>
-                <a:ea typeface="Work Sans"/>
-                <a:cs typeface="Work Sans"/>
-                <a:sym typeface="Work Sans"/>
-              </a:rPr>
-              <a:t>long silence then burst → dormant card activated</a:t>
-            </a:r>
-          </a:p>
-          <a:p>
-            <a:pPr marL="539749" lvl="1" indent="-269875" algn="l">
-              <a:lnSpc>
-                <a:spcPts val="3249"/>
-              </a:lnSpc>
-              <a:buFont typeface="Arial"/>
-              <a:buChar char="•"/>
-            </a:pPr>
-            <a:r>
-              <a:rPr lang="en-US" sz="2499" i="1" spc="-137">
+              <a:t>tx_amt_ratio</a:t>
+            </a:r>
+            <a:r>
+              <a:rPr lang="en-US" sz="2499" i="1" spc="-137" dirty="0">
                 <a:solidFill>
                   <a:srgbClr val="FFFFFF"/>
                 </a:solidFill>
@@ -13409,10 +13388,10 @@
                 <a:cs typeface="Work Sans Italics"/>
                 <a:sym typeface="Work Sans Italics"/>
               </a:rPr>
-              <a:t>delta_amt:</a:t>
-            </a:r>
-            <a:r>
-              <a:rPr lang="en-US" sz="2499" spc="-137">
+              <a:t>:</a:t>
+            </a:r>
+            <a:r>
+              <a:rPr lang="en-US" sz="2499" spc="-137" dirty="0">
                 <a:solidFill>
                   <a:srgbClr val="FFFFFF"/>
                 </a:solidFill>
@@ -13421,28 +13400,7 @@
                 <a:cs typeface="Work Sans"/>
                 <a:sym typeface="Work Sans"/>
               </a:rPr>
-              <a:t> </a:t>
-            </a:r>
-          </a:p>
-          <a:p>
-            <a:pPr marL="1079499" lvl="2" indent="-359833" algn="l">
-              <a:lnSpc>
-                <a:spcPts val="3249"/>
-              </a:lnSpc>
-              <a:buFont typeface="Arial"/>
-              <a:buChar char="⚬"/>
-            </a:pPr>
-            <a:r>
-              <a:rPr lang="en-US" sz="2499" spc="-137">
-                <a:solidFill>
-                  <a:srgbClr val="FFFFFF"/>
-                </a:solidFill>
-                <a:latin typeface="Work Sans"/>
-                <a:ea typeface="Work Sans"/>
-                <a:cs typeface="Work Sans"/>
-                <a:sym typeface="Work Sans"/>
-              </a:rPr>
-              <a:t>large jump between consecutive transactions</a:t>
+              <a:t> current amount &gt;&gt; card's typical → anomaly</a:t>
             </a:r>
           </a:p>
           <a:p>
@@ -13454,7 +13412,7 @@
               <a:buChar char="•"/>
             </a:pPr>
             <a:r>
-              <a:rPr lang="en-US" sz="2499" i="1" spc="-137">
+              <a:rPr lang="en-US" sz="2499" i="1" spc="-137" dirty="0" err="1">
                 <a:solidFill>
                   <a:srgbClr val="FFFFFF"/>
                 </a:solidFill>
@@ -13463,10 +13421,22 @@
                 <a:cs typeface="Work Sans Italics"/>
                 <a:sym typeface="Work Sans Italics"/>
               </a:rPr>
-              <a:t>tx_count / tx_count_last_30d:</a:t>
-            </a:r>
-            <a:r>
-              <a:rPr lang="en-US" sz="2499" spc="-137">
+              <a:t>time_since_last_tx</a:t>
+            </a:r>
+            <a:r>
+              <a:rPr lang="en-US" sz="2499" i="1" spc="-137" dirty="0">
+                <a:solidFill>
+                  <a:srgbClr val="FFFFFF"/>
+                </a:solidFill>
+                <a:latin typeface="Work Sans Italics"/>
+                <a:ea typeface="Work Sans Italics"/>
+                <a:cs typeface="Work Sans Italics"/>
+                <a:sym typeface="Work Sans Italics"/>
+              </a:rPr>
+              <a:t>:</a:t>
+            </a:r>
+            <a:r>
+              <a:rPr lang="en-US" sz="2499" spc="-137" dirty="0">
                 <a:solidFill>
                   <a:srgbClr val="FFFFFF"/>
                 </a:solidFill>
@@ -13475,19 +13445,43 @@
                 <a:cs typeface="Work Sans"/>
                 <a:sym typeface="Work Sans"/>
               </a:rPr>
-              <a:t> </a:t>
-            </a:r>
-          </a:p>
-          <a:p>
-            <a:pPr marL="1079499" lvl="2" indent="-359833" algn="l">
+              <a:t> long silence then burst → dormant card activated</a:t>
+            </a:r>
+          </a:p>
+          <a:p>
+            <a:pPr marL="539749" lvl="1" indent="-269875" algn="l">
               <a:lnSpc>
                 <a:spcPts val="3249"/>
               </a:lnSpc>
               <a:buFont typeface="Arial"/>
-              <a:buChar char="⚬"/>
-            </a:pPr>
-            <a:r>
-              <a:rPr lang="en-US" sz="2499" spc="-137">
+              <a:buChar char="•"/>
+            </a:pPr>
+            <a:r>
+              <a:rPr lang="en-US" sz="2499" i="1" spc="-137" dirty="0" err="1">
+                <a:solidFill>
+                  <a:srgbClr val="FFFFFF"/>
+                </a:solidFill>
+                <a:latin typeface="Work Sans Italics"/>
+                <a:ea typeface="Work Sans Italics"/>
+                <a:cs typeface="Work Sans Italics"/>
+                <a:sym typeface="Work Sans Italics"/>
+              </a:rPr>
+              <a:t>delta_amt</a:t>
+            </a:r>
+            <a:r>
+              <a:rPr lang="en-US" sz="2499" i="1" spc="-137" dirty="0">
+                <a:solidFill>
+                  <a:srgbClr val="FFFFFF"/>
+                </a:solidFill>
+                <a:latin typeface="Work Sans Italics"/>
+                <a:ea typeface="Work Sans Italics"/>
+                <a:cs typeface="Work Sans Italics"/>
+                <a:sym typeface="Work Sans Italics"/>
+              </a:rPr>
+              <a:t>:</a:t>
+            </a:r>
+            <a:r>
+              <a:rPr lang="en-US" sz="2499" spc="-137" dirty="0">
                 <a:solidFill>
                   <a:srgbClr val="FFFFFF"/>
                 </a:solidFill>
@@ -13496,7 +13490,52 @@
                 <a:cs typeface="Work Sans"/>
                 <a:sym typeface="Work Sans"/>
               </a:rPr>
-              <a:t>sudden high-volume activity → card just compromised</a:t>
+              <a:t> large jump between consecutive transactions</a:t>
+            </a:r>
+          </a:p>
+          <a:p>
+            <a:pPr marL="539749" lvl="1" indent="-269875" algn="l">
+              <a:lnSpc>
+                <a:spcPts val="3249"/>
+              </a:lnSpc>
+              <a:buFont typeface="Arial"/>
+              <a:buChar char="•"/>
+            </a:pPr>
+            <a:r>
+              <a:rPr lang="en-US" sz="2499" i="1" spc="-137" dirty="0" err="1">
+                <a:solidFill>
+                  <a:srgbClr val="FFFFFF"/>
+                </a:solidFill>
+                <a:latin typeface="Work Sans Italics"/>
+                <a:ea typeface="Work Sans Italics"/>
+                <a:cs typeface="Work Sans Italics"/>
+                <a:sym typeface="Work Sans Italics"/>
+              </a:rPr>
+              <a:t>tx_count</a:t>
+            </a:r>
+            <a:r>
+              <a:rPr lang="en-US" sz="2499" i="1" spc="-137" dirty="0">
+                <a:solidFill>
+                  <a:srgbClr val="FFFFFF"/>
+                </a:solidFill>
+                <a:latin typeface="Work Sans Italics"/>
+                <a:ea typeface="Work Sans Italics"/>
+                <a:cs typeface="Work Sans Italics"/>
+                <a:sym typeface="Work Sans Italics"/>
+              </a:rPr>
+              <a:t> / tx_count_last_30d:</a:t>
+            </a:r>
+            <a:r>
+              <a:rPr lang="en-US" sz="2499" spc="-137" dirty="0">
+                <a:solidFill>
+                  <a:srgbClr val="FFFFFF"/>
+                </a:solidFill>
+                <a:latin typeface="Work Sans"/>
+                <a:ea typeface="Work Sans"/>
+                <a:cs typeface="Work Sans"/>
+                <a:sym typeface="Work Sans"/>
+              </a:rPr>
+              <a:t> sudden high-volume activity → card just compromised</a:t>
             </a:r>
           </a:p>
         </p:txBody>
@@ -13510,7 +13549,7 @@
         <p:spPr>
           <a:xfrm>
             <a:off x="9823524" y="3138443"/>
-            <a:ext cx="7841158" cy="4502150"/>
+            <a:ext cx="7841158" cy="4080797"/>
           </a:xfrm>
           <a:prstGeom prst="rect">
             <a:avLst/>
@@ -13531,7 +13570,7 @@
               </a:spcBef>
             </a:pPr>
             <a:r>
-              <a:rPr lang="en-US" sz="2499" b="1" u="none" strike="noStrike" spc="-137">
+              <a:rPr lang="en-US" sz="2499" b="1" u="none" strike="noStrike" spc="-137" dirty="0">
                 <a:solidFill>
                   <a:srgbClr val="38B6FF"/>
                 </a:solidFill>
@@ -13543,7 +13582,7 @@
               <a:t>Behavioral Fingerprint </a:t>
             </a:r>
             <a:r>
-              <a:rPr lang="en-US" sz="2499" b="1" u="none" strike="noStrike" spc="-137">
+              <a:rPr lang="en-US" sz="2499" b="1" u="none" strike="noStrike" spc="-137" dirty="0">
                 <a:solidFill>
                   <a:srgbClr val="FFFFFF"/>
                 </a:solidFill>
@@ -13567,7 +13606,7 @@
               <a:buChar char="•"/>
             </a:pPr>
             <a:r>
-              <a:rPr lang="en-US" sz="2499" i="1" u="none" strike="noStrike" spc="-137">
+              <a:rPr lang="en-US" sz="2499" i="1" u="none" strike="noStrike" spc="-137" dirty="0" err="1">
                 <a:solidFill>
                   <a:srgbClr val="FFFFFF"/>
                 </a:solidFill>
@@ -13576,22 +13615,22 @@
                 <a:cs typeface="Work Sans Italics"/>
                 <a:sym typeface="Work Sans Italics"/>
               </a:rPr>
-              <a:t>hour_vs_typical:</a:t>
-            </a:r>
-          </a:p>
-          <a:p>
-            <a:pPr marL="1079499" lvl="2" indent="-359833" algn="l">
-              <a:lnSpc>
-                <a:spcPts val="3249"/>
-              </a:lnSpc>
-              <a:spcBef>
-                <a:spcPct val="0"/>
-              </a:spcBef>
-              <a:buFont typeface="Arial"/>
-              <a:buChar char="⚬"/>
-            </a:pPr>
-            <a:r>
-              <a:rPr lang="en-US" sz="2499" u="none" strike="noStrike" spc="-137">
+              <a:t>hour_vs_typical</a:t>
+            </a:r>
+            <a:r>
+              <a:rPr lang="en-US" sz="2499" i="1" u="none" strike="noStrike" spc="-137" dirty="0">
+                <a:solidFill>
+                  <a:srgbClr val="FFFFFF"/>
+                </a:solidFill>
+                <a:latin typeface="Work Sans Italics"/>
+                <a:ea typeface="Work Sans Italics"/>
+                <a:cs typeface="Work Sans Italics"/>
+                <a:sym typeface="Work Sans Italics"/>
+              </a:rPr>
+              <a:t>: </a:t>
+            </a:r>
+            <a:r>
+              <a:rPr lang="en-US" sz="2499" u="none" strike="noStrike" spc="-137" dirty="0">
                 <a:solidFill>
                   <a:srgbClr val="FFFFFF"/>
                 </a:solidFill>
@@ -13615,7 +13654,7 @@
               <a:buChar char="•"/>
             </a:pPr>
             <a:r>
-              <a:rPr lang="en-US" sz="2499" i="1" u="none" strike="noStrike" spc="-137">
+              <a:rPr lang="en-US" sz="2499" i="1" u="none" strike="noStrike" spc="-137" dirty="0" err="1">
                 <a:solidFill>
                   <a:srgbClr val="FFFFFF"/>
                 </a:solidFill>
@@ -13624,22 +13663,22 @@
                 <a:cs typeface="Work Sans Italics"/>
                 <a:sym typeface="Work Sans Italics"/>
               </a:rPr>
-              <a:t>uid_time_entropy:</a:t>
-            </a:r>
-          </a:p>
-          <a:p>
-            <a:pPr marL="1079499" lvl="2" indent="-359833" algn="l">
-              <a:lnSpc>
-                <a:spcPts val="3249"/>
-              </a:lnSpc>
-              <a:spcBef>
-                <a:spcPct val="0"/>
-              </a:spcBef>
-              <a:buFont typeface="Arial"/>
-              <a:buChar char="⚬"/>
-            </a:pPr>
-            <a:r>
-              <a:rPr lang="en-US" sz="2499" u="none" strike="noStrike" spc="-137">
+              <a:t>uid_time_entropy</a:t>
+            </a:r>
+            <a:r>
+              <a:rPr lang="en-US" sz="2499" i="1" u="none" strike="noStrike" spc="-137" dirty="0">
+                <a:solidFill>
+                  <a:srgbClr val="FFFFFF"/>
+                </a:solidFill>
+                <a:latin typeface="Work Sans Italics"/>
+                <a:ea typeface="Work Sans Italics"/>
+                <a:cs typeface="Work Sans Italics"/>
+                <a:sym typeface="Work Sans Italics"/>
+              </a:rPr>
+              <a:t>: </a:t>
+            </a:r>
+            <a:r>
+              <a:rPr lang="en-US" sz="2499" u="none" strike="noStrike" spc="-137" dirty="0">
                 <a:solidFill>
                   <a:srgbClr val="FFFFFF"/>
                 </a:solidFill>
@@ -13663,7 +13702,7 @@
               <a:buChar char="•"/>
             </a:pPr>
             <a:r>
-              <a:rPr lang="en-US" sz="2499" i="1" u="none" strike="noStrike" spc="-137">
+              <a:rPr lang="en-US" sz="2499" i="1" u="none" strike="noStrike" spc="-137" dirty="0" err="1">
                 <a:solidFill>
                   <a:srgbClr val="FFFFFF"/>
                 </a:solidFill>
@@ -13672,22 +13711,22 @@
                 <a:cs typeface="Work Sans Italics"/>
                 <a:sym typeface="Work Sans Italics"/>
               </a:rPr>
-              <a:t>amt_vs_personal_median:</a:t>
-            </a:r>
-          </a:p>
-          <a:p>
-            <a:pPr marL="1079499" lvl="2" indent="-359833" algn="l">
-              <a:lnSpc>
-                <a:spcPts val="3249"/>
-              </a:lnSpc>
-              <a:spcBef>
-                <a:spcPct val="0"/>
-              </a:spcBef>
-              <a:buFont typeface="Arial"/>
-              <a:buChar char="⚬"/>
-            </a:pPr>
-            <a:r>
-              <a:rPr lang="en-US" sz="2499" u="none" strike="noStrike" spc="-137">
+              <a:t>amt_vs_personal_median</a:t>
+            </a:r>
+            <a:r>
+              <a:rPr lang="en-US" sz="2499" i="1" u="none" strike="noStrike" spc="-137" dirty="0">
+                <a:solidFill>
+                  <a:srgbClr val="FFFFFF"/>
+                </a:solidFill>
+                <a:latin typeface="Work Sans Italics"/>
+                <a:ea typeface="Work Sans Italics"/>
+                <a:cs typeface="Work Sans Italics"/>
+                <a:sym typeface="Work Sans Italics"/>
+              </a:rPr>
+              <a:t>: </a:t>
+            </a:r>
+            <a:r>
+              <a:rPr lang="en-US" sz="2499" u="none" strike="noStrike" spc="-137" dirty="0">
                 <a:solidFill>
                   <a:srgbClr val="FFFFFF"/>
                 </a:solidFill>
@@ -13711,7 +13750,7 @@
               <a:buChar char="•"/>
             </a:pPr>
             <a:r>
-              <a:rPr lang="en-US" sz="2499" i="1" u="none" strike="noStrike" spc="-137">
+              <a:rPr lang="en-US" sz="2499" i="1" u="none" strike="noStrike" spc="-137" dirty="0" err="1">
                 <a:solidFill>
                   <a:srgbClr val="FFFFFF"/>
                 </a:solidFill>
@@ -13720,22 +13759,22 @@
                 <a:cs typeface="Work Sans Italics"/>
                 <a:sym typeface="Work Sans Italics"/>
               </a:rPr>
-              <a:t>amt_z_score:</a:t>
-            </a:r>
-          </a:p>
-          <a:p>
-            <a:pPr marL="1079499" lvl="2" indent="-359833" algn="l">
-              <a:lnSpc>
-                <a:spcPts val="3249"/>
-              </a:lnSpc>
-              <a:spcBef>
-                <a:spcPct val="0"/>
-              </a:spcBef>
-              <a:buFont typeface="Arial"/>
-              <a:buChar char="⚬"/>
-            </a:pPr>
-            <a:r>
-              <a:rPr lang="en-US" sz="2499" u="none" strike="noStrike" spc="-137">
+              <a:t>amt_z_score</a:t>
+            </a:r>
+            <a:r>
+              <a:rPr lang="en-US" sz="2499" i="1" u="none" strike="noStrike" spc="-137" dirty="0">
+                <a:solidFill>
+                  <a:srgbClr val="FFFFFF"/>
+                </a:solidFill>
+                <a:latin typeface="Work Sans Italics"/>
+                <a:ea typeface="Work Sans Italics"/>
+                <a:cs typeface="Work Sans Italics"/>
+                <a:sym typeface="Work Sans Italics"/>
+              </a:rPr>
+              <a:t>: </a:t>
+            </a:r>
+            <a:r>
+              <a:rPr lang="en-US" sz="2499" u="none" strike="noStrike" spc="-137" dirty="0">
                 <a:solidFill>
                   <a:srgbClr val="FFFFFF"/>
                 </a:solidFill>
@@ -13757,8 +13796,8 @@
         </p:nvSpPr>
         <p:spPr>
           <a:xfrm>
-            <a:off x="9847123" y="8250193"/>
-            <a:ext cx="7817559" cy="1635076"/>
+            <a:off x="9762239" y="7658100"/>
+            <a:ext cx="7817559" cy="2064668"/>
           </a:xfrm>
           <a:prstGeom prst="rect">
             <a:avLst/>
@@ -13779,7 +13818,7 @@
               </a:spcBef>
             </a:pPr>
             <a:r>
-              <a:rPr lang="en-US" sz="2507" b="1" u="none" strike="noStrike" spc="-137">
+              <a:rPr lang="en-US" sz="2507" b="1" u="none" strike="noStrike" spc="-137" dirty="0">
                 <a:solidFill>
                   <a:srgbClr val="38B6FF"/>
                 </a:solidFill>
@@ -13791,7 +13830,7 @@
               <a:t>Product Profile </a:t>
             </a:r>
             <a:r>
-              <a:rPr lang="en-US" sz="2507" b="1" u="none" strike="noStrike" spc="-137">
+              <a:rPr lang="en-US" sz="2507" b="1" u="none" strike="noStrike" spc="-137" dirty="0">
                 <a:solidFill>
                   <a:srgbClr val="FFFFFF"/>
                 </a:solidFill>
@@ -13815,7 +13854,7 @@
               <a:buChar char="•"/>
             </a:pPr>
             <a:r>
-              <a:rPr lang="en-US" sz="2499" i="1" u="none" strike="noStrike" spc="-137">
+              <a:rPr lang="en-US" sz="2499" i="1" u="none" strike="noStrike" spc="-137" dirty="0" err="1">
                 <a:solidFill>
                   <a:srgbClr val="FFFFFF"/>
                 </a:solidFill>
@@ -13824,11 +13863,35 @@
                 <a:cs typeface="Work Sans Italics"/>
                 <a:sym typeface="Work Sans Italics"/>
               </a:rPr>
-              <a:t>is_new_product:</a:t>
-            </a:r>
-          </a:p>
-          <a:p>
-            <a:pPr marL="1079499" lvl="2" indent="-359833" algn="l">
+              <a:t>is_new_product</a:t>
+            </a:r>
+            <a:r>
+              <a:rPr lang="en-US" sz="2499" i="1" u="none" strike="noStrike" spc="-137" dirty="0">
+                <a:solidFill>
+                  <a:srgbClr val="FFFFFF"/>
+                </a:solidFill>
+                <a:latin typeface="Work Sans Italics"/>
+                <a:ea typeface="Work Sans Italics"/>
+                <a:cs typeface="Work Sans Italics"/>
+                <a:sym typeface="Work Sans Italics"/>
+              </a:rPr>
+              <a:t>: </a:t>
+            </a:r>
+            <a:r>
+              <a:rPr lang="en-US" sz="2499" u="none" strike="noStrike" spc="-137" dirty="0">
+                <a:solidFill>
+                  <a:srgbClr val="FFFFFF"/>
+                </a:solidFill>
+                <a:latin typeface="Work Sans"/>
+                <a:ea typeface="Work Sans"/>
+                <a:cs typeface="Work Sans"/>
+                <a:sym typeface="Work Sans"/>
+              </a:rPr>
+              <a:t>fraudster buys different product types than the legitimate card owner</a:t>
+            </a:r>
+          </a:p>
+          <a:p>
+            <a:pPr marL="622299" lvl="1" indent="-359833">
               <a:lnSpc>
                 <a:spcPts val="3249"/>
               </a:lnSpc>
@@ -13839,17 +13902,54 @@
               <a:buChar char="⚬"/>
             </a:pPr>
             <a:r>
-              <a:rPr lang="en-US" sz="2499" u="none" strike="noStrike" spc="-137">
-                <a:solidFill>
-                  <a:srgbClr val="FFFFFF"/>
-                </a:solidFill>
-                <a:latin typeface="Work Sans"/>
-                <a:ea typeface="Work Sans"/>
-                <a:cs typeface="Work Sans"/>
-                <a:sym typeface="Work Sans"/>
-              </a:rPr>
-              <a:t>fraudster buys different product types than the legitimate card owner</a:t>
-            </a:r>
+              <a:rPr lang="en-US" sz="2499" i="1" spc="-137" dirty="0" err="1">
+                <a:solidFill>
+                  <a:srgbClr val="FFFFFF"/>
+                </a:solidFill>
+                <a:latin typeface="Work Sans Italics"/>
+              </a:rPr>
+              <a:t>amt_vs_product_median</a:t>
+            </a:r>
+            <a:r>
+              <a:rPr lang="en-US" sz="2499" i="1" spc="-137" dirty="0">
+                <a:solidFill>
+                  <a:srgbClr val="FFFFFF"/>
+                </a:solidFill>
+                <a:latin typeface="Work Sans Italics"/>
+              </a:rPr>
+              <a:t>: </a:t>
+            </a:r>
+            <a:r>
+              <a:rPr lang="en-US" sz="2499" spc="-137" dirty="0">
+                <a:solidFill>
+                  <a:srgbClr val="FFFFFF"/>
+                </a:solidFill>
+                <a:latin typeface="Work Sans"/>
+              </a:rPr>
+              <a:t>current amount vs historical median for this </a:t>
+            </a:r>
+            <a:r>
+              <a:rPr lang="en-US" sz="2499" spc="-137" dirty="0" err="1">
+                <a:solidFill>
+                  <a:srgbClr val="FFFFFF"/>
+                </a:solidFill>
+                <a:latin typeface="Work Sans"/>
+              </a:rPr>
+              <a:t>ProductCD</a:t>
+            </a:r>
+            <a:r>
+              <a:rPr lang="en-US" sz="2800" dirty="0"/>
+              <a:t>	</a:t>
+            </a:r>
+            <a:endParaRPr lang="en-US" sz="2499" u="none" strike="noStrike" spc="-137" dirty="0">
+              <a:solidFill>
+                <a:srgbClr val="FFFFFF"/>
+              </a:solidFill>
+              <a:latin typeface="Work Sans"/>
+              <a:ea typeface="Work Sans"/>
+              <a:cs typeface="Work Sans"/>
+              <a:sym typeface="Work Sans"/>
+            </a:endParaRPr>
           </a:p>
         </p:txBody>
       </p:sp>
@@ -13861,7 +13961,7 @@
         </p:nvSpPr>
         <p:spPr>
           <a:xfrm>
-            <a:off x="512651" y="8564562"/>
+            <a:off x="498324" y="8297193"/>
             <a:ext cx="8631349" cy="1425575"/>
           </a:xfrm>
           <a:prstGeom prst="rect">
@@ -13882,7 +13982,7 @@
               <a:buChar char="•"/>
             </a:pPr>
             <a:r>
-              <a:rPr lang="en-US" sz="2500" b="1" spc="-137">
+              <a:rPr lang="en-US" sz="2500" b="1" spc="-137" dirty="0">
                 <a:solidFill>
                   <a:srgbClr val="FF751F"/>
                 </a:solidFill>
@@ -13903,7 +14003,7 @@
               <a:buChar char="•"/>
             </a:pPr>
             <a:r>
-              <a:rPr lang="en-US" sz="2500" b="1" spc="-137">
+              <a:rPr lang="en-US" sz="2500" b="1" spc="-137" dirty="0">
                 <a:solidFill>
                   <a:srgbClr val="FF751F"/>
                 </a:solidFill>
@@ -13924,7 +14024,7 @@
               <a:buChar char="•"/>
             </a:pPr>
             <a:r>
-              <a:rPr lang="en-US" sz="2500" b="1" spc="-137">
+              <a:rPr lang="en-US" sz="2500" b="1" spc="-137" dirty="0">
                 <a:solidFill>
                   <a:srgbClr val="FF751F"/>
                 </a:solidFill>
@@ -13936,7 +14036,7 @@
               <a:t>Every feature uses strictly </a:t>
             </a:r>
             <a:r>
-              <a:rPr lang="en-US" sz="2500" b="1" u="sng" spc="-137">
+              <a:rPr lang="en-US" sz="2500" b="1" u="sng" spc="-137" dirty="0">
                 <a:solidFill>
                   <a:srgbClr val="FF751F"/>
                 </a:solidFill>
@@ -13948,7 +14048,7 @@
               <a:t>prior </a:t>
             </a:r>
             <a:r>
-              <a:rPr lang="en-US" sz="2500" b="1" spc="-137">
+              <a:rPr lang="en-US" sz="2500" b="1" spc="-137" dirty="0">
                 <a:solidFill>
                   <a:srgbClr val="FF751F"/>
                 </a:solidFill>
@@ -14092,6 +14192,13 @@
               <a:srgbClr val="103760"/>
             </a:solidFill>
           </p:spPr>
+          <p:txBody>
+            <a:bodyPr/>
+            <a:lstStyle/>
+            <a:p>
+              <a:endParaRPr lang="en-IL"/>
+            </a:p>
+          </p:txBody>
         </p:sp>
       </p:grpSp>
       <p:sp>
@@ -14141,6 +14248,13 @@
             </a:stretch>
           </a:blipFill>
         </p:spPr>
+        <p:txBody>
+          <a:bodyPr/>
+          <a:lstStyle/>
+          <a:p>
+            <a:endParaRPr lang="en-IL"/>
+          </a:p>
+        </p:txBody>
       </p:sp>
       <p:sp>
         <p:nvSpPr>
@@ -14150,8 +14264,8 @@
         </p:nvSpPr>
         <p:spPr>
           <a:xfrm>
-            <a:off x="3992628" y="948283"/>
-            <a:ext cx="10474672" cy="930275"/>
+            <a:off x="4038600" y="659912"/>
+            <a:ext cx="10474672" cy="1795363"/>
           </a:xfrm>
           <a:prstGeom prst="rect">
             <a:avLst/>
@@ -14172,7 +14286,7 @@
               </a:spcBef>
             </a:pPr>
             <a:r>
-              <a:rPr lang="en-US" sz="6999" b="1" spc="-384">
+              <a:rPr lang="en-US" sz="6999" b="1" spc="-384" dirty="0">
                 <a:solidFill>
                   <a:srgbClr val="FFFFFF"/>
                 </a:solidFill>
@@ -14181,7 +14295,7 @@
                 <a:cs typeface="Work Sans Semi-Bold"/>
                 <a:sym typeface="Work Sans Semi-Bold"/>
               </a:rPr>
-              <a:t>Time-Based Train/Val Split</a:t>
+              <a:t>Time-Based Train/Val/Test  Split</a:t>
             </a:r>
           </a:p>
         </p:txBody>
@@ -14195,7 +14309,7 @@
         <p:spPr>
           <a:xfrm>
             <a:off x="785135" y="3527425"/>
-            <a:ext cx="14880956" cy="5730875"/>
+            <a:ext cx="14880956" cy="6132641"/>
           </a:xfrm>
           <a:prstGeom prst="rect">
             <a:avLst/>
@@ -14213,7 +14327,7 @@
               </a:lnSpc>
             </a:pPr>
             <a:r>
-              <a:rPr lang="en-US" sz="2499" spc="-137">
+              <a:rPr lang="en-US" sz="2499" spc="-137" dirty="0">
                 <a:solidFill>
                   <a:srgbClr val="FFFFFF"/>
                 </a:solidFill>
@@ -14232,7 +14346,7 @@
               </a:lnSpc>
             </a:pPr>
             <a:r>
-              <a:rPr lang="en-US" sz="2499" b="1" spc="-137">
+              <a:rPr lang="en-US" sz="2499" b="1" spc="-137" dirty="0">
                 <a:solidFill>
                   <a:srgbClr val="02A8E7"/>
                 </a:solidFill>
@@ -14253,7 +14367,7 @@
               <a:buChar char="•"/>
             </a:pPr>
             <a:r>
-              <a:rPr lang="en-US" sz="2499" spc="-137">
+              <a:rPr lang="en-US" sz="2499" spc="-137" dirty="0">
                 <a:solidFill>
                   <a:srgbClr val="FFFFFF"/>
                 </a:solidFill>
@@ -14262,7 +14376,7 @@
                 <a:cs typeface="Work Sans"/>
                 <a:sym typeface="Work Sans"/>
               </a:rPr>
-              <a:t>Train (80%): months 1–5</a:t>
+              <a:t>Train (60%): ~months 1–3</a:t>
             </a:r>
           </a:p>
           <a:p>
@@ -14274,7 +14388,7 @@
               <a:buChar char="•"/>
             </a:pPr>
             <a:r>
-              <a:rPr lang="en-US" sz="2499" spc="-137">
+              <a:rPr lang="en-US" sz="2499" spc="-137" dirty="0">
                 <a:solidFill>
                   <a:srgbClr val="FFFFFF"/>
                 </a:solidFill>
@@ -14283,7 +14397,28 @@
                 <a:cs typeface="Work Sans"/>
                 <a:sym typeface="Work Sans"/>
               </a:rPr>
-              <a:t>Validation (20%): month 6</a:t>
+              <a:t>Validation (20%): ~month 4</a:t>
+            </a:r>
+          </a:p>
+          <a:p>
+            <a:pPr marL="539749" lvl="1" indent="-269875">
+              <a:lnSpc>
+                <a:spcPts val="3249"/>
+              </a:lnSpc>
+              <a:buFont typeface="Arial"/>
+              <a:buChar char="•"/>
+            </a:pPr>
+            <a:r>
+              <a:rPr lang="en-US" sz="2499" spc="-137" dirty="0">
+                <a:solidFill>
+                  <a:srgbClr val="FFFFFF"/>
+                </a:solidFill>
+                <a:latin typeface="Work Sans"/>
+                <a:ea typeface="Work Sans"/>
+                <a:cs typeface="Work Sans"/>
+                <a:sym typeface="Work Sans"/>
+              </a:rPr>
+              <a:t>Frozen Test (20%): ~months 5-6</a:t>
             </a:r>
           </a:p>
           <a:p>
@@ -14292,7 +14427,7 @@
                 <a:spcPts val="3249"/>
               </a:lnSpc>
             </a:pPr>
-            <a:endParaRPr lang="en-US" sz="2499" spc="-137">
+            <a:endParaRPr lang="en-US" sz="2499" spc="-137" dirty="0">
               <a:solidFill>
                 <a:srgbClr val="FFFFFF"/>
               </a:solidFill>
@@ -14309,7 +14444,7 @@
               </a:lnSpc>
             </a:pPr>
             <a:r>
-              <a:rPr lang="en-US" sz="2499" b="1" u="sng" spc="-137">
+              <a:rPr lang="en-US" sz="2499" b="1" u="sng" spc="-137" dirty="0">
                 <a:solidFill>
                   <a:srgbClr val="FFFFFF"/>
                 </a:solidFill>
@@ -14328,7 +14463,7 @@
               </a:lnSpc>
             </a:pPr>
             <a:r>
-              <a:rPr lang="en-US" sz="2499" spc="-137">
+              <a:rPr lang="en-US" sz="2499" spc="-137" dirty="0">
                 <a:solidFill>
                   <a:srgbClr val="FFFFFF"/>
                 </a:solidFill>
@@ -14349,7 +14484,7 @@
               <a:buChar char="•"/>
             </a:pPr>
             <a:r>
-              <a:rPr lang="en-US" sz="2499" spc="-137">
+              <a:rPr lang="en-US" sz="2499" spc="-137" dirty="0">
                 <a:solidFill>
                   <a:srgbClr val="FFFFFF"/>
                 </a:solidFill>
@@ -14361,7 +14496,7 @@
               <a:t>future transactions </a:t>
             </a:r>
             <a:r>
-              <a:rPr lang="en-US" sz="2499" u="sng" spc="-137">
+              <a:rPr lang="en-US" sz="2499" u="sng" spc="-137" dirty="0">
                 <a:solidFill>
                   <a:srgbClr val="FFFFFF"/>
                 </a:solidFill>
@@ -14373,7 +14508,7 @@
               <a:t>leak </a:t>
             </a:r>
             <a:r>
-              <a:rPr lang="en-US" sz="2499" spc="-137">
+              <a:rPr lang="en-US" sz="2499" spc="-137" dirty="0">
                 <a:solidFill>
                   <a:srgbClr val="FFFFFF"/>
                 </a:solidFill>
@@ -14391,7 +14526,7 @@
                 <a:spcPts val="3249"/>
               </a:lnSpc>
             </a:pPr>
-            <a:endParaRPr lang="en-US" sz="2499" spc="-137">
+            <a:endParaRPr lang="en-US" sz="2499" spc="-137" dirty="0">
               <a:solidFill>
                 <a:srgbClr val="FFFFFF"/>
               </a:solidFill>
@@ -14408,7 +14543,7 @@
               </a:lnSpc>
             </a:pPr>
             <a:r>
-              <a:rPr lang="en-US" sz="2499" b="1" u="sng" spc="-137">
+              <a:rPr lang="en-US" sz="2499" b="1" u="sng" spc="-137" dirty="0">
                 <a:solidFill>
                   <a:srgbClr val="FFFFFF"/>
                 </a:solidFill>
@@ -14429,7 +14564,7 @@
               <a:buChar char="•"/>
             </a:pPr>
             <a:r>
-              <a:rPr lang="en-US" sz="2499" spc="-137">
+              <a:rPr lang="en-US" sz="2499" spc="-137" dirty="0" err="1">
                 <a:solidFill>
                   <a:srgbClr val="FFFFFF"/>
                 </a:solidFill>
@@ -14438,7 +14573,19 @@
                 <a:cs typeface="Work Sans"/>
                 <a:sym typeface="Work Sans"/>
               </a:rPr>
-              <a:t>val = future only → unbiased estimate of production performance</a:t>
+              <a:t>val</a:t>
+            </a:r>
+            <a:r>
+              <a:rPr lang="en-US" sz="2499" spc="-137" dirty="0">
+                <a:solidFill>
+                  <a:srgbClr val="FFFFFF"/>
+                </a:solidFill>
+                <a:latin typeface="Work Sans"/>
+                <a:ea typeface="Work Sans"/>
+                <a:cs typeface="Work Sans"/>
+                <a:sym typeface="Work Sans"/>
+              </a:rPr>
+              <a:t> = future only → unbiased estimate of production performance</a:t>
             </a:r>
           </a:p>
           <a:p>
@@ -14447,7 +14594,7 @@
                 <a:spcPts val="3249"/>
               </a:lnSpc>
             </a:pPr>
-            <a:endParaRPr lang="en-US" sz="2499" spc="-137">
+            <a:endParaRPr lang="en-US" sz="2499" spc="-137" dirty="0">
               <a:solidFill>
                 <a:srgbClr val="FFFFFF"/>
               </a:solidFill>
@@ -14464,7 +14611,7 @@
               </a:lnSpc>
             </a:pPr>
             <a:r>
-              <a:rPr lang="en-US" sz="2499" b="1" u="sng" spc="-137">
+              <a:rPr lang="en-US" sz="2499" b="1" u="sng" spc="-137" dirty="0">
                 <a:solidFill>
                   <a:srgbClr val="FFFFFF"/>
                 </a:solidFill>
@@ -14485,7 +14632,7 @@
               <a:buChar char="•"/>
             </a:pPr>
             <a:r>
-              <a:rPr lang="en-US" sz="2499" spc="-137">
+              <a:rPr lang="en-US" sz="2499" spc="-137" dirty="0">
                 <a:solidFill>
                   <a:srgbClr val="FFFFFF"/>
                 </a:solidFill>
@@ -14629,18 +14776,725 @@
               <a:srgbClr val="103760"/>
             </a:solidFill>
           </p:spPr>
+          <p:txBody>
+            <a:bodyPr/>
+            <a:lstStyle/>
+            <a:p>
+              <a:endParaRPr lang="en-IL"/>
+            </a:p>
+          </p:txBody>
         </p:sp>
       </p:grpSp>
       <p:sp>
         <p:nvSpPr>
-          <p:cNvPr id="4" name="Freeform 4"/>
+          <p:cNvPr id="5" name="TextBox 5"/>
+          <p:cNvSpPr txBox="1"/>
+          <p:nvPr/>
+        </p:nvSpPr>
+        <p:spPr>
+          <a:xfrm>
+            <a:off x="2168938" y="839420"/>
+            <a:ext cx="14366677" cy="930275"/>
+          </a:xfrm>
+          <a:prstGeom prst="rect">
+            <a:avLst/>
+          </a:prstGeom>
+        </p:spPr>
+        <p:txBody>
+          <a:bodyPr lIns="0" tIns="0" rIns="0" bIns="0" rtlCol="0" anchor="t">
+            <a:spAutoFit/>
+          </a:bodyPr>
+          <a:lstStyle/>
+          <a:p>
+            <a:pPr algn="ctr">
+              <a:lnSpc>
+                <a:spcPts val="6999"/>
+              </a:lnSpc>
+              <a:spcBef>
+                <a:spcPct val="0"/>
+              </a:spcBef>
+            </a:pPr>
+            <a:r>
+              <a:rPr lang="en-US" sz="6999" b="1" spc="-384" dirty="0">
+                <a:solidFill>
+                  <a:srgbClr val="FFFFFF"/>
+                </a:solidFill>
+                <a:latin typeface="Work Sans Semi-Bold"/>
+                <a:ea typeface="Work Sans Semi-Bold"/>
+                <a:cs typeface="Work Sans Semi-Bold"/>
+                <a:sym typeface="Work Sans Semi-Bold"/>
+              </a:rPr>
+              <a:t>Hyperparameter Tuning with Optuna</a:t>
+            </a:r>
+          </a:p>
+        </p:txBody>
+      </p:sp>
+      <p:sp>
+        <p:nvSpPr>
+          <p:cNvPr id="6" name="TextBox 6"/>
+          <p:cNvSpPr txBox="1"/>
+          <p:nvPr/>
+        </p:nvSpPr>
+        <p:spPr>
+          <a:xfrm>
+            <a:off x="393095" y="3326179"/>
+            <a:ext cx="8750905" cy="5309017"/>
+          </a:xfrm>
+          <a:prstGeom prst="rect">
+            <a:avLst/>
+          </a:prstGeom>
+        </p:spPr>
+        <p:txBody>
+          <a:bodyPr wrap="square" lIns="0" tIns="0" rIns="0" bIns="0" rtlCol="0" anchor="t">
+            <a:spAutoFit/>
+          </a:bodyPr>
+          <a:lstStyle/>
+          <a:p>
+            <a:pPr algn="l">
+              <a:lnSpc>
+                <a:spcPts val="3249"/>
+              </a:lnSpc>
+            </a:pPr>
+            <a:r>
+              <a:rPr lang="en-US" sz="2499" b="1" spc="-137" dirty="0">
+                <a:solidFill>
+                  <a:srgbClr val="02A8E7"/>
+                </a:solidFill>
+                <a:latin typeface="Work Sans Bold"/>
+                <a:ea typeface="Work Sans Bold"/>
+                <a:cs typeface="Work Sans Bold"/>
+                <a:sym typeface="Work Sans Bold"/>
+              </a:rPr>
+              <a:t>Why Optuna?</a:t>
+            </a:r>
+          </a:p>
+          <a:p>
+            <a:pPr marL="539749" lvl="1" indent="-269875" algn="l">
+              <a:lnSpc>
+                <a:spcPts val="3249"/>
+              </a:lnSpc>
+              <a:buFont typeface="Arial"/>
+              <a:buChar char="•"/>
+            </a:pPr>
+            <a:r>
+              <a:rPr lang="en-US" sz="2499" spc="-137" dirty="0">
+                <a:solidFill>
+                  <a:srgbClr val="FFFFFF"/>
+                </a:solidFill>
+                <a:latin typeface="Work Sans"/>
+                <a:ea typeface="Work Sans"/>
+                <a:cs typeface="Work Sans"/>
+                <a:sym typeface="Work Sans"/>
+              </a:rPr>
+              <a:t>Bayesian optimization - learns from every completed trial, focuses search on promising parameter regions. </a:t>
+            </a:r>
+          </a:p>
+          <a:p>
+            <a:pPr marL="539749" lvl="1" indent="-269875" algn="l">
+              <a:lnSpc>
+                <a:spcPts val="3249"/>
+              </a:lnSpc>
+              <a:buFont typeface="Arial"/>
+              <a:buChar char="•"/>
+            </a:pPr>
+            <a:r>
+              <a:rPr lang="en-US" sz="2499" spc="-137" dirty="0">
+                <a:solidFill>
+                  <a:srgbClr val="FFFFFF"/>
+                </a:solidFill>
+                <a:latin typeface="Work Sans"/>
+                <a:ea typeface="Work Sans"/>
+                <a:cs typeface="Work Sans"/>
+                <a:sym typeface="Work Sans"/>
+              </a:rPr>
+              <a:t>Pruning kills unpromising trials early → finds near-optimal params in 30–100 trials.</a:t>
+            </a:r>
+          </a:p>
+          <a:p>
+            <a:pPr algn="l">
+              <a:lnSpc>
+                <a:spcPts val="3249"/>
+              </a:lnSpc>
+            </a:pPr>
+            <a:r>
+              <a:rPr lang="en-US" sz="2499" b="1" spc="-137" dirty="0">
+                <a:solidFill>
+                  <a:srgbClr val="FFFFFF"/>
+                </a:solidFill>
+                <a:latin typeface="Work Sans Bold"/>
+                <a:ea typeface="Work Sans Bold"/>
+                <a:cs typeface="Work Sans Bold"/>
+                <a:sym typeface="Work Sans Bold"/>
+              </a:rPr>
+              <a:t>Why not alternatives?</a:t>
+            </a:r>
+          </a:p>
+          <a:p>
+            <a:pPr marL="539749" lvl="1" indent="-269875" algn="l">
+              <a:lnSpc>
+                <a:spcPts val="3249"/>
+              </a:lnSpc>
+              <a:buFont typeface="Arial"/>
+              <a:buChar char="•"/>
+            </a:pPr>
+            <a:r>
+              <a:rPr lang="en-US" sz="2499" i="1" spc="-137" dirty="0">
+                <a:solidFill>
+                  <a:srgbClr val="FFFFFF"/>
+                </a:solidFill>
+                <a:latin typeface="Work Sans Italics"/>
+                <a:ea typeface="Work Sans Italics"/>
+                <a:cs typeface="Work Sans Italics"/>
+                <a:sym typeface="Work Sans Italics"/>
+              </a:rPr>
+              <a:t>Grid Search: </a:t>
+            </a:r>
+            <a:r>
+              <a:rPr lang="en-US" sz="2499" spc="-137" dirty="0">
+                <a:solidFill>
+                  <a:srgbClr val="FFFFFF"/>
+                </a:solidFill>
+                <a:latin typeface="Work Sans"/>
+                <a:ea typeface="Work Sans"/>
+                <a:cs typeface="Work Sans"/>
+                <a:sym typeface="Work Sans"/>
+              </a:rPr>
+              <a:t>~60K combinations → computationally impossible with CPU</a:t>
+            </a:r>
+          </a:p>
+          <a:p>
+            <a:pPr marL="539749" lvl="1" indent="-269875" algn="l">
+              <a:lnSpc>
+                <a:spcPts val="3249"/>
+              </a:lnSpc>
+              <a:buFont typeface="Arial"/>
+              <a:buChar char="•"/>
+            </a:pPr>
+            <a:r>
+              <a:rPr lang="en-US" sz="2499" i="1" spc="-137" dirty="0">
+                <a:solidFill>
+                  <a:srgbClr val="FFFFFF"/>
+                </a:solidFill>
+                <a:latin typeface="Work Sans Italics"/>
+                <a:ea typeface="Work Sans Italics"/>
+                <a:cs typeface="Work Sans Italics"/>
+                <a:sym typeface="Work Sans Italics"/>
+              </a:rPr>
+              <a:t>Random Search: </a:t>
+            </a:r>
+            <a:r>
+              <a:rPr lang="en-US" sz="2499" spc="-137" dirty="0">
+                <a:solidFill>
+                  <a:srgbClr val="FFFFFF"/>
+                </a:solidFill>
+                <a:latin typeface="Work Sans"/>
+                <a:ea typeface="Work Sans"/>
+                <a:cs typeface="Work Sans"/>
+                <a:sym typeface="Work Sans"/>
+              </a:rPr>
+              <a:t>no learning between trials → does </a:t>
+            </a:r>
+            <a:r>
+              <a:rPr lang="en-US" sz="2499" u="sng" spc="-137" dirty="0">
+                <a:solidFill>
+                  <a:srgbClr val="FFFFFF"/>
+                </a:solidFill>
+                <a:latin typeface="Work Sans"/>
+                <a:ea typeface="Work Sans"/>
+                <a:cs typeface="Work Sans"/>
+                <a:sym typeface="Work Sans"/>
+              </a:rPr>
+              <a:t>not </a:t>
+            </a:r>
+            <a:r>
+              <a:rPr lang="en-US" sz="2499" spc="-137" dirty="0">
+                <a:solidFill>
+                  <a:srgbClr val="FFFFFF"/>
+                </a:solidFill>
+                <a:latin typeface="Work Sans"/>
+                <a:ea typeface="Work Sans"/>
+                <a:cs typeface="Work Sans"/>
+                <a:sym typeface="Work Sans"/>
+              </a:rPr>
+              <a:t>improve over time</a:t>
+            </a:r>
+          </a:p>
+          <a:p>
+            <a:pPr marL="719666" lvl="2" algn="l">
+              <a:lnSpc>
+                <a:spcPts val="3249"/>
+              </a:lnSpc>
+            </a:pPr>
+            <a:endParaRPr lang="en-US" sz="2499" spc="-137" dirty="0">
+              <a:solidFill>
+                <a:srgbClr val="FFFFFF"/>
+              </a:solidFill>
+              <a:latin typeface="Work Sans"/>
+              <a:ea typeface="Work Sans"/>
+              <a:cs typeface="Work Sans"/>
+              <a:sym typeface="Work Sans"/>
+            </a:endParaRPr>
+          </a:p>
+          <a:p>
+            <a:pPr>
+              <a:lnSpc>
+                <a:spcPts val="3249"/>
+              </a:lnSpc>
+              <a:spcBef>
+                <a:spcPct val="0"/>
+              </a:spcBef>
+            </a:pPr>
+            <a:r>
+              <a:rPr lang="en-US" sz="2499" b="1" spc="-137" dirty="0">
+                <a:solidFill>
+                  <a:srgbClr val="02A8E7"/>
+                </a:solidFill>
+                <a:latin typeface="Work Sans Bold"/>
+                <a:ea typeface="Work Sans Bold"/>
+                <a:cs typeface="Work Sans Bold"/>
+                <a:sym typeface="Work Sans Bold"/>
+              </a:rPr>
+              <a:t>Quality Levels of Optuna (tuning depth control):</a:t>
+            </a:r>
+          </a:p>
+          <a:p>
+            <a:pPr marL="342900" indent="-342900">
+              <a:buFont typeface="Arial" panose="020B0604020202020204" pitchFamily="34" charset="0"/>
+              <a:buChar char="•"/>
+            </a:pPr>
+            <a:r>
+              <a:rPr lang="en-US" sz="2499" spc="-137" dirty="0" err="1">
+                <a:solidFill>
+                  <a:srgbClr val="FFFFFF"/>
+                </a:solidFill>
+                <a:latin typeface="Work Sans"/>
+              </a:rPr>
+              <a:t>med_high</a:t>
+            </a:r>
+            <a:r>
+              <a:rPr lang="en-US" sz="2499" spc="-137" dirty="0">
+                <a:solidFill>
+                  <a:srgbClr val="FFFFFF"/>
+                </a:solidFill>
+                <a:latin typeface="Work Sans"/>
+              </a:rPr>
+              <a:t> — 75% data, ~8–10h per ML-model</a:t>
+            </a:r>
+          </a:p>
+        </p:txBody>
+      </p:sp>
+      <p:sp>
+        <p:nvSpPr>
+          <p:cNvPr id="9" name="TextBox 8">
+            <a:extLst>
+              <a:ext uri="{FF2B5EF4-FFF2-40B4-BE49-F238E27FC236}">
+                <a16:creationId xmlns:a16="http://schemas.microsoft.com/office/drawing/2014/main" id="{A3CCF16F-09A8-9F48-2B81-9E0C619C6EA2}"/>
+              </a:ext>
+            </a:extLst>
+          </p:cNvPr>
+          <p:cNvSpPr txBox="1"/>
+          <p:nvPr/>
+        </p:nvSpPr>
+        <p:spPr>
+          <a:xfrm>
+            <a:off x="9352276" y="3296574"/>
+            <a:ext cx="8304531" cy="6656181"/>
+          </a:xfrm>
+          <a:prstGeom prst="rect">
+            <a:avLst/>
+          </a:prstGeom>
+          <a:noFill/>
+        </p:spPr>
+        <p:txBody>
+          <a:bodyPr wrap="square">
+            <a:spAutoFit/>
+          </a:bodyPr>
+          <a:lstStyle/>
+          <a:p>
+            <a:r>
+              <a:rPr lang="en-US" sz="2499" b="1" spc="-137" dirty="0">
+                <a:solidFill>
+                  <a:srgbClr val="02A8E7"/>
+                </a:solidFill>
+                <a:latin typeface="Work Sans Bold"/>
+              </a:rPr>
+              <a:t>Objective: </a:t>
+            </a:r>
+          </a:p>
+          <a:p>
+            <a:pPr marL="342900" indent="-342900">
+              <a:buFont typeface="Arial" panose="020B0604020202020204" pitchFamily="34" charset="0"/>
+              <a:buChar char="•"/>
+            </a:pPr>
+            <a:r>
+              <a:rPr lang="en-US" sz="2499" spc="-137" dirty="0">
+                <a:solidFill>
+                  <a:srgbClr val="FFFFFF"/>
+                </a:solidFill>
+                <a:latin typeface="Work Sans"/>
+              </a:rPr>
+              <a:t>V2: maximize </a:t>
+            </a:r>
+            <a:r>
+              <a:rPr lang="en-US" sz="2499" b="1" i="1" spc="-137" dirty="0">
+                <a:solidFill>
+                  <a:srgbClr val="FFFFFF"/>
+                </a:solidFill>
+                <a:latin typeface="Work Sans"/>
+              </a:rPr>
+              <a:t>ROC AUC </a:t>
+            </a:r>
+            <a:r>
+              <a:rPr lang="en-US" sz="2499" spc="-137" dirty="0">
+                <a:solidFill>
+                  <a:srgbClr val="FFFFFF"/>
+                </a:solidFill>
+                <a:latin typeface="Work Sans"/>
+              </a:rPr>
+              <a:t>on </a:t>
+            </a:r>
+            <a:r>
+              <a:rPr lang="en-US" sz="2499" spc="-137" dirty="0" err="1">
+                <a:solidFill>
+                  <a:srgbClr val="FFFFFF"/>
+                </a:solidFill>
+                <a:latin typeface="Work Sans"/>
+              </a:rPr>
+              <a:t>val</a:t>
+            </a:r>
+            <a:r>
+              <a:rPr lang="en-US" sz="2499" spc="-137" dirty="0">
+                <a:solidFill>
+                  <a:srgbClr val="FFFFFF"/>
+                </a:solidFill>
+                <a:latin typeface="Work Sans"/>
+              </a:rPr>
+              <a:t>-set (Kaggle's official metric)</a:t>
+            </a:r>
+          </a:p>
+          <a:p>
+            <a:pPr marL="342900" indent="-342900">
+              <a:buFont typeface="Arial" panose="020B0604020202020204" pitchFamily="34" charset="0"/>
+              <a:buChar char="•"/>
+            </a:pPr>
+            <a:r>
+              <a:rPr lang="en-US" sz="2499" spc="-137" dirty="0">
+                <a:solidFill>
+                  <a:srgbClr val="FFFFFF"/>
+                </a:solidFill>
+                <a:latin typeface="Work Sans"/>
+              </a:rPr>
+              <a:t>V3: maximize </a:t>
+            </a:r>
+            <a:r>
+              <a:rPr lang="en-US" sz="2499" b="1" i="1" spc="-137" dirty="0">
+                <a:solidFill>
+                  <a:srgbClr val="FFFFFF"/>
+                </a:solidFill>
+                <a:latin typeface="Work Sans"/>
+              </a:rPr>
+              <a:t>PR AUC </a:t>
+            </a:r>
+            <a:r>
+              <a:rPr lang="en-US" sz="2499" spc="-137" dirty="0">
+                <a:solidFill>
+                  <a:srgbClr val="FFFFFF"/>
+                </a:solidFill>
+                <a:latin typeface="Work Sans"/>
+              </a:rPr>
+              <a:t>(</a:t>
+            </a:r>
+            <a:r>
+              <a:rPr lang="en-US" sz="2499" spc="-137" dirty="0" err="1">
+                <a:solidFill>
+                  <a:srgbClr val="FFFFFF"/>
+                </a:solidFill>
+                <a:latin typeface="Work Sans"/>
+              </a:rPr>
+              <a:t>avg_precision_score</a:t>
+            </a:r>
+            <a:r>
+              <a:rPr lang="en-US" sz="2499" spc="-137" dirty="0">
+                <a:solidFill>
+                  <a:srgbClr val="FFFFFF"/>
+                </a:solidFill>
+                <a:latin typeface="Work Sans"/>
+              </a:rPr>
+              <a:t>) on </a:t>
+            </a:r>
+            <a:r>
+              <a:rPr lang="en-US" sz="2499" spc="-137" dirty="0" err="1">
+                <a:solidFill>
+                  <a:srgbClr val="FFFFFF"/>
+                </a:solidFill>
+                <a:latin typeface="Work Sans"/>
+              </a:rPr>
+              <a:t>val</a:t>
+            </a:r>
+            <a:r>
+              <a:rPr lang="en-US" sz="2499" spc="-137" dirty="0">
+                <a:solidFill>
+                  <a:srgbClr val="FFFFFF"/>
+                </a:solidFill>
+                <a:latin typeface="Work Sans"/>
+              </a:rPr>
+              <a:t>-set</a:t>
+            </a:r>
+          </a:p>
+          <a:p>
+            <a:pPr>
+              <a:buNone/>
+            </a:pPr>
+            <a:endParaRPr lang="en-US" sz="2499" spc="-137" dirty="0">
+              <a:solidFill>
+                <a:srgbClr val="FFFFFF"/>
+              </a:solidFill>
+              <a:latin typeface="Work Sans"/>
+            </a:endParaRPr>
+          </a:p>
+          <a:p>
+            <a:pPr>
+              <a:buNone/>
+            </a:pPr>
+            <a:r>
+              <a:rPr lang="en-US" sz="2499" b="1" spc="-137" dirty="0">
+                <a:solidFill>
+                  <a:srgbClr val="02A8E7"/>
+                </a:solidFill>
+                <a:latin typeface="Work Sans Bold"/>
+              </a:rPr>
+              <a:t>Early stopping for hyperparameters optimization: </a:t>
+            </a:r>
+          </a:p>
+          <a:p>
+            <a:pPr marL="342900" indent="-342900">
+              <a:buFont typeface="Arial" panose="020B0604020202020204" pitchFamily="34" charset="0"/>
+              <a:buChar char="•"/>
+            </a:pPr>
+            <a:r>
+              <a:rPr lang="en-US" sz="2499" spc="-137" dirty="0">
+                <a:solidFill>
+                  <a:srgbClr val="FFFFFF"/>
+                </a:solidFill>
+                <a:latin typeface="Work Sans"/>
+              </a:rPr>
+              <a:t>if </a:t>
+            </a:r>
+            <a:r>
+              <a:rPr lang="en-US" sz="2499" spc="-137" dirty="0" err="1">
+                <a:solidFill>
+                  <a:srgbClr val="FFFFFF"/>
+                </a:solidFill>
+                <a:latin typeface="Work Sans"/>
+              </a:rPr>
+              <a:t>val</a:t>
+            </a:r>
+            <a:r>
+              <a:rPr lang="en-US" sz="2499" spc="-137" dirty="0">
+                <a:solidFill>
+                  <a:srgbClr val="FFFFFF"/>
+                </a:solidFill>
+                <a:latin typeface="Work Sans"/>
+              </a:rPr>
+              <a:t> </a:t>
+            </a:r>
+            <a:r>
+              <a:rPr lang="en-US" sz="2499" b="1" spc="-137" dirty="0">
+                <a:solidFill>
+                  <a:srgbClr val="FFFFFF"/>
+                </a:solidFill>
+                <a:latin typeface="Work Sans"/>
+              </a:rPr>
+              <a:t>optimized metric </a:t>
+            </a:r>
+            <a:r>
+              <a:rPr lang="en-US" sz="2499" spc="-137" dirty="0">
+                <a:solidFill>
+                  <a:srgbClr val="FFFFFF"/>
+                </a:solidFill>
+                <a:latin typeface="Work Sans"/>
+              </a:rPr>
+              <a:t>does not improve for N rounds → trial stops early, saving time</a:t>
+            </a:r>
+          </a:p>
+          <a:p>
+            <a:pPr marL="342900" indent="-342900">
+              <a:buFont typeface="Arial" panose="020B0604020202020204" pitchFamily="34" charset="0"/>
+              <a:buChar char="•"/>
+            </a:pPr>
+            <a:endParaRPr lang="en-US" sz="2499" spc="-137" dirty="0">
+              <a:solidFill>
+                <a:srgbClr val="FFFFFF"/>
+              </a:solidFill>
+              <a:latin typeface="Work Sans"/>
+            </a:endParaRPr>
+          </a:p>
+          <a:p>
+            <a:pPr>
+              <a:lnSpc>
+                <a:spcPts val="3249"/>
+              </a:lnSpc>
+              <a:spcBef>
+                <a:spcPct val="0"/>
+              </a:spcBef>
+            </a:pPr>
+            <a:r>
+              <a:rPr lang="en-US" sz="2499" b="1" spc="-137" dirty="0" err="1">
+                <a:solidFill>
+                  <a:srgbClr val="02A8E7"/>
+                </a:solidFill>
+                <a:latin typeface="Work Sans Bold"/>
+              </a:rPr>
+              <a:t>XGBoost</a:t>
+            </a:r>
+            <a:r>
+              <a:rPr lang="en-US" sz="2499" b="1" spc="-137" dirty="0">
+                <a:solidFill>
+                  <a:srgbClr val="02A8E7"/>
+                </a:solidFill>
+                <a:latin typeface="Work Sans Bold"/>
+              </a:rPr>
+              <a:t> Feature Exposure Fix &amp; Tuning Design: </a:t>
+            </a:r>
+          </a:p>
+          <a:p>
+            <a:pPr marL="342900" indent="-342900">
+              <a:buFont typeface="Arial" panose="020B0604020202020204" pitchFamily="34" charset="0"/>
+              <a:buChar char="•"/>
+            </a:pPr>
+            <a:r>
+              <a:rPr lang="en-US" sz="2499" b="1" spc="-137" dirty="0">
+                <a:solidFill>
+                  <a:srgbClr val="FFFFFF"/>
+                </a:solidFill>
+                <a:latin typeface="Work Sans Bold"/>
+              </a:rPr>
+              <a:t>Optimization for </a:t>
+            </a:r>
+            <a:r>
+              <a:rPr lang="en-US" sz="2499" b="1" spc="-137" dirty="0" err="1">
+                <a:solidFill>
+                  <a:srgbClr val="FFFFFF"/>
+                </a:solidFill>
+                <a:latin typeface="Work Sans Bold"/>
+              </a:rPr>
+              <a:t>XGBoost</a:t>
+            </a:r>
+            <a:r>
+              <a:rPr lang="en-US" sz="2499" b="1" spc="-137" dirty="0">
+                <a:solidFill>
+                  <a:srgbClr val="FFFFFF"/>
+                </a:solidFill>
+                <a:latin typeface="Work Sans Bold"/>
+              </a:rPr>
+              <a:t>:</a:t>
+            </a:r>
+            <a:r>
+              <a:rPr lang="en-US" sz="2499" b="1" spc="-137" dirty="0">
+                <a:solidFill>
+                  <a:srgbClr val="FFFFFF"/>
+                </a:solidFill>
+                <a:latin typeface="Work Sans"/>
+              </a:rPr>
+              <a:t> </a:t>
+            </a:r>
+          </a:p>
+          <a:p>
+            <a:pPr marL="800100" lvl="1" indent="-342900">
+              <a:buFont typeface="Arial" panose="020B0604020202020204" pitchFamily="34" charset="0"/>
+              <a:buChar char="•"/>
+            </a:pPr>
+            <a:r>
+              <a:rPr lang="en-US" sz="2499" i="1" spc="-137" dirty="0" err="1">
+                <a:solidFill>
+                  <a:srgbClr val="FFFFFF"/>
+                </a:solidFill>
+                <a:latin typeface="Work Sans Italics"/>
+              </a:rPr>
+              <a:t>colsample_bytree</a:t>
+            </a:r>
+            <a:r>
+              <a:rPr lang="en-US" sz="2499" i="1" spc="-137" dirty="0">
+                <a:solidFill>
+                  <a:srgbClr val="FFFFFF"/>
+                </a:solidFill>
+                <a:latin typeface="Work Sans Italics"/>
+              </a:rPr>
+              <a:t> </a:t>
+            </a:r>
+            <a:r>
+              <a:rPr lang="en-US" sz="2499" spc="-137" dirty="0">
+                <a:solidFill>
+                  <a:srgbClr val="FFFFFF"/>
+                </a:solidFill>
+                <a:latin typeface="Work Sans"/>
+              </a:rPr>
+              <a:t>search space narrowed to force trees to sample ~20–90 columns (instead of ~180–460), giving 24 engineered features fair exposure vs 336 V-columns (anonymized proprietary features).</a:t>
+            </a:r>
+          </a:p>
+          <a:p>
+            <a:pPr marL="342900" indent="-342900">
+              <a:buFont typeface="Arial" panose="020B0604020202020204" pitchFamily="34" charset="0"/>
+              <a:buChar char="•"/>
+            </a:pPr>
+            <a:r>
+              <a:rPr lang="en-US" sz="2499" spc="-137" dirty="0">
+                <a:solidFill>
+                  <a:srgbClr val="FFFFFF"/>
+                </a:solidFill>
+                <a:latin typeface="Work Sans"/>
+              </a:rPr>
+              <a:t>This is NOT needed for </a:t>
+            </a:r>
+            <a:r>
+              <a:rPr lang="en-US" sz="2499" spc="-137" dirty="0" err="1">
+                <a:solidFill>
+                  <a:srgbClr val="FFFFFF"/>
+                </a:solidFill>
+                <a:latin typeface="Work Sans"/>
+              </a:rPr>
+              <a:t>LightGBM</a:t>
+            </a:r>
+            <a:r>
+              <a:rPr lang="en-US" sz="2499" spc="-137" dirty="0">
+                <a:solidFill>
+                  <a:srgbClr val="FFFFFF"/>
+                </a:solidFill>
+                <a:latin typeface="Work Sans"/>
+              </a:rPr>
+              <a:t> that </a:t>
+            </a:r>
+            <a:r>
+              <a:rPr lang="en-US" sz="2499" u="sng" spc="-137" dirty="0">
+                <a:solidFill>
+                  <a:srgbClr val="FFFFFF"/>
+                </a:solidFill>
+                <a:latin typeface="Work Sans"/>
+              </a:rPr>
+              <a:t>naturally</a:t>
+            </a:r>
+            <a:r>
+              <a:rPr lang="en-US" sz="2499" spc="-137" dirty="0">
+                <a:solidFill>
+                  <a:srgbClr val="FFFFFF"/>
+                </a:solidFill>
+                <a:latin typeface="Work Sans"/>
+              </a:rPr>
+              <a:t> get sufficient exposure by far more splits per tree.</a:t>
+            </a:r>
+          </a:p>
+        </p:txBody>
+      </p:sp>
+      <p:sp>
+        <p:nvSpPr>
+          <p:cNvPr id="12" name="Freeform 4"/>
           <p:cNvSpPr/>
           <p:nvPr/>
         </p:nvSpPr>
         <p:spPr>
           <a:xfrm>
-            <a:off x="13362897" y="7347859"/>
-            <a:ext cx="4824812" cy="2828057"/>
+            <a:off x="152400" y="1045604"/>
+            <a:ext cx="3429000" cy="2061691"/>
           </a:xfrm>
           <a:custGeom>
             <a:avLst/>
@@ -14678,473 +15532,11 @@
             </a:stretch>
           </a:blipFill>
         </p:spPr>
-      </p:sp>
-      <p:sp>
-        <p:nvSpPr>
-          <p:cNvPr id="5" name="TextBox 5"/>
-          <p:cNvSpPr txBox="1"/>
-          <p:nvPr/>
-        </p:nvSpPr>
-        <p:spPr>
-          <a:xfrm>
-            <a:off x="2168936" y="1154113"/>
-            <a:ext cx="14366677" cy="930275"/>
-          </a:xfrm>
-          <a:prstGeom prst="rect">
-            <a:avLst/>
-          </a:prstGeom>
-        </p:spPr>
         <p:txBody>
-          <a:bodyPr lIns="0" tIns="0" rIns="0" bIns="0" rtlCol="0" anchor="t">
-            <a:spAutoFit/>
-          </a:bodyPr>
+          <a:bodyPr/>
           <a:lstStyle/>
           <a:p>
-            <a:pPr algn="ctr">
-              <a:lnSpc>
-                <a:spcPts val="6999"/>
-              </a:lnSpc>
-              <a:spcBef>
-                <a:spcPct val="0"/>
-              </a:spcBef>
-            </a:pPr>
-            <a:r>
-              <a:rPr lang="en-US" sz="6999" b="1" spc="-384">
-                <a:solidFill>
-                  <a:srgbClr val="FFFFFF"/>
-                </a:solidFill>
-                <a:latin typeface="Work Sans Semi-Bold"/>
-                <a:ea typeface="Work Sans Semi-Bold"/>
-                <a:cs typeface="Work Sans Semi-Bold"/>
-                <a:sym typeface="Work Sans Semi-Bold"/>
-              </a:rPr>
-              <a:t>Hyperparameter Tuning with Optuna</a:t>
-            </a:r>
-          </a:p>
-        </p:txBody>
-      </p:sp>
-      <p:sp>
-        <p:nvSpPr>
-          <p:cNvPr id="6" name="TextBox 6"/>
-          <p:cNvSpPr txBox="1"/>
-          <p:nvPr/>
-        </p:nvSpPr>
-        <p:spPr>
-          <a:xfrm>
-            <a:off x="393094" y="3318991"/>
-            <a:ext cx="9664601" cy="4911725"/>
-          </a:xfrm>
-          <a:prstGeom prst="rect">
-            <a:avLst/>
-          </a:prstGeom>
-        </p:spPr>
-        <p:txBody>
-          <a:bodyPr lIns="0" tIns="0" rIns="0" bIns="0" rtlCol="0" anchor="t">
-            <a:spAutoFit/>
-          </a:bodyPr>
-          <a:lstStyle/>
-          <a:p>
-            <a:pPr algn="l">
-              <a:lnSpc>
-                <a:spcPts val="3249"/>
-              </a:lnSpc>
-            </a:pPr>
-            <a:r>
-              <a:rPr lang="en-US" sz="2499" b="1" spc="-137">
-                <a:solidFill>
-                  <a:srgbClr val="02A8E7"/>
-                </a:solidFill>
-                <a:latin typeface="Work Sans Bold"/>
-                <a:ea typeface="Work Sans Bold"/>
-                <a:cs typeface="Work Sans Bold"/>
-                <a:sym typeface="Work Sans Bold"/>
-              </a:rPr>
-              <a:t>Why Optuna?</a:t>
-            </a:r>
-          </a:p>
-          <a:p>
-            <a:pPr marL="539749" lvl="1" indent="-269875" algn="l">
-              <a:lnSpc>
-                <a:spcPts val="3249"/>
-              </a:lnSpc>
-              <a:buFont typeface="Arial"/>
-              <a:buChar char="•"/>
-            </a:pPr>
-            <a:r>
-              <a:rPr lang="en-US" sz="2499" spc="-137">
-                <a:solidFill>
-                  <a:srgbClr val="FFFFFF"/>
-                </a:solidFill>
-                <a:latin typeface="Work Sans"/>
-                <a:ea typeface="Work Sans"/>
-                <a:cs typeface="Work Sans"/>
-                <a:sym typeface="Work Sans"/>
-              </a:rPr>
-              <a:t>Bayesian optimization - learns from every completed trial, focuses search on promising parameter regions. </a:t>
-            </a:r>
-          </a:p>
-          <a:p>
-            <a:pPr marL="539749" lvl="1" indent="-269875" algn="l">
-              <a:lnSpc>
-                <a:spcPts val="3249"/>
-              </a:lnSpc>
-              <a:buFont typeface="Arial"/>
-              <a:buChar char="•"/>
-            </a:pPr>
-            <a:r>
-              <a:rPr lang="en-US" sz="2499" spc="-137">
-                <a:solidFill>
-                  <a:srgbClr val="FFFFFF"/>
-                </a:solidFill>
-                <a:latin typeface="Work Sans"/>
-                <a:ea typeface="Work Sans"/>
-                <a:cs typeface="Work Sans"/>
-                <a:sym typeface="Work Sans"/>
-              </a:rPr>
-              <a:t>Pruning kills unpromising trials early → finds near-optimal params in 30–100 trials.</a:t>
-            </a:r>
-          </a:p>
-          <a:p>
-            <a:pPr algn="l">
-              <a:lnSpc>
-                <a:spcPts val="3249"/>
-              </a:lnSpc>
-            </a:pPr>
-            <a:endParaRPr lang="en-US" sz="2499" spc="-137">
-              <a:solidFill>
-                <a:srgbClr val="FFFFFF"/>
-              </a:solidFill>
-              <a:latin typeface="Work Sans"/>
-              <a:ea typeface="Work Sans"/>
-              <a:cs typeface="Work Sans"/>
-              <a:sym typeface="Work Sans"/>
-            </a:endParaRPr>
-          </a:p>
-          <a:p>
-            <a:pPr algn="l">
-              <a:lnSpc>
-                <a:spcPts val="3249"/>
-              </a:lnSpc>
-            </a:pPr>
-            <a:r>
-              <a:rPr lang="en-US" sz="2499" b="1" spc="-137">
-                <a:solidFill>
-                  <a:srgbClr val="FFFFFF"/>
-                </a:solidFill>
-                <a:latin typeface="Work Sans Bold"/>
-                <a:ea typeface="Work Sans Bold"/>
-                <a:cs typeface="Work Sans Bold"/>
-                <a:sym typeface="Work Sans Bold"/>
-              </a:rPr>
-              <a:t>Why not alternatives?</a:t>
-            </a:r>
-          </a:p>
-          <a:p>
-            <a:pPr marL="539749" lvl="1" indent="-269875" algn="l">
-              <a:lnSpc>
-                <a:spcPts val="3249"/>
-              </a:lnSpc>
-              <a:buFont typeface="Arial"/>
-              <a:buChar char="•"/>
-            </a:pPr>
-            <a:r>
-              <a:rPr lang="en-US" sz="2499" i="1" spc="-137">
-                <a:solidFill>
-                  <a:srgbClr val="FFFFFF"/>
-                </a:solidFill>
-                <a:latin typeface="Work Sans Italics"/>
-                <a:ea typeface="Work Sans Italics"/>
-                <a:cs typeface="Work Sans Italics"/>
-                <a:sym typeface="Work Sans Italics"/>
-              </a:rPr>
-              <a:t>Grid Search: </a:t>
-            </a:r>
-          </a:p>
-          <a:p>
-            <a:pPr marL="1079499" lvl="2" indent="-359833" algn="l">
-              <a:lnSpc>
-                <a:spcPts val="3249"/>
-              </a:lnSpc>
-              <a:buFont typeface="Arial"/>
-              <a:buChar char="⚬"/>
-            </a:pPr>
-            <a:r>
-              <a:rPr lang="en-US" sz="2499" spc="-137">
-                <a:solidFill>
-                  <a:srgbClr val="FFFFFF"/>
-                </a:solidFill>
-                <a:latin typeface="Work Sans"/>
-                <a:ea typeface="Work Sans"/>
-                <a:cs typeface="Work Sans"/>
-                <a:sym typeface="Work Sans"/>
-              </a:rPr>
-              <a:t>~60K combinations → computationally impossible with CPU</a:t>
-            </a:r>
-          </a:p>
-          <a:p>
-            <a:pPr marL="539749" lvl="1" indent="-269875" algn="l">
-              <a:lnSpc>
-                <a:spcPts val="3249"/>
-              </a:lnSpc>
-              <a:buFont typeface="Arial"/>
-              <a:buChar char="•"/>
-            </a:pPr>
-            <a:r>
-              <a:rPr lang="en-US" sz="2499" i="1" spc="-137">
-                <a:solidFill>
-                  <a:srgbClr val="FFFFFF"/>
-                </a:solidFill>
-                <a:latin typeface="Work Sans Italics"/>
-                <a:ea typeface="Work Sans Italics"/>
-                <a:cs typeface="Work Sans Italics"/>
-                <a:sym typeface="Work Sans Italics"/>
-              </a:rPr>
-              <a:t>Random Search: </a:t>
-            </a:r>
-          </a:p>
-          <a:p>
-            <a:pPr marL="1079499" lvl="2" indent="-359833" algn="l">
-              <a:lnSpc>
-                <a:spcPts val="3249"/>
-              </a:lnSpc>
-              <a:buFont typeface="Arial"/>
-              <a:buChar char="⚬"/>
-            </a:pPr>
-            <a:r>
-              <a:rPr lang="en-US" sz="2499" spc="-137">
-                <a:solidFill>
-                  <a:srgbClr val="FFFFFF"/>
-                </a:solidFill>
-                <a:latin typeface="Work Sans"/>
-                <a:ea typeface="Work Sans"/>
-                <a:cs typeface="Work Sans"/>
-                <a:sym typeface="Work Sans"/>
-              </a:rPr>
-              <a:t>no learning between trials → does </a:t>
-            </a:r>
-            <a:r>
-              <a:rPr lang="en-US" sz="2499" u="sng" spc="-137">
-                <a:solidFill>
-                  <a:srgbClr val="FFFFFF"/>
-                </a:solidFill>
-                <a:latin typeface="Work Sans"/>
-                <a:ea typeface="Work Sans"/>
-                <a:cs typeface="Work Sans"/>
-                <a:sym typeface="Work Sans"/>
-              </a:rPr>
-              <a:t>not </a:t>
-            </a:r>
-            <a:r>
-              <a:rPr lang="en-US" sz="2499" spc="-137">
-                <a:solidFill>
-                  <a:srgbClr val="FFFFFF"/>
-                </a:solidFill>
-                <a:latin typeface="Work Sans"/>
-                <a:ea typeface="Work Sans"/>
-                <a:cs typeface="Work Sans"/>
-                <a:sym typeface="Work Sans"/>
-              </a:rPr>
-              <a:t>improve over time</a:t>
-            </a:r>
-          </a:p>
-          <a:p>
-            <a:pPr algn="l">
-              <a:lnSpc>
-                <a:spcPts val="3249"/>
-              </a:lnSpc>
-            </a:pPr>
-            <a:endParaRPr lang="en-US" sz="2499" spc="-137">
-              <a:solidFill>
-                <a:srgbClr val="FFFFFF"/>
-              </a:solidFill>
-              <a:latin typeface="Work Sans"/>
-              <a:ea typeface="Work Sans"/>
-              <a:cs typeface="Work Sans"/>
-              <a:sym typeface="Work Sans"/>
-            </a:endParaRPr>
-          </a:p>
-        </p:txBody>
-      </p:sp>
-      <p:sp>
-        <p:nvSpPr>
-          <p:cNvPr id="7" name="TextBox 7"/>
-          <p:cNvSpPr txBox="1"/>
-          <p:nvPr/>
-        </p:nvSpPr>
-        <p:spPr>
-          <a:xfrm>
-            <a:off x="10831716" y="3318991"/>
-            <a:ext cx="7083773" cy="3273425"/>
-          </a:xfrm>
-          <a:prstGeom prst="rect">
-            <a:avLst/>
-          </a:prstGeom>
-        </p:spPr>
-        <p:txBody>
-          <a:bodyPr lIns="0" tIns="0" rIns="0" bIns="0" rtlCol="0" anchor="t">
-            <a:spAutoFit/>
-          </a:bodyPr>
-          <a:lstStyle/>
-          <a:p>
-            <a:pPr algn="l">
-              <a:lnSpc>
-                <a:spcPts val="3249"/>
-              </a:lnSpc>
-              <a:spcBef>
-                <a:spcPct val="0"/>
-              </a:spcBef>
-            </a:pPr>
-            <a:r>
-              <a:rPr lang="en-US" sz="2499" b="1" strike="noStrike" spc="-137">
-                <a:solidFill>
-                  <a:srgbClr val="02A8E7"/>
-                </a:solidFill>
-                <a:latin typeface="Work Sans Bold"/>
-                <a:ea typeface="Work Sans Bold"/>
-                <a:cs typeface="Work Sans Bold"/>
-                <a:sym typeface="Work Sans Bold"/>
-              </a:rPr>
-              <a:t>Quality Levels of Optuna (tuning depth control):</a:t>
-            </a:r>
-          </a:p>
-          <a:p>
-            <a:pPr marL="539749" lvl="1" indent="-269875" algn="l">
-              <a:lnSpc>
-                <a:spcPts val="3249"/>
-              </a:lnSpc>
-              <a:spcBef>
-                <a:spcPct val="0"/>
-              </a:spcBef>
-              <a:buFont typeface="Arial"/>
-              <a:buChar char="•"/>
-            </a:pPr>
-            <a:r>
-              <a:rPr lang="en-US" sz="2499" strike="noStrike" spc="-137">
-                <a:solidFill>
-                  <a:srgbClr val="FFFFFF"/>
-                </a:solidFill>
-                <a:latin typeface="Work Sans"/>
-                <a:ea typeface="Work Sans"/>
-                <a:cs typeface="Work Sans"/>
-                <a:sym typeface="Work Sans"/>
-              </a:rPr>
-              <a:t>low — 30% data, ~0.7h (for a ML-model)</a:t>
-            </a:r>
-          </a:p>
-          <a:p>
-            <a:pPr marL="539749" lvl="1" indent="-269875" algn="l">
-              <a:lnSpc>
-                <a:spcPts val="3249"/>
-              </a:lnSpc>
-              <a:spcBef>
-                <a:spcPct val="0"/>
-              </a:spcBef>
-              <a:buFont typeface="Arial"/>
-              <a:buChar char="•"/>
-            </a:pPr>
-            <a:r>
-              <a:rPr lang="en-US" sz="2499" strike="noStrike" spc="-137">
-                <a:solidFill>
-                  <a:srgbClr val="FFFFFF"/>
-                </a:solidFill>
-                <a:latin typeface="Work Sans"/>
-                <a:ea typeface="Work Sans"/>
-                <a:cs typeface="Work Sans"/>
-                <a:sym typeface="Work Sans"/>
-              </a:rPr>
-              <a:t>med — 50% data, ~2–3h (for a ML-model)</a:t>
-            </a:r>
-          </a:p>
-          <a:p>
-            <a:pPr marL="539749" lvl="1" indent="-269875" algn="l">
-              <a:lnSpc>
-                <a:spcPts val="3249"/>
-              </a:lnSpc>
-              <a:spcBef>
-                <a:spcPct val="0"/>
-              </a:spcBef>
-              <a:buFont typeface="Arial"/>
-              <a:buChar char="•"/>
-            </a:pPr>
-            <a:r>
-              <a:rPr lang="en-US" sz="2499" strike="noStrike" spc="-137">
-                <a:solidFill>
-                  <a:srgbClr val="FFFFFF"/>
-                </a:solidFill>
-                <a:latin typeface="Work Sans"/>
-                <a:ea typeface="Work Sans"/>
-                <a:cs typeface="Work Sans"/>
-                <a:sym typeface="Work Sans"/>
-              </a:rPr>
-              <a:t>high — 100% data, ~18h (for a ML-model)</a:t>
-            </a:r>
-          </a:p>
-          <a:p>
-            <a:pPr algn="l">
-              <a:lnSpc>
-                <a:spcPts val="3249"/>
-              </a:lnSpc>
-              <a:spcBef>
-                <a:spcPct val="0"/>
-              </a:spcBef>
-            </a:pPr>
-            <a:endParaRPr lang="en-US" sz="2499" strike="noStrike" spc="-137">
-              <a:solidFill>
-                <a:srgbClr val="FFFFFF"/>
-              </a:solidFill>
-              <a:latin typeface="Work Sans"/>
-              <a:ea typeface="Work Sans"/>
-              <a:cs typeface="Work Sans"/>
-              <a:sym typeface="Work Sans"/>
-            </a:endParaRPr>
-          </a:p>
-          <a:p>
-            <a:pPr marL="539749" lvl="1" indent="-269875" algn="l">
-              <a:lnSpc>
-                <a:spcPts val="3249"/>
-              </a:lnSpc>
-              <a:spcBef>
-                <a:spcPct val="0"/>
-              </a:spcBef>
-              <a:buFont typeface="Arial"/>
-              <a:buChar char="•"/>
-            </a:pPr>
-            <a:r>
-              <a:rPr lang="en-US" sz="2499" strike="noStrike" spc="-137">
-                <a:solidFill>
-                  <a:srgbClr val="FFFFFF"/>
-                </a:solidFill>
-                <a:latin typeface="Work Sans"/>
-                <a:ea typeface="Work Sans"/>
-                <a:cs typeface="Work Sans"/>
-                <a:sym typeface="Work Sans"/>
-              </a:rPr>
-              <a:t>Tuning uses a data fraction to find parameters. </a:t>
-            </a:r>
-          </a:p>
-          <a:p>
-            <a:pPr marL="539749" lvl="1" indent="-269875" algn="l">
-              <a:lnSpc>
-                <a:spcPts val="3249"/>
-              </a:lnSpc>
-              <a:spcBef>
-                <a:spcPct val="0"/>
-              </a:spcBef>
-              <a:buFont typeface="Arial"/>
-              <a:buChar char="•"/>
-            </a:pPr>
-            <a:r>
-              <a:rPr lang="en-US" sz="2499" strike="noStrike" spc="-137">
-                <a:solidFill>
-                  <a:srgbClr val="FFFFFF"/>
-                </a:solidFill>
-                <a:latin typeface="Work Sans"/>
-                <a:ea typeface="Work Sans"/>
-                <a:cs typeface="Work Sans"/>
-                <a:sym typeface="Work Sans"/>
-              </a:rPr>
-              <a:t>Final training always uses the full dataset with the found parameters</a:t>
-            </a:r>
+            <a:endParaRPr lang="en-IL"/>
           </a:p>
         </p:txBody>
       </p:sp>
